--- a/5th Sem/Storage Tech/UNIT 3.pptx
+++ b/5th Sem/Storage Tech/UNIT 3.pptx
@@ -4,6 +4,9 @@
   <p:sldMasterIdLst>
     <p:sldMasterId id="2147483648" r:id="rId1"/>
   </p:sldMasterIdLst>
+  <p:notesMasterIdLst>
+    <p:notesMasterId r:id="rId86"/>
+  </p:notesMasterIdLst>
   <p:sldIdLst>
     <p:sldId id="256" r:id="rId2"/>
     <p:sldId id="257" r:id="rId3"/>
@@ -41,7 +44,54 @@
     <p:sldId id="286" r:id="rId35"/>
     <p:sldId id="291" r:id="rId36"/>
     <p:sldId id="292" r:id="rId37"/>
-    <p:sldId id="293" r:id="rId38"/>
+    <p:sldId id="332" r:id="rId38"/>
+    <p:sldId id="293" r:id="rId39"/>
+    <p:sldId id="294" r:id="rId40"/>
+    <p:sldId id="295" r:id="rId41"/>
+    <p:sldId id="296" r:id="rId42"/>
+    <p:sldId id="297" r:id="rId43"/>
+    <p:sldId id="298" r:id="rId44"/>
+    <p:sldId id="299" r:id="rId45"/>
+    <p:sldId id="300" r:id="rId46"/>
+    <p:sldId id="301" r:id="rId47"/>
+    <p:sldId id="302" r:id="rId48"/>
+    <p:sldId id="303" r:id="rId49"/>
+    <p:sldId id="304" r:id="rId50"/>
+    <p:sldId id="305" r:id="rId51"/>
+    <p:sldId id="306" r:id="rId52"/>
+    <p:sldId id="307" r:id="rId53"/>
+    <p:sldId id="308" r:id="rId54"/>
+    <p:sldId id="309" r:id="rId55"/>
+    <p:sldId id="310" r:id="rId56"/>
+    <p:sldId id="311" r:id="rId57"/>
+    <p:sldId id="312" r:id="rId58"/>
+    <p:sldId id="313" r:id="rId59"/>
+    <p:sldId id="314" r:id="rId60"/>
+    <p:sldId id="315" r:id="rId61"/>
+    <p:sldId id="316" r:id="rId62"/>
+    <p:sldId id="317" r:id="rId63"/>
+    <p:sldId id="318" r:id="rId64"/>
+    <p:sldId id="319" r:id="rId65"/>
+    <p:sldId id="320" r:id="rId66"/>
+    <p:sldId id="321" r:id="rId67"/>
+    <p:sldId id="322" r:id="rId68"/>
+    <p:sldId id="323" r:id="rId69"/>
+    <p:sldId id="324" r:id="rId70"/>
+    <p:sldId id="325" r:id="rId71"/>
+    <p:sldId id="326" r:id="rId72"/>
+    <p:sldId id="327" r:id="rId73"/>
+    <p:sldId id="328" r:id="rId74"/>
+    <p:sldId id="329" r:id="rId75"/>
+    <p:sldId id="330" r:id="rId76"/>
+    <p:sldId id="331" r:id="rId77"/>
+    <p:sldId id="333" r:id="rId78"/>
+    <p:sldId id="334" r:id="rId79"/>
+    <p:sldId id="335" r:id="rId80"/>
+    <p:sldId id="336" r:id="rId81"/>
+    <p:sldId id="337" r:id="rId82"/>
+    <p:sldId id="338" r:id="rId83"/>
+    <p:sldId id="339" r:id="rId84"/>
+    <p:sldId id="340" r:id="rId85"/>
   </p:sldIdLst>
   <p:sldSz cx="12192000" cy="6858000"/>
   <p:notesSz cx="6761163" cy="9942513"/>
@@ -148,6 +198,440 @@
 </p:presentation>
 </file>
 
+<file path=ppt/notesMasters/notesMaster1.xml><?xml version="1.0" encoding="utf-8"?>
+<p:notesMaster xmlns:a="http://schemas.openxmlformats.org/drawingml/2006/main" xmlns:r="http://schemas.openxmlformats.org/officeDocument/2006/relationships" xmlns:p="http://schemas.openxmlformats.org/presentationml/2006/main">
+  <p:cSld>
+    <p:bg>
+      <p:bgRef idx="1001">
+        <a:schemeClr val="bg1"/>
+      </p:bgRef>
+    </p:bg>
+    <p:spTree>
+      <p:nvGrpSpPr>
+        <p:cNvPr id="1" name=""/>
+        <p:cNvGrpSpPr/>
+        <p:nvPr/>
+      </p:nvGrpSpPr>
+      <p:grpSpPr>
+        <a:xfrm>
+          <a:off x="0" y="0"/>
+          <a:ext cx="0" cy="0"/>
+          <a:chOff x="0" y="0"/>
+          <a:chExt cx="0" cy="0"/>
+        </a:xfrm>
+      </p:grpSpPr>
+      <p:sp>
+        <p:nvSpPr>
+          <p:cNvPr id="2" name="Header Placeholder 1"/>
+          <p:cNvSpPr>
+            <a:spLocks noGrp="1"/>
+          </p:cNvSpPr>
+          <p:nvPr>
+            <p:ph type="hdr" sz="quarter"/>
+          </p:nvPr>
+        </p:nvSpPr>
+        <p:spPr>
+          <a:xfrm>
+            <a:off x="0" y="0"/>
+            <a:ext cx="2930525" cy="498475"/>
+          </a:xfrm>
+          <a:prstGeom prst="rect">
+            <a:avLst/>
+          </a:prstGeom>
+        </p:spPr>
+        <p:txBody>
+          <a:bodyPr vert="horz" lIns="91440" tIns="45720" rIns="91440" bIns="45720" rtlCol="0"/>
+          <a:lstStyle>
+            <a:lvl1pPr algn="l">
+              <a:defRPr sz="1200"/>
+            </a:lvl1pPr>
+          </a:lstStyle>
+          <a:p>
+            <a:endParaRPr lang="en-IN"/>
+          </a:p>
+        </p:txBody>
+      </p:sp>
+      <p:sp>
+        <p:nvSpPr>
+          <p:cNvPr id="3" name="Date Placeholder 2"/>
+          <p:cNvSpPr>
+            <a:spLocks noGrp="1"/>
+          </p:cNvSpPr>
+          <p:nvPr>
+            <p:ph type="dt" idx="1"/>
+          </p:nvPr>
+        </p:nvSpPr>
+        <p:spPr>
+          <a:xfrm>
+            <a:off x="3829050" y="0"/>
+            <a:ext cx="2930525" cy="498475"/>
+          </a:xfrm>
+          <a:prstGeom prst="rect">
+            <a:avLst/>
+          </a:prstGeom>
+        </p:spPr>
+        <p:txBody>
+          <a:bodyPr vert="horz" lIns="91440" tIns="45720" rIns="91440" bIns="45720" rtlCol="0"/>
+          <a:lstStyle>
+            <a:lvl1pPr algn="r">
+              <a:defRPr sz="1200"/>
+            </a:lvl1pPr>
+          </a:lstStyle>
+          <a:p>
+            <a:fld id="{9E73E939-4292-44C8-B5E5-982BE4DA39DD}" type="datetimeFigureOut">
+              <a:rPr lang="en-IN" smtClean="0"/>
+              <a:t>01-09-2026</a:t>
+            </a:fld>
+            <a:endParaRPr lang="en-IN"/>
+          </a:p>
+        </p:txBody>
+      </p:sp>
+      <p:sp>
+        <p:nvSpPr>
+          <p:cNvPr id="4" name="Slide Image Placeholder 3"/>
+          <p:cNvSpPr>
+            <a:spLocks noGrp="1" noRot="1" noChangeAspect="1"/>
+          </p:cNvSpPr>
+          <p:nvPr>
+            <p:ph type="sldImg" idx="2"/>
+          </p:nvPr>
+        </p:nvSpPr>
+        <p:spPr>
+          <a:xfrm>
+            <a:off x="398463" y="1243013"/>
+            <a:ext cx="5964237" cy="3355975"/>
+          </a:xfrm>
+          <a:prstGeom prst="rect">
+            <a:avLst/>
+          </a:prstGeom>
+          <a:noFill/>
+          <a:ln w="12700">
+            <a:solidFill>
+              <a:prstClr val="black"/>
+            </a:solidFill>
+          </a:ln>
+        </p:spPr>
+        <p:txBody>
+          <a:bodyPr vert="horz" lIns="91440" tIns="45720" rIns="91440" bIns="45720" rtlCol="0" anchor="ctr"/>
+          <a:lstStyle/>
+          <a:p>
+            <a:endParaRPr lang="en-IN"/>
+          </a:p>
+        </p:txBody>
+      </p:sp>
+      <p:sp>
+        <p:nvSpPr>
+          <p:cNvPr id="5" name="Notes Placeholder 4"/>
+          <p:cNvSpPr>
+            <a:spLocks noGrp="1"/>
+          </p:cNvSpPr>
+          <p:nvPr>
+            <p:ph type="body" sz="quarter" idx="3"/>
+          </p:nvPr>
+        </p:nvSpPr>
+        <p:spPr>
+          <a:xfrm>
+            <a:off x="676275" y="4784725"/>
+            <a:ext cx="5408613" cy="3914775"/>
+          </a:xfrm>
+          <a:prstGeom prst="rect">
+            <a:avLst/>
+          </a:prstGeom>
+        </p:spPr>
+        <p:txBody>
+          <a:bodyPr vert="horz" lIns="91440" tIns="45720" rIns="91440" bIns="45720" rtlCol="0"/>
+          <a:lstStyle/>
+          <a:p>
+            <a:pPr lvl="0"/>
+            <a:r>
+              <a:rPr lang="en-US"/>
+              <a:t>Edit Master text styles</a:t>
+            </a:r>
+          </a:p>
+          <a:p>
+            <a:pPr lvl="1"/>
+            <a:r>
+              <a:rPr lang="en-US"/>
+              <a:t>Second level</a:t>
+            </a:r>
+          </a:p>
+          <a:p>
+            <a:pPr lvl="2"/>
+            <a:r>
+              <a:rPr lang="en-US"/>
+              <a:t>Third level</a:t>
+            </a:r>
+          </a:p>
+          <a:p>
+            <a:pPr lvl="3"/>
+            <a:r>
+              <a:rPr lang="en-US"/>
+              <a:t>Fourth level</a:t>
+            </a:r>
+          </a:p>
+          <a:p>
+            <a:pPr lvl="4"/>
+            <a:r>
+              <a:rPr lang="en-US"/>
+              <a:t>Fifth level</a:t>
+            </a:r>
+            <a:endParaRPr lang="en-IN"/>
+          </a:p>
+        </p:txBody>
+      </p:sp>
+      <p:sp>
+        <p:nvSpPr>
+          <p:cNvPr id="6" name="Footer Placeholder 5"/>
+          <p:cNvSpPr>
+            <a:spLocks noGrp="1"/>
+          </p:cNvSpPr>
+          <p:nvPr>
+            <p:ph type="ftr" sz="quarter" idx="4"/>
+          </p:nvPr>
+        </p:nvSpPr>
+        <p:spPr>
+          <a:xfrm>
+            <a:off x="0" y="9444038"/>
+            <a:ext cx="2930525" cy="498475"/>
+          </a:xfrm>
+          <a:prstGeom prst="rect">
+            <a:avLst/>
+          </a:prstGeom>
+        </p:spPr>
+        <p:txBody>
+          <a:bodyPr vert="horz" lIns="91440" tIns="45720" rIns="91440" bIns="45720" rtlCol="0" anchor="b"/>
+          <a:lstStyle>
+            <a:lvl1pPr algn="l">
+              <a:defRPr sz="1200"/>
+            </a:lvl1pPr>
+          </a:lstStyle>
+          <a:p>
+            <a:endParaRPr lang="en-IN"/>
+          </a:p>
+        </p:txBody>
+      </p:sp>
+      <p:sp>
+        <p:nvSpPr>
+          <p:cNvPr id="7" name="Slide Number Placeholder 6"/>
+          <p:cNvSpPr>
+            <a:spLocks noGrp="1"/>
+          </p:cNvSpPr>
+          <p:nvPr>
+            <p:ph type="sldNum" sz="quarter" idx="5"/>
+          </p:nvPr>
+        </p:nvSpPr>
+        <p:spPr>
+          <a:xfrm>
+            <a:off x="3829050" y="9444038"/>
+            <a:ext cx="2930525" cy="498475"/>
+          </a:xfrm>
+          <a:prstGeom prst="rect">
+            <a:avLst/>
+          </a:prstGeom>
+        </p:spPr>
+        <p:txBody>
+          <a:bodyPr vert="horz" lIns="91440" tIns="45720" rIns="91440" bIns="45720" rtlCol="0" anchor="b"/>
+          <a:lstStyle>
+            <a:lvl1pPr algn="r">
+              <a:defRPr sz="1200"/>
+            </a:lvl1pPr>
+          </a:lstStyle>
+          <a:p>
+            <a:fld id="{9ED30795-0347-46D2-9798-0E85252FD549}" type="slidenum">
+              <a:rPr lang="en-IN" smtClean="0"/>
+              <a:t>‹#›</a:t>
+            </a:fld>
+            <a:endParaRPr lang="en-IN"/>
+          </a:p>
+        </p:txBody>
+      </p:sp>
+    </p:spTree>
+    <p:extLst>
+      <p:ext uri="{BB962C8B-B14F-4D97-AF65-F5344CB8AC3E}">
+        <p14:creationId xmlns:p14="http://schemas.microsoft.com/office/powerpoint/2010/main" val="4210723969"/>
+      </p:ext>
+    </p:extLst>
+  </p:cSld>
+  <p:clrMap bg1="lt1" tx1="dk1" bg2="lt2" tx2="dk2" accent1="accent1" accent2="accent2" accent3="accent3" accent4="accent4" accent5="accent5" accent6="accent6" hlink="hlink" folHlink="folHlink"/>
+  <p:notesStyle>
+    <a:lvl1pPr marL="0" algn="l" defTabSz="914400" rtl="0" eaLnBrk="1" latinLnBrk="0" hangingPunct="1">
+      <a:defRPr sz="1200" kern="1200">
+        <a:solidFill>
+          <a:schemeClr val="tx1"/>
+        </a:solidFill>
+        <a:latin typeface="+mn-lt"/>
+        <a:ea typeface="+mn-ea"/>
+        <a:cs typeface="+mn-cs"/>
+      </a:defRPr>
+    </a:lvl1pPr>
+    <a:lvl2pPr marL="457200" algn="l" defTabSz="914400" rtl="0" eaLnBrk="1" latinLnBrk="0" hangingPunct="1">
+      <a:defRPr sz="1200" kern="1200">
+        <a:solidFill>
+          <a:schemeClr val="tx1"/>
+        </a:solidFill>
+        <a:latin typeface="+mn-lt"/>
+        <a:ea typeface="+mn-ea"/>
+        <a:cs typeface="+mn-cs"/>
+      </a:defRPr>
+    </a:lvl2pPr>
+    <a:lvl3pPr marL="914400" algn="l" defTabSz="914400" rtl="0" eaLnBrk="1" latinLnBrk="0" hangingPunct="1">
+      <a:defRPr sz="1200" kern="1200">
+        <a:solidFill>
+          <a:schemeClr val="tx1"/>
+        </a:solidFill>
+        <a:latin typeface="+mn-lt"/>
+        <a:ea typeface="+mn-ea"/>
+        <a:cs typeface="+mn-cs"/>
+      </a:defRPr>
+    </a:lvl3pPr>
+    <a:lvl4pPr marL="1371600" algn="l" defTabSz="914400" rtl="0" eaLnBrk="1" latinLnBrk="0" hangingPunct="1">
+      <a:defRPr sz="1200" kern="1200">
+        <a:solidFill>
+          <a:schemeClr val="tx1"/>
+        </a:solidFill>
+        <a:latin typeface="+mn-lt"/>
+        <a:ea typeface="+mn-ea"/>
+        <a:cs typeface="+mn-cs"/>
+      </a:defRPr>
+    </a:lvl4pPr>
+    <a:lvl5pPr marL="1828800" algn="l" defTabSz="914400" rtl="0" eaLnBrk="1" latinLnBrk="0" hangingPunct="1">
+      <a:defRPr sz="1200" kern="1200">
+        <a:solidFill>
+          <a:schemeClr val="tx1"/>
+        </a:solidFill>
+        <a:latin typeface="+mn-lt"/>
+        <a:ea typeface="+mn-ea"/>
+        <a:cs typeface="+mn-cs"/>
+      </a:defRPr>
+    </a:lvl5pPr>
+    <a:lvl6pPr marL="2286000" algn="l" defTabSz="914400" rtl="0" eaLnBrk="1" latinLnBrk="0" hangingPunct="1">
+      <a:defRPr sz="1200" kern="1200">
+        <a:solidFill>
+          <a:schemeClr val="tx1"/>
+        </a:solidFill>
+        <a:latin typeface="+mn-lt"/>
+        <a:ea typeface="+mn-ea"/>
+        <a:cs typeface="+mn-cs"/>
+      </a:defRPr>
+    </a:lvl6pPr>
+    <a:lvl7pPr marL="2743200" algn="l" defTabSz="914400" rtl="0" eaLnBrk="1" latinLnBrk="0" hangingPunct="1">
+      <a:defRPr sz="1200" kern="1200">
+        <a:solidFill>
+          <a:schemeClr val="tx1"/>
+        </a:solidFill>
+        <a:latin typeface="+mn-lt"/>
+        <a:ea typeface="+mn-ea"/>
+        <a:cs typeface="+mn-cs"/>
+      </a:defRPr>
+    </a:lvl7pPr>
+    <a:lvl8pPr marL="3200400" algn="l" defTabSz="914400" rtl="0" eaLnBrk="1" latinLnBrk="0" hangingPunct="1">
+      <a:defRPr sz="1200" kern="1200">
+        <a:solidFill>
+          <a:schemeClr val="tx1"/>
+        </a:solidFill>
+        <a:latin typeface="+mn-lt"/>
+        <a:ea typeface="+mn-ea"/>
+        <a:cs typeface="+mn-cs"/>
+      </a:defRPr>
+    </a:lvl8pPr>
+    <a:lvl9pPr marL="3657600" algn="l" defTabSz="914400" rtl="0" eaLnBrk="1" latinLnBrk="0" hangingPunct="1">
+      <a:defRPr sz="1200" kern="1200">
+        <a:solidFill>
+          <a:schemeClr val="tx1"/>
+        </a:solidFill>
+        <a:latin typeface="+mn-lt"/>
+        <a:ea typeface="+mn-ea"/>
+        <a:cs typeface="+mn-cs"/>
+      </a:defRPr>
+    </a:lvl9pPr>
+  </p:notesStyle>
+</p:notesMaster>
+</file>
+
+<file path=ppt/notesSlides/notesSlide1.xml><?xml version="1.0" encoding="utf-8"?>
+<p:notes xmlns:a="http://schemas.openxmlformats.org/drawingml/2006/main" xmlns:r="http://schemas.openxmlformats.org/officeDocument/2006/relationships" xmlns:p="http://schemas.openxmlformats.org/presentationml/2006/main">
+  <p:cSld>
+    <p:spTree>
+      <p:nvGrpSpPr>
+        <p:cNvPr id="1" name=""/>
+        <p:cNvGrpSpPr/>
+        <p:nvPr/>
+      </p:nvGrpSpPr>
+      <p:grpSpPr>
+        <a:xfrm>
+          <a:off x="0" y="0"/>
+          <a:ext cx="0" cy="0"/>
+          <a:chOff x="0" y="0"/>
+          <a:chExt cx="0" cy="0"/>
+        </a:xfrm>
+      </p:grpSpPr>
+      <p:sp>
+        <p:nvSpPr>
+          <p:cNvPr id="2" name="Slide Image Placeholder 1"/>
+          <p:cNvSpPr>
+            <a:spLocks noGrp="1" noRot="1" noChangeAspect="1"/>
+          </p:cNvSpPr>
+          <p:nvPr>
+            <p:ph type="sldImg"/>
+          </p:nvPr>
+        </p:nvSpPr>
+        <p:spPr/>
+      </p:sp>
+      <p:sp>
+        <p:nvSpPr>
+          <p:cNvPr id="3" name="Notes Placeholder 2"/>
+          <p:cNvSpPr>
+            <a:spLocks noGrp="1"/>
+          </p:cNvSpPr>
+          <p:nvPr>
+            <p:ph type="body" idx="1"/>
+          </p:nvPr>
+        </p:nvSpPr>
+        <p:spPr/>
+        <p:txBody>
+          <a:bodyPr/>
+          <a:lstStyle/>
+          <a:p>
+            <a:endParaRPr lang="en-IN" dirty="0"/>
+          </a:p>
+        </p:txBody>
+      </p:sp>
+      <p:sp>
+        <p:nvSpPr>
+          <p:cNvPr id="4" name="Slide Number Placeholder 3"/>
+          <p:cNvSpPr>
+            <a:spLocks noGrp="1"/>
+          </p:cNvSpPr>
+          <p:nvPr>
+            <p:ph type="sldNum" sz="quarter" idx="5"/>
+          </p:nvPr>
+        </p:nvSpPr>
+        <p:spPr/>
+        <p:txBody>
+          <a:bodyPr/>
+          <a:lstStyle/>
+          <a:p>
+            <a:fld id="{9ED30795-0347-46D2-9798-0E85252FD549}" type="slidenum">
+              <a:rPr lang="en-IN" smtClean="0"/>
+              <a:t>38</a:t>
+            </a:fld>
+            <a:endParaRPr lang="en-IN"/>
+          </a:p>
+        </p:txBody>
+      </p:sp>
+    </p:spTree>
+    <p:extLst>
+      <p:ext uri="{BB962C8B-B14F-4D97-AF65-F5344CB8AC3E}">
+        <p14:creationId xmlns:p14="http://schemas.microsoft.com/office/powerpoint/2010/main" val="3561851851"/>
+      </p:ext>
+    </p:extLst>
+  </p:cSld>
+  <p:clrMapOvr>
+    <a:masterClrMapping/>
+  </p:clrMapOvr>
+</p:notes>
+</file>
+
 <file path=ppt/slideLayouts/slideLayout1.xml><?xml version="1.0" encoding="utf-8"?>
 <p:sldLayout xmlns:a="http://schemas.openxmlformats.org/drawingml/2006/main" xmlns:r="http://schemas.openxmlformats.org/officeDocument/2006/relationships" xmlns:p="http://schemas.openxmlformats.org/presentationml/2006/main" type="title" preserve="1">
   <p:cSld name="Title Slide">
@@ -305,7 +789,7 @@
           <a:p>
             <a:fld id="{A7C27699-A2F1-46FD-837A-4B563CFD01C4}" type="datetimeFigureOut">
               <a:rPr lang="en-IN" smtClean="0"/>
-              <a:t>12-08-2026</a:t>
+              <a:t>01-09-2026</a:t>
             </a:fld>
             <a:endParaRPr lang="en-IN"/>
           </a:p>
@@ -505,7 +989,7 @@
           <a:p>
             <a:fld id="{A7C27699-A2F1-46FD-837A-4B563CFD01C4}" type="datetimeFigureOut">
               <a:rPr lang="en-IN" smtClean="0"/>
-              <a:t>12-08-2026</a:t>
+              <a:t>01-09-2026</a:t>
             </a:fld>
             <a:endParaRPr lang="en-IN"/>
           </a:p>
@@ -715,7 +1199,7 @@
           <a:p>
             <a:fld id="{A7C27699-A2F1-46FD-837A-4B563CFD01C4}" type="datetimeFigureOut">
               <a:rPr lang="en-IN" smtClean="0"/>
-              <a:t>12-08-2026</a:t>
+              <a:t>01-09-2026</a:t>
             </a:fld>
             <a:endParaRPr lang="en-IN"/>
           </a:p>
@@ -863,31 +1347,36 @@
             <a:normAutofit/>
           </a:bodyPr>
           <a:lstStyle>
-            <a:lvl1pPr>
+            <a:lvl1pPr marL="0" indent="0">
+              <a:buNone/>
               <a:defRPr sz="2500">
                 <a:latin typeface="Times New Roman" panose="02020603050405020304" pitchFamily="18" charset="0"/>
                 <a:cs typeface="Times New Roman" panose="02020603050405020304" pitchFamily="18" charset="0"/>
               </a:defRPr>
             </a:lvl1pPr>
-            <a:lvl2pPr>
+            <a:lvl2pPr marL="457200" indent="0">
+              <a:buNone/>
               <a:defRPr sz="2500">
                 <a:latin typeface="Times New Roman" panose="02020603050405020304" pitchFamily="18" charset="0"/>
                 <a:cs typeface="Times New Roman" panose="02020603050405020304" pitchFamily="18" charset="0"/>
               </a:defRPr>
             </a:lvl2pPr>
-            <a:lvl3pPr>
+            <a:lvl3pPr marL="914400" indent="0">
+              <a:buNone/>
               <a:defRPr sz="2500">
                 <a:latin typeface="Times New Roman" panose="02020603050405020304" pitchFamily="18" charset="0"/>
                 <a:cs typeface="Times New Roman" panose="02020603050405020304" pitchFamily="18" charset="0"/>
               </a:defRPr>
             </a:lvl3pPr>
-            <a:lvl4pPr>
+            <a:lvl4pPr marL="1371600" indent="0">
+              <a:buNone/>
               <a:defRPr sz="2500">
                 <a:latin typeface="Times New Roman" panose="02020603050405020304" pitchFamily="18" charset="0"/>
                 <a:cs typeface="Times New Roman" panose="02020603050405020304" pitchFamily="18" charset="0"/>
               </a:defRPr>
             </a:lvl4pPr>
-            <a:lvl5pPr>
+            <a:lvl5pPr marL="1828800" indent="0">
+              <a:buNone/>
               <a:defRPr sz="2500">
                 <a:latin typeface="Times New Roman" panose="02020603050405020304" pitchFamily="18" charset="0"/>
                 <a:cs typeface="Times New Roman" panose="02020603050405020304" pitchFamily="18" charset="0"/>
@@ -955,7 +1444,7 @@
           <a:p>
             <a:fld id="{A7C27699-A2F1-46FD-837A-4B563CFD01C4}" type="datetimeFigureOut">
               <a:rPr lang="en-IN" smtClean="0"/>
-              <a:t>12-08-2026</a:t>
+              <a:t>01-09-2026</a:t>
             </a:fld>
             <a:endParaRPr lang="en-IN"/>
           </a:p>
@@ -1231,7 +1720,7 @@
           <a:p>
             <a:fld id="{A7C27699-A2F1-46FD-837A-4B563CFD01C4}" type="datetimeFigureOut">
               <a:rPr lang="en-IN" smtClean="0"/>
-              <a:t>12-08-2026</a:t>
+              <a:t>01-09-2026</a:t>
             </a:fld>
             <a:endParaRPr lang="en-IN"/>
           </a:p>
@@ -1499,7 +1988,7 @@
           <a:p>
             <a:fld id="{A7C27699-A2F1-46FD-837A-4B563CFD01C4}" type="datetimeFigureOut">
               <a:rPr lang="en-IN" smtClean="0"/>
-              <a:t>12-08-2026</a:t>
+              <a:t>01-09-2026</a:t>
             </a:fld>
             <a:endParaRPr lang="en-IN"/>
           </a:p>
@@ -1914,7 +2403,7 @@
           <a:p>
             <a:fld id="{A7C27699-A2F1-46FD-837A-4B563CFD01C4}" type="datetimeFigureOut">
               <a:rPr lang="en-IN" smtClean="0"/>
-              <a:t>12-08-2026</a:t>
+              <a:t>01-09-2026</a:t>
             </a:fld>
             <a:endParaRPr lang="en-IN"/>
           </a:p>
@@ -2056,7 +2545,7 @@
           <a:p>
             <a:fld id="{A7C27699-A2F1-46FD-837A-4B563CFD01C4}" type="datetimeFigureOut">
               <a:rPr lang="en-IN" smtClean="0"/>
-              <a:t>12-08-2026</a:t>
+              <a:t>01-09-2026</a:t>
             </a:fld>
             <a:endParaRPr lang="en-IN"/>
           </a:p>
@@ -2169,7 +2658,7 @@
           <a:p>
             <a:fld id="{A7C27699-A2F1-46FD-837A-4B563CFD01C4}" type="datetimeFigureOut">
               <a:rPr lang="en-IN" smtClean="0"/>
-              <a:t>12-08-2026</a:t>
+              <a:t>01-09-2026</a:t>
             </a:fld>
             <a:endParaRPr lang="en-IN"/>
           </a:p>
@@ -2482,7 +2971,7 @@
           <a:p>
             <a:fld id="{A7C27699-A2F1-46FD-837A-4B563CFD01C4}" type="datetimeFigureOut">
               <a:rPr lang="en-IN" smtClean="0"/>
-              <a:t>12-08-2026</a:t>
+              <a:t>01-09-2026</a:t>
             </a:fld>
             <a:endParaRPr lang="en-IN"/>
           </a:p>
@@ -2771,7 +3260,7 @@
           <a:p>
             <a:fld id="{A7C27699-A2F1-46FD-837A-4B563CFD01C4}" type="datetimeFigureOut">
               <a:rPr lang="en-IN" smtClean="0"/>
-              <a:t>12-08-2026</a:t>
+              <a:t>01-09-2026</a:t>
             </a:fld>
             <a:endParaRPr lang="en-IN"/>
           </a:p>
@@ -2938,38 +3427,38 @@
           <a:p>
             <a:pPr lvl="0"/>
             <a:r>
-              <a:rPr lang="en-US"/>
+              <a:rPr lang="en-US" dirty="0"/>
               <a:t>Edit Master text styles</a:t>
             </a:r>
           </a:p>
           <a:p>
             <a:pPr lvl="1"/>
             <a:r>
-              <a:rPr lang="en-US"/>
+              <a:rPr lang="en-US" dirty="0"/>
               <a:t>Second level</a:t>
             </a:r>
           </a:p>
           <a:p>
             <a:pPr lvl="2"/>
             <a:r>
-              <a:rPr lang="en-US"/>
+              <a:rPr lang="en-US" dirty="0"/>
               <a:t>Third level</a:t>
             </a:r>
           </a:p>
           <a:p>
             <a:pPr lvl="3"/>
             <a:r>
-              <a:rPr lang="en-US"/>
+              <a:rPr lang="en-US" dirty="0"/>
               <a:t>Fourth level</a:t>
             </a:r>
           </a:p>
           <a:p>
             <a:pPr lvl="4"/>
             <a:r>
-              <a:rPr lang="en-US"/>
+              <a:rPr lang="en-US" dirty="0"/>
               <a:t>Fifth level</a:t>
             </a:r>
-            <a:endParaRPr lang="en-IN"/>
+            <a:endParaRPr lang="en-IN" dirty="0"/>
           </a:p>
         </p:txBody>
       </p:sp>
@@ -3014,7 +3503,7 @@
           <a:p>
             <a:fld id="{A7C27699-A2F1-46FD-837A-4B563CFD01C4}" type="datetimeFigureOut">
               <a:rPr lang="en-IN" smtClean="0"/>
-              <a:t>12-08-2026</a:t>
+              <a:t>01-09-2026</a:t>
             </a:fld>
             <a:endParaRPr lang="en-IN"/>
           </a:p>
@@ -3152,7 +3641,7 @@
       </a:lvl1pPr>
     </p:titleStyle>
     <p:bodyStyle>
-      <a:lvl1pPr marL="228600" indent="-228600" algn="l" defTabSz="914400" rtl="0" eaLnBrk="1" latinLnBrk="0" hangingPunct="1">
+      <a:lvl1pPr marL="0" indent="0" algn="l" defTabSz="914400" rtl="0" eaLnBrk="1" latinLnBrk="0" hangingPunct="1">
         <a:lnSpc>
           <a:spcPct val="90000"/>
         </a:lnSpc>
@@ -3160,7 +3649,7 @@
           <a:spcPts val="1000"/>
         </a:spcBef>
         <a:buFont typeface="Arial" panose="020B0604020202020204" pitchFamily="34" charset="0"/>
-        <a:buChar char="•"/>
+        <a:buNone/>
         <a:defRPr sz="2800" kern="1200">
           <a:solidFill>
             <a:schemeClr val="tx1"/>
@@ -3170,7 +3659,7 @@
           <a:cs typeface="+mn-cs"/>
         </a:defRPr>
       </a:lvl1pPr>
-      <a:lvl2pPr marL="685800" indent="-228600" algn="l" defTabSz="914400" rtl="0" eaLnBrk="1" latinLnBrk="0" hangingPunct="1">
+      <a:lvl2pPr marL="457200" indent="0" algn="l" defTabSz="914400" rtl="0" eaLnBrk="1" latinLnBrk="0" hangingPunct="1">
         <a:lnSpc>
           <a:spcPct val="90000"/>
         </a:lnSpc>
@@ -3178,7 +3667,7 @@
           <a:spcPts val="500"/>
         </a:spcBef>
         <a:buFont typeface="Arial" panose="020B0604020202020204" pitchFamily="34" charset="0"/>
-        <a:buChar char="•"/>
+        <a:buNone/>
         <a:defRPr sz="2400" kern="1200">
           <a:solidFill>
             <a:schemeClr val="tx1"/>
@@ -3188,7 +3677,7 @@
           <a:cs typeface="+mn-cs"/>
         </a:defRPr>
       </a:lvl2pPr>
-      <a:lvl3pPr marL="1143000" indent="-228600" algn="l" defTabSz="914400" rtl="0" eaLnBrk="1" latinLnBrk="0" hangingPunct="1">
+      <a:lvl3pPr marL="914400" indent="0" algn="l" defTabSz="914400" rtl="0" eaLnBrk="1" latinLnBrk="0" hangingPunct="1">
         <a:lnSpc>
           <a:spcPct val="90000"/>
         </a:lnSpc>
@@ -3196,7 +3685,7 @@
           <a:spcPts val="500"/>
         </a:spcBef>
         <a:buFont typeface="Arial" panose="020B0604020202020204" pitchFamily="34" charset="0"/>
-        <a:buChar char="•"/>
+        <a:buNone/>
         <a:defRPr sz="2000" kern="1200">
           <a:solidFill>
             <a:schemeClr val="tx1"/>
@@ -3206,7 +3695,7 @@
           <a:cs typeface="+mn-cs"/>
         </a:defRPr>
       </a:lvl3pPr>
-      <a:lvl4pPr marL="1600200" indent="-228600" algn="l" defTabSz="914400" rtl="0" eaLnBrk="1" latinLnBrk="0" hangingPunct="1">
+      <a:lvl4pPr marL="1371600" indent="0" algn="l" defTabSz="914400" rtl="0" eaLnBrk="1" latinLnBrk="0" hangingPunct="1">
         <a:lnSpc>
           <a:spcPct val="90000"/>
         </a:lnSpc>
@@ -3214,7 +3703,7 @@
           <a:spcPts val="500"/>
         </a:spcBef>
         <a:buFont typeface="Arial" panose="020B0604020202020204" pitchFamily="34" charset="0"/>
-        <a:buChar char="•"/>
+        <a:buNone/>
         <a:defRPr sz="1800" kern="1200">
           <a:solidFill>
             <a:schemeClr val="tx1"/>
@@ -3224,7 +3713,7 @@
           <a:cs typeface="+mn-cs"/>
         </a:defRPr>
       </a:lvl4pPr>
-      <a:lvl5pPr marL="2057400" indent="-228600" algn="l" defTabSz="914400" rtl="0" eaLnBrk="1" latinLnBrk="0" hangingPunct="1">
+      <a:lvl5pPr marL="1828800" indent="0" algn="l" defTabSz="914400" rtl="0" eaLnBrk="1" latinLnBrk="0" hangingPunct="1">
         <a:lnSpc>
           <a:spcPct val="90000"/>
         </a:lnSpc>
@@ -3232,7 +3721,7 @@
           <a:spcPts val="500"/>
         </a:spcBef>
         <a:buFont typeface="Arial" panose="020B0604020202020204" pitchFamily="34" charset="0"/>
-        <a:buChar char="•"/>
+        <a:buNone/>
         <a:defRPr sz="1800" kern="1200">
           <a:solidFill>
             <a:schemeClr val="tx1"/>
@@ -5006,11 +5495,7 @@
             </a:r>
             <a:r>
               <a:rPr lang="en-IN" dirty="0"/>
-              <a:t>: Software-defined networking - FC SAN components and architecture - FC SAN topologies - link aggregation - and zoning - Virtualization in FC SAN </a:t>
-            </a:r>
-            <a:r>
-              <a:rPr lang="en-IN"/>
-              <a:t>environment.</a:t>
+              <a:t>: Software-defined networking - FC SAN components and architecture - FC SAN topologies - link aggregation - and zoning - Virtualization in FC SAN environment.</a:t>
             </a:r>
           </a:p>
           <a:p>
@@ -5018,10 +5503,9 @@
               <a:buNone/>
             </a:pPr>
             <a:r>
-              <a:rPr lang="en-IN"/>
+              <a:rPr lang="en-IN" dirty="0"/>
               <a:t> </a:t>
             </a:r>
-            <a:endParaRPr lang="en-IN" dirty="0"/>
           </a:p>
           <a:p>
             <a:pPr algn="just"/>
@@ -10438,7 +10922,7 @@
           <p:cNvPr id="2" name="Title 1">
             <a:extLst>
               <a:ext uri="{FF2B5EF4-FFF2-40B4-BE49-F238E27FC236}">
-                <a16:creationId xmlns:a16="http://schemas.microsoft.com/office/drawing/2014/main" id="{17E6960C-B076-453A-B6DD-7259FB049F65}"/>
+                <a16:creationId xmlns:a16="http://schemas.microsoft.com/office/drawing/2014/main" id="{E6BD6F2B-B198-4B50-AB7B-F591F9A4FFC5}"/>
               </a:ext>
             </a:extLst>
           </p:cNvPr>
@@ -10466,6 +10950,119 @@
           <p:cNvPr id="3" name="Content Placeholder 2">
             <a:extLst>
               <a:ext uri="{FF2B5EF4-FFF2-40B4-BE49-F238E27FC236}">
+                <a16:creationId xmlns:a16="http://schemas.microsoft.com/office/drawing/2014/main" id="{84789E79-2705-4125-853E-88C1A46FBE6F}"/>
+              </a:ext>
+            </a:extLst>
+          </p:cNvPr>
+          <p:cNvSpPr>
+            <a:spLocks noGrp="1"/>
+          </p:cNvSpPr>
+          <p:nvPr>
+            <p:ph idx="1"/>
+          </p:nvPr>
+        </p:nvSpPr>
+        <p:spPr/>
+        <p:txBody>
+          <a:bodyPr/>
+          <a:lstStyle/>
+          <a:p>
+            <a:pPr marL="457200" indent="-457200">
+              <a:buFont typeface="+mj-lt"/>
+              <a:buAutoNum type="arabicPeriod"/>
+            </a:pPr>
+            <a:r>
+              <a:rPr lang="en-US" b="1" dirty="0"/>
+              <a:t>Point-to-point Architecture</a:t>
+            </a:r>
+          </a:p>
+          <a:p>
+            <a:pPr marL="457200" indent="-457200">
+              <a:buFont typeface="+mj-lt"/>
+              <a:buAutoNum type="arabicPeriod"/>
+            </a:pPr>
+            <a:r>
+              <a:rPr lang="en-US" b="1" dirty="0"/>
+              <a:t>FC-Arbitrated Loop</a:t>
+            </a:r>
+            <a:endParaRPr lang="en-US" dirty="0"/>
+          </a:p>
+          <a:p>
+            <a:pPr marL="457200" indent="-457200">
+              <a:buFont typeface="+mj-lt"/>
+              <a:buAutoNum type="arabicPeriod"/>
+            </a:pPr>
+            <a:r>
+              <a:rPr lang="en-US" b="1" dirty="0"/>
+              <a:t>FC-Switch</a:t>
+            </a:r>
+            <a:endParaRPr lang="en-IN" dirty="0"/>
+          </a:p>
+        </p:txBody>
+      </p:sp>
+    </p:spTree>
+    <p:extLst>
+      <p:ext uri="{BB962C8B-B14F-4D97-AF65-F5344CB8AC3E}">
+        <p14:creationId xmlns:p14="http://schemas.microsoft.com/office/powerpoint/2010/main" val="966348512"/>
+      </p:ext>
+    </p:extLst>
+  </p:cSld>
+  <p:clrMapOvr>
+    <a:masterClrMapping/>
+  </p:clrMapOvr>
+</p:sld>
+</file>
+
+<file path=ppt/slides/slide38.xml><?xml version="1.0" encoding="utf-8"?>
+<p:sld xmlns:a="http://schemas.openxmlformats.org/drawingml/2006/main" xmlns:r="http://schemas.openxmlformats.org/officeDocument/2006/relationships" xmlns:p="http://schemas.openxmlformats.org/presentationml/2006/main">
+  <p:cSld>
+    <p:spTree>
+      <p:nvGrpSpPr>
+        <p:cNvPr id="1" name=""/>
+        <p:cNvGrpSpPr/>
+        <p:nvPr/>
+      </p:nvGrpSpPr>
+      <p:grpSpPr>
+        <a:xfrm>
+          <a:off x="0" y="0"/>
+          <a:ext cx="0" cy="0"/>
+          <a:chOff x="0" y="0"/>
+          <a:chExt cx="0" cy="0"/>
+        </a:xfrm>
+      </p:grpSpPr>
+      <p:sp>
+        <p:nvSpPr>
+          <p:cNvPr id="2" name="Title 1">
+            <a:extLst>
+              <a:ext uri="{FF2B5EF4-FFF2-40B4-BE49-F238E27FC236}">
+                <a16:creationId xmlns:a16="http://schemas.microsoft.com/office/drawing/2014/main" id="{17E6960C-B076-453A-B6DD-7259FB049F65}"/>
+              </a:ext>
+            </a:extLst>
+          </p:cNvPr>
+          <p:cNvSpPr>
+            <a:spLocks noGrp="1"/>
+          </p:cNvSpPr>
+          <p:nvPr>
+            <p:ph type="title"/>
+          </p:nvPr>
+        </p:nvSpPr>
+        <p:spPr/>
+        <p:txBody>
+          <a:bodyPr/>
+          <a:lstStyle/>
+          <a:p>
+            <a:r>
+              <a:rPr lang="en-US" u="sng" dirty="0"/>
+              <a:t>Point-to-point Architecture:</a:t>
+            </a:r>
+            <a:endParaRPr lang="en-IN" dirty="0"/>
+          </a:p>
+        </p:txBody>
+      </p:sp>
+      <p:sp>
+        <p:nvSpPr>
+          <p:cNvPr id="3" name="Content Placeholder 2">
+            <a:extLst>
+              <a:ext uri="{FF2B5EF4-FFF2-40B4-BE49-F238E27FC236}">
                 <a16:creationId xmlns:a16="http://schemas.microsoft.com/office/drawing/2014/main" id="{C312777B-A00F-4D2F-9DA9-BCCC7B6DAA21}"/>
               </a:ext>
             </a:extLst>
@@ -10477,19 +11074,201 @@
             <p:ph idx="1"/>
           </p:nvPr>
         </p:nvSpPr>
-        <p:spPr/>
+        <p:spPr>
+          <a:xfrm>
+            <a:off x="714910" y="1342739"/>
+            <a:ext cx="10515600" cy="4351338"/>
+          </a:xfrm>
+        </p:spPr>
         <p:txBody>
           <a:bodyPr/>
           <a:lstStyle/>
           <a:p>
+            <a:endParaRPr lang="en-US" dirty="0"/>
+          </a:p>
+          <a:p>
+            <a:r>
+              <a:rPr lang="en-US" dirty="0"/>
+              <a:t>In this configuration, two nodes are connected directly to each other. This configuration provides a dedicated connection for data transmission between nodes. However, the point-to-point configuration offers limited connectivity and scalability and is used in a DAS environment.</a:t>
+            </a:r>
             <a:endParaRPr lang="en-IN" dirty="0"/>
           </a:p>
         </p:txBody>
       </p:sp>
+      <p:pic>
+        <p:nvPicPr>
+          <p:cNvPr id="5" name="Picture 4">
+            <a:extLst>
+              <a:ext uri="{FF2B5EF4-FFF2-40B4-BE49-F238E27FC236}">
+                <a16:creationId xmlns:a16="http://schemas.microsoft.com/office/drawing/2014/main" id="{72BF2FEF-B460-4DD7-A21F-6454B3B6CF89}"/>
+              </a:ext>
+            </a:extLst>
+          </p:cNvPr>
+          <p:cNvPicPr>
+            <a:picLocks noChangeAspect="1"/>
+          </p:cNvPicPr>
+          <p:nvPr/>
+        </p:nvPicPr>
+        <p:blipFill>
+          <a:blip r:embed="rId3">
+            <a:extLst>
+              <a:ext uri="{28A0092B-C50C-407E-A947-70E740481C1C}">
+                <a14:useLocalDpi xmlns:a14="http://schemas.microsoft.com/office/drawing/2010/main" val="0"/>
+              </a:ext>
+            </a:extLst>
+          </a:blip>
+          <a:stretch>
+            <a:fillRect/>
+          </a:stretch>
+        </p:blipFill>
+        <p:spPr>
+          <a:xfrm>
+            <a:off x="2393879" y="3205537"/>
+            <a:ext cx="7543371" cy="3205537"/>
+          </a:xfrm>
+          <a:prstGeom prst="rect">
+            <a:avLst/>
+          </a:prstGeom>
+        </p:spPr>
+      </p:pic>
     </p:spTree>
     <p:extLst>
       <p:ext uri="{BB962C8B-B14F-4D97-AF65-F5344CB8AC3E}">
         <p14:creationId xmlns:p14="http://schemas.microsoft.com/office/powerpoint/2010/main" val="1971065208"/>
+      </p:ext>
+    </p:extLst>
+  </p:cSld>
+  <p:clrMapOvr>
+    <a:masterClrMapping/>
+  </p:clrMapOvr>
+</p:sld>
+</file>
+
+<file path=ppt/slides/slide39.xml><?xml version="1.0" encoding="utf-8"?>
+<p:sld xmlns:a="http://schemas.openxmlformats.org/drawingml/2006/main" xmlns:r="http://schemas.openxmlformats.org/officeDocument/2006/relationships" xmlns:p="http://schemas.openxmlformats.org/presentationml/2006/main">
+  <p:cSld>
+    <p:spTree>
+      <p:nvGrpSpPr>
+        <p:cNvPr id="1" name=""/>
+        <p:cNvGrpSpPr/>
+        <p:nvPr/>
+      </p:nvGrpSpPr>
+      <p:grpSpPr>
+        <a:xfrm>
+          <a:off x="0" y="0"/>
+          <a:ext cx="0" cy="0"/>
+          <a:chOff x="0" y="0"/>
+          <a:chExt cx="0" cy="0"/>
+        </a:xfrm>
+      </p:grpSpPr>
+      <p:sp>
+        <p:nvSpPr>
+          <p:cNvPr id="2" name="Title 1">
+            <a:extLst>
+              <a:ext uri="{FF2B5EF4-FFF2-40B4-BE49-F238E27FC236}">
+                <a16:creationId xmlns:a16="http://schemas.microsoft.com/office/drawing/2014/main" id="{069EF806-F14E-4496-BD40-69BE8F79177F}"/>
+              </a:ext>
+            </a:extLst>
+          </p:cNvPr>
+          <p:cNvSpPr>
+            <a:spLocks noGrp="1"/>
+          </p:cNvSpPr>
+          <p:nvPr>
+            <p:ph type="title"/>
+          </p:nvPr>
+        </p:nvSpPr>
+        <p:spPr/>
+        <p:txBody>
+          <a:bodyPr/>
+          <a:lstStyle/>
+          <a:p>
+            <a:r>
+              <a:rPr lang="en-US" u="sng" dirty="0"/>
+              <a:t>FC-Arbitrated Loop</a:t>
+            </a:r>
+            <a:r>
+              <a:rPr lang="en-US" dirty="0"/>
+              <a:t>:</a:t>
+            </a:r>
+            <a:endParaRPr lang="en-IN" dirty="0"/>
+          </a:p>
+        </p:txBody>
+      </p:sp>
+      <p:sp>
+        <p:nvSpPr>
+          <p:cNvPr id="3" name="Content Placeholder 2">
+            <a:extLst>
+              <a:ext uri="{FF2B5EF4-FFF2-40B4-BE49-F238E27FC236}">
+                <a16:creationId xmlns:a16="http://schemas.microsoft.com/office/drawing/2014/main" id="{8ECE2452-5464-43E5-947D-75354DF97E55}"/>
+              </a:ext>
+            </a:extLst>
+          </p:cNvPr>
+          <p:cNvSpPr>
+            <a:spLocks noGrp="1"/>
+          </p:cNvSpPr>
+          <p:nvPr>
+            <p:ph idx="1"/>
+          </p:nvPr>
+        </p:nvSpPr>
+        <p:spPr>
+          <a:xfrm>
+            <a:off x="838200" y="1435207"/>
+            <a:ext cx="10515600" cy="5057668"/>
+          </a:xfrm>
+        </p:spPr>
+        <p:txBody>
+          <a:bodyPr/>
+          <a:lstStyle/>
+          <a:p>
+            <a:pPr algn="just"/>
+            <a:r>
+              <a:rPr lang="en-US" dirty="0"/>
+              <a:t>In this configuration, the devices are attached to a shared loop. Each device contends with other devices to perform I/O operations. The devices on the loop must “arbitrate” to gain control of the loop. At any given time, only one device can perform I/O operations on the loop. Because each device in a loop must wait for its turn to process an I/O request, the overall performance in FC-AL environments is low. </a:t>
+            </a:r>
+            <a:endParaRPr lang="en-IN" dirty="0"/>
+          </a:p>
+        </p:txBody>
+      </p:sp>
+      <p:pic>
+        <p:nvPicPr>
+          <p:cNvPr id="5" name="Picture 4">
+            <a:extLst>
+              <a:ext uri="{FF2B5EF4-FFF2-40B4-BE49-F238E27FC236}">
+                <a16:creationId xmlns:a16="http://schemas.microsoft.com/office/drawing/2014/main" id="{26B7D4F7-AF4C-438C-B740-670B235F424D}"/>
+              </a:ext>
+            </a:extLst>
+          </p:cNvPr>
+          <p:cNvPicPr>
+            <a:picLocks noChangeAspect="1"/>
+          </p:cNvPicPr>
+          <p:nvPr/>
+        </p:nvPicPr>
+        <p:blipFill>
+          <a:blip r:embed="rId2">
+            <a:extLst>
+              <a:ext uri="{28A0092B-C50C-407E-A947-70E740481C1C}">
+                <a14:useLocalDpi xmlns:a14="http://schemas.microsoft.com/office/drawing/2010/main" val="0"/>
+              </a:ext>
+            </a:extLst>
+          </a:blip>
+          <a:stretch>
+            <a:fillRect/>
+          </a:stretch>
+        </p:blipFill>
+        <p:spPr>
+          <a:xfrm>
+            <a:off x="2393950" y="3550149"/>
+            <a:ext cx="7404100" cy="2819400"/>
+          </a:xfrm>
+          <a:prstGeom prst="rect">
+            <a:avLst/>
+          </a:prstGeom>
+        </p:spPr>
+      </p:pic>
+    </p:spTree>
+    <p:extLst>
+      <p:ext uri="{BB962C8B-B14F-4D97-AF65-F5344CB8AC3E}">
+        <p14:creationId xmlns:p14="http://schemas.microsoft.com/office/powerpoint/2010/main" val="1203909161"/>
       </p:ext>
     </p:extLst>
   </p:cSld>
@@ -10635,6 +11414,1992 @@
 </p:sld>
 </file>
 
+<file path=ppt/slides/slide40.xml><?xml version="1.0" encoding="utf-8"?>
+<p:sld xmlns:a="http://schemas.openxmlformats.org/drawingml/2006/main" xmlns:r="http://schemas.openxmlformats.org/officeDocument/2006/relationships" xmlns:p="http://schemas.openxmlformats.org/presentationml/2006/main">
+  <p:cSld>
+    <p:spTree>
+      <p:nvGrpSpPr>
+        <p:cNvPr id="1" name=""/>
+        <p:cNvGrpSpPr/>
+        <p:nvPr/>
+      </p:nvGrpSpPr>
+      <p:grpSpPr>
+        <a:xfrm>
+          <a:off x="0" y="0"/>
+          <a:ext cx="0" cy="0"/>
+          <a:chOff x="0" y="0"/>
+          <a:chExt cx="0" cy="0"/>
+        </a:xfrm>
+      </p:grpSpPr>
+      <p:sp>
+        <p:nvSpPr>
+          <p:cNvPr id="2" name="Title 1">
+            <a:extLst>
+              <a:ext uri="{FF2B5EF4-FFF2-40B4-BE49-F238E27FC236}">
+                <a16:creationId xmlns:a16="http://schemas.microsoft.com/office/drawing/2014/main" id="{293F5F00-EA1B-4A8E-B736-209150D9FE43}"/>
+              </a:ext>
+            </a:extLst>
+          </p:cNvPr>
+          <p:cNvSpPr>
+            <a:spLocks noGrp="1"/>
+          </p:cNvSpPr>
+          <p:nvPr>
+            <p:ph type="title"/>
+          </p:nvPr>
+        </p:nvSpPr>
+        <p:spPr/>
+        <p:txBody>
+          <a:bodyPr/>
+          <a:lstStyle/>
+          <a:p>
+            <a:r>
+              <a:rPr lang="en-US" u="sng" dirty="0"/>
+              <a:t>FC-Arbitrated Loop</a:t>
+            </a:r>
+            <a:endParaRPr lang="en-IN" dirty="0"/>
+          </a:p>
+        </p:txBody>
+      </p:sp>
+      <p:sp>
+        <p:nvSpPr>
+          <p:cNvPr id="3" name="Content Placeholder 2">
+            <a:extLst>
+              <a:ext uri="{FF2B5EF4-FFF2-40B4-BE49-F238E27FC236}">
+                <a16:creationId xmlns:a16="http://schemas.microsoft.com/office/drawing/2014/main" id="{9392B1BF-C147-4AD1-9AF7-B90ECEEB9D25}"/>
+              </a:ext>
+            </a:extLst>
+          </p:cNvPr>
+          <p:cNvSpPr>
+            <a:spLocks noGrp="1"/>
+          </p:cNvSpPr>
+          <p:nvPr>
+            <p:ph idx="1"/>
+          </p:nvPr>
+        </p:nvSpPr>
+        <p:spPr/>
+        <p:txBody>
+          <a:bodyPr/>
+          <a:lstStyle/>
+          <a:p>
+            <a:pPr algn="just"/>
+            <a:r>
+              <a:rPr lang="en-US" dirty="0"/>
+              <a:t>Further, adding or removing a device results in loop re-initialization, which can cause a momentary pause in loop traffic. As a loop configuration, FC-AL can be implemented without any interconnecting devices by directly connecting one device to another two devices in a ring through cables. However, FC-AL implementations may also use FC hubs through which the arbitrated loop is physically connected in a star topology.</a:t>
+            </a:r>
+            <a:endParaRPr lang="en-IN" dirty="0"/>
+          </a:p>
+        </p:txBody>
+      </p:sp>
+    </p:spTree>
+    <p:extLst>
+      <p:ext uri="{BB962C8B-B14F-4D97-AF65-F5344CB8AC3E}">
+        <p14:creationId xmlns:p14="http://schemas.microsoft.com/office/powerpoint/2010/main" val="3487468884"/>
+      </p:ext>
+    </p:extLst>
+  </p:cSld>
+  <p:clrMapOvr>
+    <a:masterClrMapping/>
+  </p:clrMapOvr>
+</p:sld>
+</file>
+
+<file path=ppt/slides/slide41.xml><?xml version="1.0" encoding="utf-8"?>
+<p:sld xmlns:a="http://schemas.openxmlformats.org/drawingml/2006/main" xmlns:r="http://schemas.openxmlformats.org/officeDocument/2006/relationships" xmlns:p="http://schemas.openxmlformats.org/presentationml/2006/main">
+  <p:cSld>
+    <p:spTree>
+      <p:nvGrpSpPr>
+        <p:cNvPr id="1" name=""/>
+        <p:cNvGrpSpPr/>
+        <p:nvPr/>
+      </p:nvGrpSpPr>
+      <p:grpSpPr>
+        <a:xfrm>
+          <a:off x="0" y="0"/>
+          <a:ext cx="0" cy="0"/>
+          <a:chOff x="0" y="0"/>
+          <a:chExt cx="0" cy="0"/>
+        </a:xfrm>
+      </p:grpSpPr>
+      <p:sp>
+        <p:nvSpPr>
+          <p:cNvPr id="2" name="Title 1">
+            <a:extLst>
+              <a:ext uri="{FF2B5EF4-FFF2-40B4-BE49-F238E27FC236}">
+                <a16:creationId xmlns:a16="http://schemas.microsoft.com/office/drawing/2014/main" id="{1ED38AE3-1A3D-4F1B-ADDF-7EBB0FEF3A26}"/>
+              </a:ext>
+            </a:extLst>
+          </p:cNvPr>
+          <p:cNvSpPr>
+            <a:spLocks noGrp="1"/>
+          </p:cNvSpPr>
+          <p:nvPr>
+            <p:ph type="title"/>
+          </p:nvPr>
+        </p:nvSpPr>
+        <p:spPr>
+          <a:xfrm>
+            <a:off x="838200" y="313754"/>
+            <a:ext cx="10515600" cy="1325563"/>
+          </a:xfrm>
+        </p:spPr>
+        <p:txBody>
+          <a:bodyPr/>
+          <a:lstStyle/>
+          <a:p>
+            <a:r>
+              <a:rPr lang="en-US" u="sng" dirty="0"/>
+              <a:t>FC-Switch:</a:t>
+            </a:r>
+            <a:endParaRPr lang="en-IN" dirty="0"/>
+          </a:p>
+        </p:txBody>
+      </p:sp>
+      <p:sp>
+        <p:nvSpPr>
+          <p:cNvPr id="3" name="Content Placeholder 2">
+            <a:extLst>
+              <a:ext uri="{FF2B5EF4-FFF2-40B4-BE49-F238E27FC236}">
+                <a16:creationId xmlns:a16="http://schemas.microsoft.com/office/drawing/2014/main" id="{17778E61-A010-4824-8397-FA981010C7C2}"/>
+              </a:ext>
+            </a:extLst>
+          </p:cNvPr>
+          <p:cNvSpPr>
+            <a:spLocks noGrp="1"/>
+          </p:cNvSpPr>
+          <p:nvPr>
+            <p:ph idx="1"/>
+          </p:nvPr>
+        </p:nvSpPr>
+        <p:spPr>
+          <a:xfrm>
+            <a:off x="910119" y="1466030"/>
+            <a:ext cx="10515600" cy="4351338"/>
+          </a:xfrm>
+        </p:spPr>
+        <p:txBody>
+          <a:bodyPr/>
+          <a:lstStyle/>
+          <a:p>
+            <a:pPr algn="just"/>
+            <a:r>
+              <a:rPr lang="en-US" dirty="0"/>
+              <a:t>It involves a single FC switch or a network of FC switches (including FC directors) to interconnect the nodes. It is also referred to as fabric connect. A fabric is a logical space in which all nodes communicate with one another in a network. In a fabric, the link between any two switches is called an Interswitch link (ISL). ISLs enable switches to be connected together to form a single, larger fabric. </a:t>
+            </a:r>
+            <a:endParaRPr lang="en-IN" dirty="0"/>
+          </a:p>
+        </p:txBody>
+      </p:sp>
+      <p:pic>
+        <p:nvPicPr>
+          <p:cNvPr id="7" name="Picture 6">
+            <a:extLst>
+              <a:ext uri="{FF2B5EF4-FFF2-40B4-BE49-F238E27FC236}">
+                <a16:creationId xmlns:a16="http://schemas.microsoft.com/office/drawing/2014/main" id="{0756EC1C-D299-4F13-A436-786CC1F62BC1}"/>
+              </a:ext>
+            </a:extLst>
+          </p:cNvPr>
+          <p:cNvPicPr>
+            <a:picLocks noChangeAspect="1"/>
+          </p:cNvPicPr>
+          <p:nvPr/>
+        </p:nvPicPr>
+        <p:blipFill>
+          <a:blip r:embed="rId2">
+            <a:extLst>
+              <a:ext uri="{28A0092B-C50C-407E-A947-70E740481C1C}">
+                <a14:useLocalDpi xmlns:a14="http://schemas.microsoft.com/office/drawing/2010/main" val="0"/>
+              </a:ext>
+            </a:extLst>
+          </a:blip>
+          <a:stretch>
+            <a:fillRect/>
+          </a:stretch>
+        </p:blipFill>
+        <p:spPr>
+          <a:xfrm>
+            <a:off x="2730357" y="4001294"/>
+            <a:ext cx="7162800" cy="2717800"/>
+          </a:xfrm>
+          <a:prstGeom prst="rect">
+            <a:avLst/>
+          </a:prstGeom>
+        </p:spPr>
+      </p:pic>
+    </p:spTree>
+    <p:extLst>
+      <p:ext uri="{BB962C8B-B14F-4D97-AF65-F5344CB8AC3E}">
+        <p14:creationId xmlns:p14="http://schemas.microsoft.com/office/powerpoint/2010/main" val="2639644805"/>
+      </p:ext>
+    </p:extLst>
+  </p:cSld>
+  <p:clrMapOvr>
+    <a:masterClrMapping/>
+  </p:clrMapOvr>
+</p:sld>
+</file>
+
+<file path=ppt/slides/slide42.xml><?xml version="1.0" encoding="utf-8"?>
+<p:sld xmlns:a="http://schemas.openxmlformats.org/drawingml/2006/main" xmlns:r="http://schemas.openxmlformats.org/officeDocument/2006/relationships" xmlns:p="http://schemas.openxmlformats.org/presentationml/2006/main">
+  <p:cSld>
+    <p:spTree>
+      <p:nvGrpSpPr>
+        <p:cNvPr id="1" name=""/>
+        <p:cNvGrpSpPr/>
+        <p:nvPr/>
+      </p:nvGrpSpPr>
+      <p:grpSpPr>
+        <a:xfrm>
+          <a:off x="0" y="0"/>
+          <a:ext cx="0" cy="0"/>
+          <a:chOff x="0" y="0"/>
+          <a:chExt cx="0" cy="0"/>
+        </a:xfrm>
+      </p:grpSpPr>
+      <p:sp>
+        <p:nvSpPr>
+          <p:cNvPr id="2" name="Title 1">
+            <a:extLst>
+              <a:ext uri="{FF2B5EF4-FFF2-40B4-BE49-F238E27FC236}">
+                <a16:creationId xmlns:a16="http://schemas.microsoft.com/office/drawing/2014/main" id="{C0FD7B0F-FAFE-4BAB-ADCE-0EFDA459CABF}"/>
+              </a:ext>
+            </a:extLst>
+          </p:cNvPr>
+          <p:cNvSpPr>
+            <a:spLocks noGrp="1"/>
+          </p:cNvSpPr>
+          <p:nvPr>
+            <p:ph type="title"/>
+          </p:nvPr>
+        </p:nvSpPr>
+        <p:spPr/>
+        <p:txBody>
+          <a:bodyPr/>
+          <a:lstStyle/>
+          <a:p>
+            <a:r>
+              <a:rPr lang="en-US" u="sng" dirty="0"/>
+              <a:t>FC-Switch</a:t>
+            </a:r>
+            <a:endParaRPr lang="en-IN" dirty="0"/>
+          </a:p>
+        </p:txBody>
+      </p:sp>
+      <p:sp>
+        <p:nvSpPr>
+          <p:cNvPr id="4" name="Rectangle 1">
+            <a:extLst>
+              <a:ext uri="{FF2B5EF4-FFF2-40B4-BE49-F238E27FC236}">
+                <a16:creationId xmlns:a16="http://schemas.microsoft.com/office/drawing/2014/main" id="{8C68AAB1-4BA5-464E-BE5B-1A8BF122BFF2}"/>
+              </a:ext>
+            </a:extLst>
+          </p:cNvPr>
+          <p:cNvSpPr>
+            <a:spLocks noGrp="1" noChangeArrowheads="1"/>
+          </p:cNvSpPr>
+          <p:nvPr>
+            <p:ph idx="1"/>
+          </p:nvPr>
+        </p:nvSpPr>
+        <p:spPr bwMode="auto">
+          <a:xfrm>
+            <a:off x="838200" y="1690688"/>
+            <a:ext cx="10357884" cy="4324261"/>
+          </a:xfrm>
+          <a:prstGeom prst="rect">
+            <a:avLst/>
+          </a:prstGeom>
+          <a:noFill/>
+          <a:ln>
+            <a:noFill/>
+          </a:ln>
+          <a:effectLst/>
+          <a:extLst>
+            <a:ext uri="{909E8E84-426E-40DD-AFC4-6F175D3DCCD1}">
+              <a14:hiddenFill xmlns:a14="http://schemas.microsoft.com/office/drawing/2010/main">
+                <a:solidFill>
+                  <a:schemeClr val="accent1"/>
+                </a:solidFill>
+              </a14:hiddenFill>
+            </a:ext>
+            <a:ext uri="{91240B29-F687-4F45-9708-019B960494DF}">
+              <a14:hiddenLine xmlns:a14="http://schemas.microsoft.com/office/drawing/2010/main" w="9525">
+                <a:solidFill>
+                  <a:schemeClr val="tx1"/>
+                </a:solidFill>
+                <a:miter lim="800000"/>
+                <a:headEnd/>
+                <a:tailEnd/>
+              </a14:hiddenLine>
+            </a:ext>
+            <a:ext uri="{AF507438-7753-43E0-B8FC-AC1667EBCBE1}">
+              <a14:hiddenEffects xmlns:a14="http://schemas.microsoft.com/office/drawing/2010/main">
+                <a:effectLst>
+                  <a:outerShdw dist="35921" dir="2700000" algn="ctr" rotWithShape="0">
+                    <a:schemeClr val="bg2"/>
+                  </a:outerShdw>
+                </a:effectLst>
+              </a14:hiddenEffects>
+            </a:ext>
+          </a:extLst>
+        </p:spPr>
+        <p:txBody>
+          <a:bodyPr vert="horz" wrap="square" lIns="91440" tIns="45720" rIns="91440" bIns="45720" numCol="1" anchor="ctr" anchorCtr="0" compatLnSpc="1">
+            <a:prstTxWarp prst="textNoShape">
+              <a:avLst/>
+            </a:prstTxWarp>
+            <a:spAutoFit/>
+          </a:bodyPr>
+          <a:lstStyle/>
+          <a:p>
+            <a:pPr marL="0" marR="0" lvl="0" indent="0" algn="l" defTabSz="914400" rtl="0" eaLnBrk="0" fontAlgn="base" latinLnBrk="0" hangingPunct="0">
+              <a:lnSpc>
+                <a:spcPct val="100000"/>
+              </a:lnSpc>
+              <a:spcBef>
+                <a:spcPct val="0"/>
+              </a:spcBef>
+              <a:spcAft>
+                <a:spcPct val="0"/>
+              </a:spcAft>
+              <a:buClrTx/>
+              <a:buSzTx/>
+              <a:buNone/>
+              <a:tabLst/>
+            </a:pPr>
+            <a:r>
+              <a:rPr kumimoji="0" lang="en-US" altLang="en-US" b="1" i="0" u="none" strike="noStrike" cap="none" normalizeH="0" baseline="0" dirty="0">
+                <a:ln>
+                  <a:noFill/>
+                </a:ln>
+                <a:solidFill>
+                  <a:schemeClr val="tx1"/>
+                </a:solidFill>
+                <a:effectLst/>
+              </a:rPr>
+              <a:t>Direct Communication:</a:t>
+            </a:r>
+            <a:br>
+              <a:rPr kumimoji="0" lang="en-US" altLang="en-US" b="0" i="0" u="none" strike="noStrike" cap="none" normalizeH="0" baseline="0" dirty="0">
+                <a:ln>
+                  <a:noFill/>
+                </a:ln>
+                <a:solidFill>
+                  <a:schemeClr val="tx1"/>
+                </a:solidFill>
+                <a:effectLst/>
+              </a:rPr>
+            </a:br>
+            <a:r>
+              <a:rPr kumimoji="0" lang="en-US" altLang="en-US" b="0" i="0" u="none" strike="noStrike" cap="none" normalizeH="0" baseline="0" dirty="0">
+                <a:ln>
+                  <a:noFill/>
+                </a:ln>
+                <a:solidFill>
+                  <a:schemeClr val="tx1"/>
+                </a:solidFill>
+                <a:effectLst/>
+              </a:rPr>
+              <a:t>In an FC-SW (Fibre Channel Switched Fabric), each node communicates through a </a:t>
+            </a:r>
+            <a:r>
+              <a:rPr kumimoji="0" lang="en-US" altLang="en-US" b="1" i="0" u="none" strike="noStrike" cap="none" normalizeH="0" baseline="0" dirty="0">
+                <a:ln>
+                  <a:noFill/>
+                </a:ln>
+                <a:solidFill>
+                  <a:schemeClr val="tx1"/>
+                </a:solidFill>
+                <a:effectLst/>
+              </a:rPr>
+              <a:t>dedicated path using switches</a:t>
+            </a:r>
+            <a:r>
+              <a:rPr kumimoji="0" lang="en-US" altLang="en-US" b="0" i="0" u="none" strike="noStrike" cap="none" normalizeH="0" baseline="0" dirty="0">
+                <a:ln>
+                  <a:noFill/>
+                </a:ln>
+                <a:solidFill>
+                  <a:schemeClr val="tx1"/>
+                </a:solidFill>
+                <a:effectLst/>
+              </a:rPr>
+              <a:t>. Nodes do not share a common loop. </a:t>
+            </a:r>
+          </a:p>
+          <a:p>
+            <a:pPr marL="0" marR="0" lvl="0" indent="0" algn="l" defTabSz="914400" rtl="0" eaLnBrk="0" fontAlgn="base" latinLnBrk="0" hangingPunct="0">
+              <a:lnSpc>
+                <a:spcPct val="100000"/>
+              </a:lnSpc>
+              <a:spcBef>
+                <a:spcPct val="0"/>
+              </a:spcBef>
+              <a:spcAft>
+                <a:spcPct val="0"/>
+              </a:spcAft>
+              <a:buClrTx/>
+              <a:buSzTx/>
+              <a:buNone/>
+              <a:tabLst/>
+            </a:pPr>
+            <a:endParaRPr kumimoji="0" lang="en-US" altLang="en-US" b="0" i="0" u="none" strike="noStrike" cap="none" normalizeH="0" baseline="0" dirty="0">
+              <a:ln>
+                <a:noFill/>
+              </a:ln>
+              <a:solidFill>
+                <a:schemeClr val="tx1"/>
+              </a:solidFill>
+              <a:effectLst/>
+            </a:endParaRPr>
+          </a:p>
+          <a:p>
+            <a:pPr marL="0" marR="0" lvl="0" indent="0" algn="l" defTabSz="914400" rtl="0" eaLnBrk="0" fontAlgn="base" latinLnBrk="0" hangingPunct="0">
+              <a:lnSpc>
+                <a:spcPct val="100000"/>
+              </a:lnSpc>
+              <a:spcBef>
+                <a:spcPct val="0"/>
+              </a:spcBef>
+              <a:spcAft>
+                <a:spcPct val="0"/>
+              </a:spcAft>
+              <a:buClrTx/>
+              <a:buSzTx/>
+              <a:buNone/>
+              <a:tabLst/>
+            </a:pPr>
+            <a:r>
+              <a:rPr kumimoji="0" lang="en-US" altLang="en-US" b="1" i="0" u="none" strike="noStrike" cap="none" normalizeH="0" baseline="0" dirty="0">
+                <a:ln>
+                  <a:noFill/>
+                </a:ln>
+                <a:solidFill>
+                  <a:schemeClr val="tx1"/>
+                </a:solidFill>
+                <a:effectLst/>
+              </a:rPr>
+              <a:t>High Scalability:</a:t>
+            </a:r>
+            <a:br>
+              <a:rPr kumimoji="0" lang="en-US" altLang="en-US" b="0" i="0" u="none" strike="noStrike" cap="none" normalizeH="0" baseline="0" dirty="0">
+                <a:ln>
+                  <a:noFill/>
+                </a:ln>
+                <a:solidFill>
+                  <a:schemeClr val="tx1"/>
+                </a:solidFill>
+                <a:effectLst/>
+              </a:rPr>
+            </a:br>
+            <a:r>
+              <a:rPr kumimoji="0" lang="en-US" altLang="en-US" b="0" i="0" u="none" strike="noStrike" cap="none" normalizeH="0" baseline="0" dirty="0">
+                <a:ln>
+                  <a:noFill/>
+                </a:ln>
+                <a:solidFill>
+                  <a:schemeClr val="tx1"/>
+                </a:solidFill>
+                <a:effectLst/>
+              </a:rPr>
+              <a:t>New nodes can be </a:t>
+            </a:r>
+            <a:r>
+              <a:rPr kumimoji="0" lang="en-US" altLang="en-US" b="1" i="0" u="none" strike="noStrike" cap="none" normalizeH="0" baseline="0" dirty="0">
+                <a:ln>
+                  <a:noFill/>
+                </a:ln>
+                <a:solidFill>
+                  <a:schemeClr val="tx1"/>
+                </a:solidFill>
+                <a:effectLst/>
+              </a:rPr>
+              <a:t>easily added or removed</a:t>
+            </a:r>
+            <a:r>
+              <a:rPr kumimoji="0" lang="en-US" altLang="en-US" b="0" i="0" u="none" strike="noStrike" cap="none" normalizeH="0" baseline="0" dirty="0">
+                <a:ln>
+                  <a:noFill/>
+                </a:ln>
+                <a:solidFill>
+                  <a:schemeClr val="tx1"/>
+                </a:solidFill>
+                <a:effectLst/>
+              </a:rPr>
+              <a:t> from the fabric without disturbing the communication between other nodes. </a:t>
+            </a:r>
+          </a:p>
+          <a:p>
+            <a:pPr marL="0" marR="0" lvl="0" indent="0" algn="l" defTabSz="914400" rtl="0" eaLnBrk="0" fontAlgn="base" latinLnBrk="0" hangingPunct="0">
+              <a:lnSpc>
+                <a:spcPct val="100000"/>
+              </a:lnSpc>
+              <a:spcBef>
+                <a:spcPct val="0"/>
+              </a:spcBef>
+              <a:spcAft>
+                <a:spcPct val="0"/>
+              </a:spcAft>
+              <a:buClrTx/>
+              <a:buSzTx/>
+              <a:buNone/>
+              <a:tabLst/>
+            </a:pPr>
+            <a:endParaRPr kumimoji="0" lang="en-US" altLang="en-US" b="0" i="0" u="none" strike="noStrike" cap="none" normalizeH="0" baseline="0" dirty="0">
+              <a:ln>
+                <a:noFill/>
+              </a:ln>
+              <a:solidFill>
+                <a:schemeClr val="tx1"/>
+              </a:solidFill>
+              <a:effectLst/>
+            </a:endParaRPr>
+          </a:p>
+          <a:p>
+            <a:pPr marL="0" lvl="0" indent="0" eaLnBrk="0" fontAlgn="base" hangingPunct="0">
+              <a:lnSpc>
+                <a:spcPct val="100000"/>
+              </a:lnSpc>
+              <a:spcBef>
+                <a:spcPct val="0"/>
+              </a:spcBef>
+              <a:spcAft>
+                <a:spcPct val="0"/>
+              </a:spcAft>
+              <a:buNone/>
+            </a:pPr>
+            <a:r>
+              <a:rPr kumimoji="0" lang="en-US" altLang="en-US" b="1" i="0" u="none" strike="noStrike" cap="none" normalizeH="0" baseline="0" dirty="0">
+                <a:ln>
+                  <a:noFill/>
+                </a:ln>
+                <a:solidFill>
+                  <a:schemeClr val="tx1"/>
+                </a:solidFill>
+                <a:effectLst/>
+              </a:rPr>
+              <a:t>Fabric Services:</a:t>
+            </a:r>
+            <a:br>
+              <a:rPr kumimoji="0" lang="en-US" altLang="en-US" b="0" i="0" u="none" strike="noStrike" cap="none" normalizeH="0" baseline="0" dirty="0">
+                <a:ln>
+                  <a:noFill/>
+                </a:ln>
+                <a:solidFill>
+                  <a:schemeClr val="tx1"/>
+                </a:solidFill>
+                <a:effectLst/>
+              </a:rPr>
+            </a:br>
+            <a:r>
+              <a:rPr kumimoji="0" lang="en-US" altLang="en-US" b="0" i="0" u="none" strike="noStrike" cap="none" normalizeH="0" baseline="0" dirty="0">
+                <a:ln>
+                  <a:noFill/>
+                </a:ln>
+                <a:solidFill>
+                  <a:schemeClr val="tx1"/>
+                </a:solidFill>
+                <a:effectLst/>
+              </a:rPr>
+              <a:t>FC switches operate up to the </a:t>
+            </a:r>
+            <a:r>
+              <a:rPr kumimoji="0" lang="en-US" altLang="en-US" b="1" i="0" u="none" strike="noStrike" cap="none" normalizeH="0" baseline="0" dirty="0">
+                <a:ln>
+                  <a:noFill/>
+                </a:ln>
+                <a:solidFill>
+                  <a:schemeClr val="tx1"/>
+                </a:solidFill>
+                <a:effectLst/>
+              </a:rPr>
+              <a:t>FC-2 layer</a:t>
+            </a:r>
+            <a:r>
+              <a:rPr kumimoji="0" lang="en-US" altLang="en-US" b="0" i="0" u="none" strike="noStrike" cap="none" normalizeH="0" baseline="0" dirty="0">
+                <a:ln>
+                  <a:noFill/>
+                </a:ln>
+                <a:solidFill>
+                  <a:schemeClr val="tx1"/>
+                </a:solidFill>
+                <a:effectLst/>
+              </a:rPr>
+              <a:t> and provide important services such as </a:t>
+            </a:r>
+            <a:r>
+              <a:rPr kumimoji="0" lang="en-US" altLang="en-US" b="1" i="0" u="none" strike="noStrike" cap="none" normalizeH="0" baseline="0" dirty="0">
+                <a:ln>
+                  <a:noFill/>
+                </a:ln>
+                <a:solidFill>
+                  <a:schemeClr val="tx1"/>
+                </a:solidFill>
+                <a:effectLst/>
+              </a:rPr>
+              <a:t>Name Server, </a:t>
+            </a:r>
+            <a:r>
+              <a:rPr lang="en-IN" b="1" dirty="0"/>
+              <a:t>Zoning, and Time Synchronization</a:t>
+            </a:r>
+            <a:r>
+              <a:rPr lang="en-IN" dirty="0"/>
+              <a:t>.</a:t>
+            </a:r>
+            <a:endParaRPr kumimoji="0" lang="en-US" altLang="en-US" b="0" i="0" u="none" strike="noStrike" cap="none" normalizeH="0" baseline="0" dirty="0">
+              <a:ln>
+                <a:noFill/>
+              </a:ln>
+              <a:solidFill>
+                <a:schemeClr val="tx1"/>
+              </a:solidFill>
+              <a:effectLst/>
+            </a:endParaRPr>
+          </a:p>
+        </p:txBody>
+      </p:sp>
+    </p:spTree>
+    <p:extLst>
+      <p:ext uri="{BB962C8B-B14F-4D97-AF65-F5344CB8AC3E}">
+        <p14:creationId xmlns:p14="http://schemas.microsoft.com/office/powerpoint/2010/main" val="999201620"/>
+      </p:ext>
+    </p:extLst>
+  </p:cSld>
+  <p:clrMapOvr>
+    <a:masterClrMapping/>
+  </p:clrMapOvr>
+</p:sld>
+</file>
+
+<file path=ppt/slides/slide43.xml><?xml version="1.0" encoding="utf-8"?>
+<p:sld xmlns:a="http://schemas.openxmlformats.org/drawingml/2006/main" xmlns:r="http://schemas.openxmlformats.org/officeDocument/2006/relationships" xmlns:p="http://schemas.openxmlformats.org/presentationml/2006/main">
+  <p:cSld>
+    <p:spTree>
+      <p:nvGrpSpPr>
+        <p:cNvPr id="1" name=""/>
+        <p:cNvGrpSpPr/>
+        <p:nvPr/>
+      </p:nvGrpSpPr>
+      <p:grpSpPr>
+        <a:xfrm>
+          <a:off x="0" y="0"/>
+          <a:ext cx="0" cy="0"/>
+          <a:chOff x="0" y="0"/>
+          <a:chExt cx="0" cy="0"/>
+        </a:xfrm>
+      </p:grpSpPr>
+      <p:sp>
+        <p:nvSpPr>
+          <p:cNvPr id="2" name="Title 1">
+            <a:extLst>
+              <a:ext uri="{FF2B5EF4-FFF2-40B4-BE49-F238E27FC236}">
+                <a16:creationId xmlns:a16="http://schemas.microsoft.com/office/drawing/2014/main" id="{38B1A37C-BBFA-491E-B8AE-5AE2EB2DA95F}"/>
+              </a:ext>
+            </a:extLst>
+          </p:cNvPr>
+          <p:cNvSpPr>
+            <a:spLocks noGrp="1"/>
+          </p:cNvSpPr>
+          <p:nvPr>
+            <p:ph type="title"/>
+          </p:nvPr>
+        </p:nvSpPr>
+        <p:spPr/>
+        <p:txBody>
+          <a:bodyPr/>
+          <a:lstStyle/>
+          <a:p>
+            <a:r>
+              <a:rPr lang="en-US" u="sng" dirty="0"/>
+              <a:t>FC-Switch</a:t>
+            </a:r>
+            <a:endParaRPr lang="en-IN" dirty="0"/>
+          </a:p>
+        </p:txBody>
+      </p:sp>
+      <p:sp>
+        <p:nvSpPr>
+          <p:cNvPr id="3" name="Content Placeholder 2">
+            <a:extLst>
+              <a:ext uri="{FF2B5EF4-FFF2-40B4-BE49-F238E27FC236}">
+                <a16:creationId xmlns:a16="http://schemas.microsoft.com/office/drawing/2014/main" id="{F93D4A7C-BB8D-445E-939E-15070604849F}"/>
+              </a:ext>
+            </a:extLst>
+          </p:cNvPr>
+          <p:cNvSpPr>
+            <a:spLocks noGrp="1"/>
+          </p:cNvSpPr>
+          <p:nvPr>
+            <p:ph idx="1"/>
+          </p:nvPr>
+        </p:nvSpPr>
+        <p:spPr>
+          <a:xfrm>
+            <a:off x="510364" y="1602340"/>
+            <a:ext cx="11419367" cy="4543277"/>
+          </a:xfrm>
+        </p:spPr>
+        <p:txBody>
+          <a:bodyPr>
+            <a:normAutofit/>
+          </a:bodyPr>
+          <a:lstStyle/>
+          <a:p>
+            <a:pPr marL="0" lvl="0" indent="0" eaLnBrk="0" fontAlgn="base" hangingPunct="0">
+              <a:lnSpc>
+                <a:spcPct val="100000"/>
+              </a:lnSpc>
+              <a:spcBef>
+                <a:spcPct val="0"/>
+              </a:spcBef>
+              <a:spcAft>
+                <a:spcPct val="0"/>
+              </a:spcAft>
+              <a:buNone/>
+            </a:pPr>
+            <a:endParaRPr lang="en-US" altLang="en-US" dirty="0"/>
+          </a:p>
+          <a:p>
+            <a:pPr marL="0" lvl="0" indent="0" eaLnBrk="0" fontAlgn="base" hangingPunct="0">
+              <a:lnSpc>
+                <a:spcPct val="100000"/>
+              </a:lnSpc>
+              <a:spcBef>
+                <a:spcPct val="0"/>
+              </a:spcBef>
+              <a:spcAft>
+                <a:spcPct val="0"/>
+              </a:spcAft>
+              <a:buNone/>
+            </a:pPr>
+            <a:r>
+              <a:rPr lang="en-US" altLang="en-US" b="1" dirty="0"/>
+              <a:t>Inter-Switch Link (ISL):</a:t>
+            </a:r>
+            <a:br>
+              <a:rPr lang="en-US" altLang="en-US" dirty="0"/>
+            </a:br>
+            <a:r>
+              <a:rPr lang="en-US" altLang="en-US" dirty="0"/>
+              <a:t>When multiple FC switches are connected, they use an </a:t>
+            </a:r>
+            <a:r>
+              <a:rPr lang="en-US" altLang="en-US" b="1" dirty="0"/>
+              <a:t>ISL</a:t>
+            </a:r>
+            <a:r>
+              <a:rPr lang="en-US" altLang="en-US" dirty="0"/>
+              <a:t>. ISLs allow multiple switches to join together and form a </a:t>
+            </a:r>
+            <a:r>
+              <a:rPr lang="en-US" altLang="en-US" b="1" dirty="0"/>
+              <a:t>single common fabric</a:t>
+            </a:r>
+            <a:r>
+              <a:rPr lang="en-US" altLang="en-US" dirty="0"/>
+              <a:t>. </a:t>
+            </a:r>
+          </a:p>
+          <a:p>
+            <a:pPr marL="0" lvl="0" indent="0" eaLnBrk="0" fontAlgn="base" hangingPunct="0">
+              <a:lnSpc>
+                <a:spcPct val="100000"/>
+              </a:lnSpc>
+              <a:spcBef>
+                <a:spcPct val="0"/>
+              </a:spcBef>
+              <a:spcAft>
+                <a:spcPct val="0"/>
+              </a:spcAft>
+              <a:buFontTx/>
+              <a:buChar char="•"/>
+            </a:pPr>
+            <a:endParaRPr lang="en-US" altLang="en-US" dirty="0"/>
+          </a:p>
+          <a:p>
+            <a:pPr marL="0" lvl="0" indent="0" eaLnBrk="0" fontAlgn="base" hangingPunct="0">
+              <a:lnSpc>
+                <a:spcPct val="100000"/>
+              </a:lnSpc>
+              <a:spcBef>
+                <a:spcPct val="0"/>
+              </a:spcBef>
+              <a:spcAft>
+                <a:spcPct val="0"/>
+              </a:spcAft>
+              <a:buNone/>
+            </a:pPr>
+            <a:r>
+              <a:rPr lang="en-US" altLang="en-US" b="1" dirty="0"/>
+              <a:t>ISL Bonding:</a:t>
+            </a:r>
+            <a:br>
+              <a:rPr lang="en-US" altLang="en-US" dirty="0"/>
+            </a:br>
+            <a:r>
+              <a:rPr lang="en-US" altLang="en-US" dirty="0"/>
+              <a:t>Multiple ISLs can be combined into a </a:t>
+            </a:r>
+            <a:r>
+              <a:rPr lang="en-US" altLang="en-US" b="1" dirty="0"/>
+              <a:t>logical ISL</a:t>
+            </a:r>
+            <a:r>
+              <a:rPr lang="en-US" altLang="en-US" dirty="0"/>
+              <a:t>. This increases </a:t>
+            </a:r>
+            <a:r>
+              <a:rPr lang="en-US" altLang="en-US" b="1" dirty="0"/>
+              <a:t>bandwidth</a:t>
+            </a:r>
+            <a:r>
+              <a:rPr lang="en-US" altLang="en-US" dirty="0"/>
+              <a:t>, provides </a:t>
+            </a:r>
+            <a:r>
+              <a:rPr lang="en-US" altLang="en-US" b="1" dirty="0"/>
+              <a:t>load balancing</a:t>
+            </a:r>
+            <a:r>
+              <a:rPr lang="en-US" altLang="en-US" dirty="0"/>
+              <a:t>, and improves </a:t>
+            </a:r>
+            <a:r>
+              <a:rPr lang="en-US" altLang="en-US" b="1" dirty="0"/>
+              <a:t>availability/reliability</a:t>
+            </a:r>
+            <a:r>
+              <a:rPr lang="en-US" altLang="en-US" dirty="0"/>
+              <a:t>. </a:t>
+            </a:r>
+          </a:p>
+          <a:p>
+            <a:endParaRPr lang="en-IN" dirty="0"/>
+          </a:p>
+        </p:txBody>
+      </p:sp>
+    </p:spTree>
+    <p:extLst>
+      <p:ext uri="{BB962C8B-B14F-4D97-AF65-F5344CB8AC3E}">
+        <p14:creationId xmlns:p14="http://schemas.microsoft.com/office/powerpoint/2010/main" val="2941513673"/>
+      </p:ext>
+    </p:extLst>
+  </p:cSld>
+  <p:clrMapOvr>
+    <a:masterClrMapping/>
+  </p:clrMapOvr>
+</p:sld>
+</file>
+
+<file path=ppt/slides/slide44.xml><?xml version="1.0" encoding="utf-8"?>
+<p:sld xmlns:a="http://schemas.openxmlformats.org/drawingml/2006/main" xmlns:r="http://schemas.openxmlformats.org/officeDocument/2006/relationships" xmlns:p="http://schemas.openxmlformats.org/presentationml/2006/main">
+  <p:cSld>
+    <p:spTree>
+      <p:nvGrpSpPr>
+        <p:cNvPr id="1" name=""/>
+        <p:cNvGrpSpPr/>
+        <p:nvPr/>
+      </p:nvGrpSpPr>
+      <p:grpSpPr>
+        <a:xfrm>
+          <a:off x="0" y="0"/>
+          <a:ext cx="0" cy="0"/>
+          <a:chOff x="0" y="0"/>
+          <a:chExt cx="0" cy="0"/>
+        </a:xfrm>
+      </p:grpSpPr>
+      <p:sp>
+        <p:nvSpPr>
+          <p:cNvPr id="2" name="Title 1">
+            <a:extLst>
+              <a:ext uri="{FF2B5EF4-FFF2-40B4-BE49-F238E27FC236}">
+                <a16:creationId xmlns:a16="http://schemas.microsoft.com/office/drawing/2014/main" id="{E3B6ED98-AF99-43BF-AC1A-B2A5F2AA41C5}"/>
+              </a:ext>
+            </a:extLst>
+          </p:cNvPr>
+          <p:cNvSpPr>
+            <a:spLocks noGrp="1"/>
+          </p:cNvSpPr>
+          <p:nvPr>
+            <p:ph type="title"/>
+          </p:nvPr>
+        </p:nvSpPr>
+        <p:spPr/>
+        <p:txBody>
+          <a:bodyPr/>
+          <a:lstStyle/>
+          <a:p>
+            <a:r>
+              <a:rPr lang="en-US" dirty="0"/>
+              <a:t>Virtualization in FC SAN Environment</a:t>
+            </a:r>
+            <a:endParaRPr lang="en-IN" dirty="0"/>
+          </a:p>
+        </p:txBody>
+      </p:sp>
+      <p:sp>
+        <p:nvSpPr>
+          <p:cNvPr id="3" name="Content Placeholder 2">
+            <a:extLst>
+              <a:ext uri="{FF2B5EF4-FFF2-40B4-BE49-F238E27FC236}">
+                <a16:creationId xmlns:a16="http://schemas.microsoft.com/office/drawing/2014/main" id="{3E6676C7-D0E7-4B79-B4E5-244C7138E8F1}"/>
+              </a:ext>
+            </a:extLst>
+          </p:cNvPr>
+          <p:cNvSpPr>
+            <a:spLocks noGrp="1"/>
+          </p:cNvSpPr>
+          <p:nvPr>
+            <p:ph idx="1"/>
+          </p:nvPr>
+        </p:nvSpPr>
+        <p:spPr>
+          <a:xfrm>
+            <a:off x="838199" y="1530849"/>
+            <a:ext cx="10751049" cy="5167902"/>
+          </a:xfrm>
+        </p:spPr>
+        <p:txBody>
+          <a:bodyPr>
+            <a:normAutofit fontScale="92500" lnSpcReduction="10000"/>
+          </a:bodyPr>
+          <a:lstStyle/>
+          <a:p>
+            <a:pPr marL="0" indent="0">
+              <a:buNone/>
+            </a:pPr>
+            <a:r>
+              <a:rPr lang="en-US" sz="2600" b="1" dirty="0"/>
+              <a:t>1. Introduction</a:t>
+            </a:r>
+          </a:p>
+          <a:p>
+            <a:pPr marL="0" indent="0" algn="just">
+              <a:buNone/>
+            </a:pPr>
+            <a:r>
+              <a:rPr lang="en-US" sz="2600" b="1" dirty="0"/>
+              <a:t>Virtualization in a Fibre Channel (FC) SAN environment</a:t>
+            </a:r>
+            <a:r>
+              <a:rPr lang="en-US" sz="2600" dirty="0"/>
+              <a:t> is the technique of abstracting physical storage resources, servers, and FC connectivity so that applications can use storage without needing to know the exact physical location of the storage device.</a:t>
+            </a:r>
+          </a:p>
+          <a:p>
+            <a:pPr marL="0" indent="0" algn="just">
+              <a:buNone/>
+            </a:pPr>
+            <a:r>
+              <a:rPr lang="en-US" sz="2600" dirty="0"/>
+              <a:t>In a traditional FC SAN, a server is connected through an </a:t>
+            </a:r>
+            <a:r>
+              <a:rPr lang="en-US" sz="2600" b="1" dirty="0"/>
+              <a:t>HBA (Host Bus Adapter)</a:t>
+            </a:r>
+            <a:r>
+              <a:rPr lang="en-US" sz="2600" dirty="0"/>
+              <a:t> to an FC switch, which connects it to a storage array.</a:t>
+            </a:r>
+          </a:p>
+          <a:p>
+            <a:pPr marL="0" indent="0" algn="just">
+              <a:buNone/>
+            </a:pPr>
+            <a:endParaRPr lang="en-US" sz="2600" dirty="0"/>
+          </a:p>
+          <a:p>
+            <a:pPr marL="0" indent="0" algn="just">
+              <a:buNone/>
+            </a:pPr>
+            <a:r>
+              <a:rPr lang="en-US" sz="2600" dirty="0"/>
+              <a:t>With virtualization, the physical storage infrastructure is abstracted into logical resources such as:</a:t>
+            </a:r>
+          </a:p>
+          <a:p>
+            <a:pPr marL="0" indent="0" algn="just">
+              <a:buNone/>
+            </a:pPr>
+            <a:r>
+              <a:rPr lang="en-US" sz="2600" dirty="0"/>
+              <a:t>Virtual servers, Virtual HBAs, Virtual storage volumes, Virtual ports, Virtual switches, Virtual storage pools, Virtual SANs </a:t>
+            </a:r>
+          </a:p>
+          <a:p>
+            <a:pPr marL="0" indent="0" algn="just">
+              <a:buNone/>
+            </a:pPr>
+            <a:r>
+              <a:rPr lang="en-US" sz="2600" dirty="0"/>
+              <a:t>This improves </a:t>
+            </a:r>
+            <a:r>
+              <a:rPr lang="en-US" sz="2600" b="1" dirty="0"/>
+              <a:t>resource utilization, flexibility, scalability, availability, and management</a:t>
+            </a:r>
+            <a:r>
+              <a:rPr lang="en-US" sz="2600" dirty="0"/>
+              <a:t>.</a:t>
+            </a:r>
+          </a:p>
+          <a:p>
+            <a:pPr marL="0" indent="0" algn="just">
+              <a:buNone/>
+            </a:pPr>
+            <a:endParaRPr lang="en-US" dirty="0"/>
+          </a:p>
+          <a:p>
+            <a:endParaRPr lang="en-IN" dirty="0"/>
+          </a:p>
+        </p:txBody>
+      </p:sp>
+    </p:spTree>
+    <p:extLst>
+      <p:ext uri="{BB962C8B-B14F-4D97-AF65-F5344CB8AC3E}">
+        <p14:creationId xmlns:p14="http://schemas.microsoft.com/office/powerpoint/2010/main" val="708524047"/>
+      </p:ext>
+    </p:extLst>
+  </p:cSld>
+  <p:clrMapOvr>
+    <a:masterClrMapping/>
+  </p:clrMapOvr>
+</p:sld>
+</file>
+
+<file path=ppt/slides/slide45.xml><?xml version="1.0" encoding="utf-8"?>
+<p:sld xmlns:a="http://schemas.openxmlformats.org/drawingml/2006/main" xmlns:r="http://schemas.openxmlformats.org/officeDocument/2006/relationships" xmlns:p="http://schemas.openxmlformats.org/presentationml/2006/main">
+  <p:cSld>
+    <p:spTree>
+      <p:nvGrpSpPr>
+        <p:cNvPr id="1" name=""/>
+        <p:cNvGrpSpPr/>
+        <p:nvPr/>
+      </p:nvGrpSpPr>
+      <p:grpSpPr>
+        <a:xfrm>
+          <a:off x="0" y="0"/>
+          <a:ext cx="0" cy="0"/>
+          <a:chOff x="0" y="0"/>
+          <a:chExt cx="0" cy="0"/>
+        </a:xfrm>
+      </p:grpSpPr>
+      <p:sp>
+        <p:nvSpPr>
+          <p:cNvPr id="2" name="Title 1">
+            <a:extLst>
+              <a:ext uri="{FF2B5EF4-FFF2-40B4-BE49-F238E27FC236}">
+                <a16:creationId xmlns:a16="http://schemas.microsoft.com/office/drawing/2014/main" id="{740FEACA-535A-4BDD-8AD6-78B7D9571D7B}"/>
+              </a:ext>
+            </a:extLst>
+          </p:cNvPr>
+          <p:cNvSpPr>
+            <a:spLocks noGrp="1"/>
+          </p:cNvSpPr>
+          <p:nvPr>
+            <p:ph type="title"/>
+          </p:nvPr>
+        </p:nvSpPr>
+        <p:spPr/>
+        <p:txBody>
+          <a:bodyPr/>
+          <a:lstStyle/>
+          <a:p>
+            <a:r>
+              <a:rPr lang="en-US" dirty="0"/>
+              <a:t>Why Virtualization is Required in FC SAN</a:t>
+            </a:r>
+            <a:br>
+              <a:rPr lang="en-US" dirty="0"/>
+            </a:br>
+            <a:endParaRPr lang="en-IN" dirty="0"/>
+          </a:p>
+        </p:txBody>
+      </p:sp>
+      <p:sp>
+        <p:nvSpPr>
+          <p:cNvPr id="3" name="Content Placeholder 2">
+            <a:extLst>
+              <a:ext uri="{FF2B5EF4-FFF2-40B4-BE49-F238E27FC236}">
+                <a16:creationId xmlns:a16="http://schemas.microsoft.com/office/drawing/2014/main" id="{6BB61589-E810-45AD-906F-17F35B3F4CCE}"/>
+              </a:ext>
+            </a:extLst>
+          </p:cNvPr>
+          <p:cNvSpPr>
+            <a:spLocks noGrp="1"/>
+          </p:cNvSpPr>
+          <p:nvPr>
+            <p:ph idx="1"/>
+          </p:nvPr>
+        </p:nvSpPr>
+        <p:spPr/>
+        <p:txBody>
+          <a:bodyPr/>
+          <a:lstStyle/>
+          <a:p>
+            <a:pPr marL="0" indent="0">
+              <a:buNone/>
+            </a:pPr>
+            <a:r>
+              <a:rPr lang="en-US" dirty="0"/>
+              <a:t>Large data centers may contain:</a:t>
+            </a:r>
+          </a:p>
+          <a:p>
+            <a:pPr lvl="1"/>
+            <a:r>
+              <a:rPr lang="en-US" dirty="0"/>
+              <a:t>Hundreds of physical servers </a:t>
+            </a:r>
+          </a:p>
+          <a:p>
+            <a:pPr lvl="1"/>
+            <a:r>
+              <a:rPr lang="en-US" dirty="0"/>
+              <a:t>Multiple FC switches </a:t>
+            </a:r>
+          </a:p>
+          <a:p>
+            <a:pPr lvl="1"/>
+            <a:r>
+              <a:rPr lang="en-US" dirty="0"/>
+              <a:t>Multiple storage arrays </a:t>
+            </a:r>
+          </a:p>
+          <a:p>
+            <a:pPr lvl="1"/>
+            <a:r>
+              <a:rPr lang="en-US" dirty="0"/>
+              <a:t>Thousands of LUNs </a:t>
+            </a:r>
+          </a:p>
+          <a:p>
+            <a:pPr lvl="1"/>
+            <a:r>
+              <a:rPr lang="en-US" dirty="0"/>
+              <a:t>Multiple applications </a:t>
+            </a:r>
+          </a:p>
+          <a:p>
+            <a:pPr lvl="1"/>
+            <a:r>
+              <a:rPr lang="en-US" dirty="0"/>
+              <a:t>Virtual machines </a:t>
+            </a:r>
+          </a:p>
+          <a:p>
+            <a:pPr marL="457200" lvl="1" indent="0">
+              <a:buNone/>
+            </a:pPr>
+            <a:endParaRPr lang="en-US" dirty="0"/>
+          </a:p>
+          <a:p>
+            <a:pPr marL="457200" lvl="1" indent="0">
+              <a:buNone/>
+            </a:pPr>
+            <a:r>
+              <a:rPr lang="en-US" dirty="0"/>
+              <a:t>Managing these resources individually becomes complex.</a:t>
+            </a:r>
+          </a:p>
+          <a:p>
+            <a:endParaRPr lang="en-IN" dirty="0"/>
+          </a:p>
+        </p:txBody>
+      </p:sp>
+    </p:spTree>
+    <p:extLst>
+      <p:ext uri="{BB962C8B-B14F-4D97-AF65-F5344CB8AC3E}">
+        <p14:creationId xmlns:p14="http://schemas.microsoft.com/office/powerpoint/2010/main" val="1336392523"/>
+      </p:ext>
+    </p:extLst>
+  </p:cSld>
+  <p:clrMapOvr>
+    <a:masterClrMapping/>
+  </p:clrMapOvr>
+</p:sld>
+</file>
+
+<file path=ppt/slides/slide46.xml><?xml version="1.0" encoding="utf-8"?>
+<p:sld xmlns:a="http://schemas.openxmlformats.org/drawingml/2006/main" xmlns:r="http://schemas.openxmlformats.org/officeDocument/2006/relationships" xmlns:p="http://schemas.openxmlformats.org/presentationml/2006/main">
+  <p:cSld>
+    <p:spTree>
+      <p:nvGrpSpPr>
+        <p:cNvPr id="1" name=""/>
+        <p:cNvGrpSpPr/>
+        <p:nvPr/>
+      </p:nvGrpSpPr>
+      <p:grpSpPr>
+        <a:xfrm>
+          <a:off x="0" y="0"/>
+          <a:ext cx="0" cy="0"/>
+          <a:chOff x="0" y="0"/>
+          <a:chExt cx="0" cy="0"/>
+        </a:xfrm>
+      </p:grpSpPr>
+      <p:sp>
+        <p:nvSpPr>
+          <p:cNvPr id="2" name="Title 1">
+            <a:extLst>
+              <a:ext uri="{FF2B5EF4-FFF2-40B4-BE49-F238E27FC236}">
+                <a16:creationId xmlns:a16="http://schemas.microsoft.com/office/drawing/2014/main" id="{3FCF28BE-CEA3-4920-ADA2-01945F0A3971}"/>
+              </a:ext>
+            </a:extLst>
+          </p:cNvPr>
+          <p:cNvSpPr>
+            <a:spLocks noGrp="1"/>
+          </p:cNvSpPr>
+          <p:nvPr>
+            <p:ph type="title"/>
+          </p:nvPr>
+        </p:nvSpPr>
+        <p:spPr/>
+        <p:txBody>
+          <a:bodyPr>
+            <a:normAutofit fontScale="90000"/>
+          </a:bodyPr>
+          <a:lstStyle/>
+          <a:p>
+            <a:r>
+              <a:rPr lang="en-IN" dirty="0"/>
+              <a:t>Virtualization provides an abstraction layer between physical infrastructure and applications.</a:t>
+            </a:r>
+            <a:br>
+              <a:rPr lang="en-IN" dirty="0"/>
+            </a:br>
+            <a:endParaRPr lang="en-IN" dirty="0"/>
+          </a:p>
+        </p:txBody>
+      </p:sp>
+      <p:sp>
+        <p:nvSpPr>
+          <p:cNvPr id="3" name="Content Placeholder 2">
+            <a:extLst>
+              <a:ext uri="{FF2B5EF4-FFF2-40B4-BE49-F238E27FC236}">
+                <a16:creationId xmlns:a16="http://schemas.microsoft.com/office/drawing/2014/main" id="{A6D188ED-36D0-4E59-9451-E649E14531C0}"/>
+              </a:ext>
+            </a:extLst>
+          </p:cNvPr>
+          <p:cNvSpPr>
+            <a:spLocks noGrp="1"/>
+          </p:cNvSpPr>
+          <p:nvPr>
+            <p:ph idx="1"/>
+          </p:nvPr>
+        </p:nvSpPr>
+        <p:spPr/>
+        <p:txBody>
+          <a:bodyPr>
+            <a:normAutofit fontScale="92500" lnSpcReduction="20000"/>
+          </a:bodyPr>
+          <a:lstStyle/>
+          <a:p>
+            <a:pPr marL="0" indent="0">
+              <a:buNone/>
+            </a:pPr>
+            <a:r>
+              <a:rPr lang="en-IN" b="1" dirty="0"/>
+              <a:t>Major objectives</a:t>
+            </a:r>
+          </a:p>
+          <a:p>
+            <a:pPr marL="457200" indent="-457200">
+              <a:buFont typeface="+mj-lt"/>
+              <a:buAutoNum type="arabicPeriod"/>
+            </a:pPr>
+            <a:r>
+              <a:rPr lang="en-IN" dirty="0"/>
+              <a:t>Improve storage utilization </a:t>
+            </a:r>
+          </a:p>
+          <a:p>
+            <a:pPr marL="457200" indent="-457200">
+              <a:buFont typeface="+mj-lt"/>
+              <a:buAutoNum type="arabicPeriod"/>
+            </a:pPr>
+            <a:r>
+              <a:rPr lang="en-IN" dirty="0"/>
+              <a:t>Reduce hardware dependency </a:t>
+            </a:r>
+          </a:p>
+          <a:p>
+            <a:pPr marL="457200" indent="-457200">
+              <a:buFont typeface="+mj-lt"/>
+              <a:buAutoNum type="arabicPeriod"/>
+            </a:pPr>
+            <a:r>
+              <a:rPr lang="en-IN" dirty="0"/>
+              <a:t>Simplify management </a:t>
+            </a:r>
+          </a:p>
+          <a:p>
+            <a:pPr marL="457200" indent="-457200">
+              <a:buFont typeface="+mj-lt"/>
+              <a:buAutoNum type="arabicPeriod"/>
+            </a:pPr>
+            <a:r>
+              <a:rPr lang="en-IN" dirty="0"/>
+              <a:t>Provide flexible resource allocation </a:t>
+            </a:r>
+          </a:p>
+          <a:p>
+            <a:pPr marL="457200" indent="-457200">
+              <a:buFont typeface="+mj-lt"/>
+              <a:buAutoNum type="arabicPeriod"/>
+            </a:pPr>
+            <a:r>
+              <a:rPr lang="en-IN" dirty="0"/>
+              <a:t>Support server consolidation </a:t>
+            </a:r>
+          </a:p>
+          <a:p>
+            <a:pPr marL="457200" indent="-457200">
+              <a:buFont typeface="+mj-lt"/>
+              <a:buAutoNum type="arabicPeriod"/>
+            </a:pPr>
+            <a:r>
+              <a:rPr lang="en-IN" dirty="0"/>
+              <a:t>Improve availability </a:t>
+            </a:r>
+          </a:p>
+          <a:p>
+            <a:pPr marL="457200" indent="-457200">
+              <a:buFont typeface="+mj-lt"/>
+              <a:buAutoNum type="arabicPeriod"/>
+            </a:pPr>
+            <a:r>
+              <a:rPr lang="en-IN" dirty="0"/>
+              <a:t>Enable easier migration </a:t>
+            </a:r>
+          </a:p>
+          <a:p>
+            <a:pPr marL="457200" indent="-457200">
+              <a:buFont typeface="+mj-lt"/>
+              <a:buAutoNum type="arabicPeriod"/>
+            </a:pPr>
+            <a:r>
+              <a:rPr lang="en-IN" dirty="0"/>
+              <a:t>Support disaster recovery </a:t>
+            </a:r>
+          </a:p>
+          <a:p>
+            <a:pPr marL="457200" indent="-457200">
+              <a:buFont typeface="+mj-lt"/>
+              <a:buAutoNum type="arabicPeriod"/>
+            </a:pPr>
+            <a:r>
+              <a:rPr lang="en-IN" dirty="0"/>
+              <a:t>Provide isolation between environments </a:t>
+            </a:r>
+          </a:p>
+          <a:p>
+            <a:pPr marL="457200" indent="-457200">
+              <a:buFont typeface="+mj-lt"/>
+              <a:buAutoNum type="arabicPeriod"/>
+            </a:pPr>
+            <a:r>
+              <a:rPr lang="en-IN" dirty="0"/>
+              <a:t>Reduce operational cost</a:t>
+            </a:r>
+          </a:p>
+          <a:p>
+            <a:endParaRPr lang="en-IN" dirty="0"/>
+          </a:p>
+        </p:txBody>
+      </p:sp>
+    </p:spTree>
+    <p:extLst>
+      <p:ext uri="{BB962C8B-B14F-4D97-AF65-F5344CB8AC3E}">
+        <p14:creationId xmlns:p14="http://schemas.microsoft.com/office/powerpoint/2010/main" val="2264551343"/>
+      </p:ext>
+    </p:extLst>
+  </p:cSld>
+  <p:clrMapOvr>
+    <a:masterClrMapping/>
+  </p:clrMapOvr>
+</p:sld>
+</file>
+
+<file path=ppt/slides/slide47.xml><?xml version="1.0" encoding="utf-8"?>
+<p:sld xmlns:a="http://schemas.openxmlformats.org/drawingml/2006/main" xmlns:r="http://schemas.openxmlformats.org/officeDocument/2006/relationships" xmlns:p="http://schemas.openxmlformats.org/presentationml/2006/main">
+  <p:cSld>
+    <p:spTree>
+      <p:nvGrpSpPr>
+        <p:cNvPr id="1" name=""/>
+        <p:cNvGrpSpPr/>
+        <p:nvPr/>
+      </p:nvGrpSpPr>
+      <p:grpSpPr>
+        <a:xfrm>
+          <a:off x="0" y="0"/>
+          <a:ext cx="0" cy="0"/>
+          <a:chOff x="0" y="0"/>
+          <a:chExt cx="0" cy="0"/>
+        </a:xfrm>
+      </p:grpSpPr>
+      <p:sp>
+        <p:nvSpPr>
+          <p:cNvPr id="2" name="Title 1">
+            <a:extLst>
+              <a:ext uri="{FF2B5EF4-FFF2-40B4-BE49-F238E27FC236}">
+                <a16:creationId xmlns:a16="http://schemas.microsoft.com/office/drawing/2014/main" id="{7A3E3BF2-328A-4E3D-AC7F-AE515121C5AC}"/>
+              </a:ext>
+            </a:extLst>
+          </p:cNvPr>
+          <p:cNvSpPr>
+            <a:spLocks noGrp="1"/>
+          </p:cNvSpPr>
+          <p:nvPr>
+            <p:ph type="title"/>
+          </p:nvPr>
+        </p:nvSpPr>
+        <p:spPr/>
+        <p:txBody>
+          <a:bodyPr/>
+          <a:lstStyle/>
+          <a:p>
+            <a:r>
+              <a:rPr lang="en-US" dirty="0"/>
+              <a:t>Types of Virtualization in FC SAN</a:t>
+            </a:r>
+            <a:br>
+              <a:rPr lang="en-US" dirty="0"/>
+            </a:br>
+            <a:endParaRPr lang="en-IN" dirty="0"/>
+          </a:p>
+        </p:txBody>
+      </p:sp>
+      <p:sp>
+        <p:nvSpPr>
+          <p:cNvPr id="3" name="Content Placeholder 2">
+            <a:extLst>
+              <a:ext uri="{FF2B5EF4-FFF2-40B4-BE49-F238E27FC236}">
+                <a16:creationId xmlns:a16="http://schemas.microsoft.com/office/drawing/2014/main" id="{E95CC88C-5E97-4019-85CE-66313C4ECF55}"/>
+              </a:ext>
+            </a:extLst>
+          </p:cNvPr>
+          <p:cNvSpPr>
+            <a:spLocks noGrp="1"/>
+          </p:cNvSpPr>
+          <p:nvPr>
+            <p:ph idx="1"/>
+          </p:nvPr>
+        </p:nvSpPr>
+        <p:spPr/>
+        <p:txBody>
+          <a:bodyPr/>
+          <a:lstStyle/>
+          <a:p>
+            <a:pPr marL="0" indent="0">
+              <a:buNone/>
+            </a:pPr>
+            <a:r>
+              <a:rPr lang="en-IN" dirty="0"/>
+              <a:t>Major types</a:t>
+            </a:r>
+          </a:p>
+          <a:p>
+            <a:pPr marL="0" indent="0">
+              <a:buNone/>
+            </a:pPr>
+            <a:endParaRPr lang="en-IN" dirty="0"/>
+          </a:p>
+          <a:p>
+            <a:pPr marL="457200" indent="-457200">
+              <a:buFont typeface="+mj-lt"/>
+              <a:buAutoNum type="arabicPeriod"/>
+            </a:pPr>
+            <a:r>
+              <a:rPr lang="en-IN" dirty="0"/>
+              <a:t>Server virtualization </a:t>
+            </a:r>
+          </a:p>
+          <a:p>
+            <a:pPr marL="457200" indent="-457200">
+              <a:buFont typeface="+mj-lt"/>
+              <a:buAutoNum type="arabicPeriod"/>
+            </a:pPr>
+            <a:r>
+              <a:rPr lang="en-IN" dirty="0"/>
+              <a:t>Storage virtualization </a:t>
+            </a:r>
+          </a:p>
+          <a:p>
+            <a:pPr marL="457200" indent="-457200">
+              <a:buFont typeface="+mj-lt"/>
+              <a:buAutoNum type="arabicPeriod"/>
+            </a:pPr>
+            <a:r>
+              <a:rPr lang="en-IN" dirty="0"/>
+              <a:t>FC network virtualization </a:t>
+            </a:r>
+          </a:p>
+          <a:p>
+            <a:pPr marL="457200" indent="-457200">
+              <a:buFont typeface="+mj-lt"/>
+              <a:buAutoNum type="arabicPeriod"/>
+            </a:pPr>
+            <a:r>
+              <a:rPr lang="en-IN" dirty="0"/>
+              <a:t>Virtual HBA virtualization </a:t>
+            </a:r>
+          </a:p>
+          <a:p>
+            <a:pPr marL="457200" indent="-457200">
+              <a:buFont typeface="+mj-lt"/>
+              <a:buAutoNum type="arabicPeriod"/>
+            </a:pPr>
+            <a:r>
+              <a:rPr lang="en-IN" dirty="0"/>
+              <a:t>Virtual SAN (VSAN) </a:t>
+            </a:r>
+          </a:p>
+          <a:p>
+            <a:pPr marL="457200" indent="-457200">
+              <a:buFont typeface="+mj-lt"/>
+              <a:buAutoNum type="arabicPeriod"/>
+            </a:pPr>
+            <a:r>
+              <a:rPr lang="en-IN" dirty="0"/>
+              <a:t>Virtual machine storage virtualization</a:t>
+            </a:r>
+          </a:p>
+          <a:p>
+            <a:pPr marL="0" indent="0">
+              <a:buNone/>
+            </a:pPr>
+            <a:endParaRPr lang="en-IN" dirty="0"/>
+          </a:p>
+        </p:txBody>
+      </p:sp>
+    </p:spTree>
+    <p:extLst>
+      <p:ext uri="{BB962C8B-B14F-4D97-AF65-F5344CB8AC3E}">
+        <p14:creationId xmlns:p14="http://schemas.microsoft.com/office/powerpoint/2010/main" val="3763649543"/>
+      </p:ext>
+    </p:extLst>
+  </p:cSld>
+  <p:clrMapOvr>
+    <a:masterClrMapping/>
+  </p:clrMapOvr>
+</p:sld>
+</file>
+
+<file path=ppt/slides/slide48.xml><?xml version="1.0" encoding="utf-8"?>
+<p:sld xmlns:a="http://schemas.openxmlformats.org/drawingml/2006/main" xmlns:r="http://schemas.openxmlformats.org/officeDocument/2006/relationships" xmlns:p="http://schemas.openxmlformats.org/presentationml/2006/main">
+  <p:cSld>
+    <p:spTree>
+      <p:nvGrpSpPr>
+        <p:cNvPr id="1" name=""/>
+        <p:cNvGrpSpPr/>
+        <p:nvPr/>
+      </p:nvGrpSpPr>
+      <p:grpSpPr>
+        <a:xfrm>
+          <a:off x="0" y="0"/>
+          <a:ext cx="0" cy="0"/>
+          <a:chOff x="0" y="0"/>
+          <a:chExt cx="0" cy="0"/>
+        </a:xfrm>
+      </p:grpSpPr>
+      <p:sp>
+        <p:nvSpPr>
+          <p:cNvPr id="2" name="Title 1">
+            <a:extLst>
+              <a:ext uri="{FF2B5EF4-FFF2-40B4-BE49-F238E27FC236}">
+                <a16:creationId xmlns:a16="http://schemas.microsoft.com/office/drawing/2014/main" id="{0D1FDEC2-39C1-45F4-B019-54B4AD5C5791}"/>
+              </a:ext>
+            </a:extLst>
+          </p:cNvPr>
+          <p:cNvSpPr>
+            <a:spLocks noGrp="1"/>
+          </p:cNvSpPr>
+          <p:nvPr>
+            <p:ph type="title"/>
+          </p:nvPr>
+        </p:nvSpPr>
+        <p:spPr/>
+        <p:txBody>
+          <a:bodyPr/>
+          <a:lstStyle/>
+          <a:p>
+            <a:r>
+              <a:rPr lang="en-IN" dirty="0"/>
+              <a:t>1. Server Virtualization</a:t>
+            </a:r>
+          </a:p>
+        </p:txBody>
+      </p:sp>
+      <p:sp>
+        <p:nvSpPr>
+          <p:cNvPr id="3" name="Content Placeholder 2">
+            <a:extLst>
+              <a:ext uri="{FF2B5EF4-FFF2-40B4-BE49-F238E27FC236}">
+                <a16:creationId xmlns:a16="http://schemas.microsoft.com/office/drawing/2014/main" id="{1CCF45DF-6D5E-465C-A98C-DFCEF8239ADC}"/>
+              </a:ext>
+            </a:extLst>
+          </p:cNvPr>
+          <p:cNvSpPr>
+            <a:spLocks noGrp="1"/>
+          </p:cNvSpPr>
+          <p:nvPr>
+            <p:ph idx="1"/>
+          </p:nvPr>
+        </p:nvSpPr>
+        <p:spPr>
+          <a:xfrm>
+            <a:off x="838200" y="1353014"/>
+            <a:ext cx="10515600" cy="4351338"/>
+          </a:xfrm>
+        </p:spPr>
+        <p:txBody>
+          <a:bodyPr/>
+          <a:lstStyle/>
+          <a:p>
+            <a:pPr marL="0" indent="0">
+              <a:buNone/>
+            </a:pPr>
+            <a:r>
+              <a:rPr lang="en-IN" dirty="0"/>
+              <a:t>Server virtualization allows multiple </a:t>
+            </a:r>
+            <a:r>
+              <a:rPr lang="en-IN" b="1" dirty="0"/>
+              <a:t>virtual machines (VMs)</a:t>
+            </a:r>
+            <a:r>
+              <a:rPr lang="en-IN" dirty="0"/>
+              <a:t> to run on a single physical server.</a:t>
+            </a:r>
+          </a:p>
+          <a:p>
+            <a:pPr marL="0" indent="0">
+              <a:buNone/>
+            </a:pPr>
+            <a:r>
+              <a:rPr lang="en-IN" dirty="0"/>
+              <a:t>A software layer called a </a:t>
+            </a:r>
+            <a:r>
+              <a:rPr lang="en-IN" b="1" dirty="0"/>
+              <a:t>hypervisor</a:t>
+            </a:r>
+            <a:r>
+              <a:rPr lang="en-IN" dirty="0"/>
+              <a:t> manages the virtual machines.</a:t>
+            </a:r>
+          </a:p>
+          <a:p>
+            <a:pPr marL="0" indent="0">
+              <a:buNone/>
+            </a:pPr>
+            <a:r>
+              <a:rPr lang="en-IN" dirty="0"/>
+              <a:t>Examples of hypervisors include:</a:t>
+            </a:r>
+          </a:p>
+          <a:p>
+            <a:r>
+              <a:rPr lang="en-IN" dirty="0"/>
+              <a:t>VMware </a:t>
+            </a:r>
+            <a:r>
+              <a:rPr lang="en-IN" dirty="0" err="1"/>
+              <a:t>ESXi</a:t>
+            </a:r>
+            <a:r>
+              <a:rPr lang="en-IN" dirty="0"/>
+              <a:t> (Elastic Sky X Integrated)</a:t>
+            </a:r>
+          </a:p>
+          <a:p>
+            <a:r>
+              <a:rPr lang="en-IN" dirty="0"/>
+              <a:t>Microsoft Hyper-V </a:t>
+            </a:r>
+          </a:p>
+          <a:p>
+            <a:r>
+              <a:rPr lang="en-IN" dirty="0"/>
+              <a:t>KVM (Kernel Based VM)</a:t>
+            </a:r>
+          </a:p>
+          <a:p>
+            <a:pPr marL="0" indent="0">
+              <a:buNone/>
+            </a:pPr>
+            <a:r>
+              <a:rPr lang="en-US" dirty="0"/>
+              <a:t>Instead of having three physical servers, </a:t>
+            </a:r>
+          </a:p>
+          <a:p>
+            <a:pPr marL="0" indent="0">
+              <a:buNone/>
+            </a:pPr>
+            <a:r>
+              <a:rPr lang="en-US" dirty="0"/>
+              <a:t>three virtual machines can run on one physical server.</a:t>
+            </a:r>
+            <a:endParaRPr lang="en-IN" dirty="0"/>
+          </a:p>
+        </p:txBody>
+      </p:sp>
+      <p:pic>
+        <p:nvPicPr>
+          <p:cNvPr id="4" name="Picture 3">
+            <a:extLst>
+              <a:ext uri="{FF2B5EF4-FFF2-40B4-BE49-F238E27FC236}">
+                <a16:creationId xmlns:a16="http://schemas.microsoft.com/office/drawing/2014/main" id="{C59FDCE1-57F0-4C9C-941D-59BA067C4966}"/>
+              </a:ext>
+            </a:extLst>
+          </p:cNvPr>
+          <p:cNvPicPr>
+            <a:picLocks noChangeAspect="1"/>
+          </p:cNvPicPr>
+          <p:nvPr/>
+        </p:nvPicPr>
+        <p:blipFill>
+          <a:blip r:embed="rId2"/>
+          <a:stretch>
+            <a:fillRect/>
+          </a:stretch>
+        </p:blipFill>
+        <p:spPr>
+          <a:xfrm>
+            <a:off x="8897420" y="2678577"/>
+            <a:ext cx="2691830" cy="3702240"/>
+          </a:xfrm>
+          <a:prstGeom prst="rect">
+            <a:avLst/>
+          </a:prstGeom>
+        </p:spPr>
+      </p:pic>
+    </p:spTree>
+    <p:extLst>
+      <p:ext uri="{BB962C8B-B14F-4D97-AF65-F5344CB8AC3E}">
+        <p14:creationId xmlns:p14="http://schemas.microsoft.com/office/powerpoint/2010/main" val="177800331"/>
+      </p:ext>
+    </p:extLst>
+  </p:cSld>
+  <p:clrMapOvr>
+    <a:masterClrMapping/>
+  </p:clrMapOvr>
+</p:sld>
+</file>
+
+<file path=ppt/slides/slide49.xml><?xml version="1.0" encoding="utf-8"?>
+<p:sld xmlns:a="http://schemas.openxmlformats.org/drawingml/2006/main" xmlns:r="http://schemas.openxmlformats.org/officeDocument/2006/relationships" xmlns:p="http://schemas.openxmlformats.org/presentationml/2006/main">
+  <p:cSld>
+    <p:spTree>
+      <p:nvGrpSpPr>
+        <p:cNvPr id="1" name=""/>
+        <p:cNvGrpSpPr/>
+        <p:nvPr/>
+      </p:nvGrpSpPr>
+      <p:grpSpPr>
+        <a:xfrm>
+          <a:off x="0" y="0"/>
+          <a:ext cx="0" cy="0"/>
+          <a:chOff x="0" y="0"/>
+          <a:chExt cx="0" cy="0"/>
+        </a:xfrm>
+      </p:grpSpPr>
+      <p:sp>
+        <p:nvSpPr>
+          <p:cNvPr id="2" name="Title 1">
+            <a:extLst>
+              <a:ext uri="{FF2B5EF4-FFF2-40B4-BE49-F238E27FC236}">
+                <a16:creationId xmlns:a16="http://schemas.microsoft.com/office/drawing/2014/main" id="{023F4329-D15F-4F92-82CF-AB9842DB9086}"/>
+              </a:ext>
+            </a:extLst>
+          </p:cNvPr>
+          <p:cNvSpPr>
+            <a:spLocks noGrp="1"/>
+          </p:cNvSpPr>
+          <p:nvPr>
+            <p:ph type="title"/>
+          </p:nvPr>
+        </p:nvSpPr>
+        <p:spPr>
+          <a:xfrm>
+            <a:off x="838200" y="313754"/>
+            <a:ext cx="10515600" cy="1325563"/>
+          </a:xfrm>
+        </p:spPr>
+        <p:txBody>
+          <a:bodyPr/>
+          <a:lstStyle/>
+          <a:p>
+            <a:r>
+              <a:rPr lang="en-US" dirty="0"/>
+              <a:t>2. Storage Virtualization</a:t>
+            </a:r>
+            <a:br>
+              <a:rPr lang="en-US" dirty="0"/>
+            </a:br>
+            <a:endParaRPr lang="en-IN" dirty="0"/>
+          </a:p>
+        </p:txBody>
+      </p:sp>
+      <p:sp>
+        <p:nvSpPr>
+          <p:cNvPr id="3" name="Content Placeholder 2">
+            <a:extLst>
+              <a:ext uri="{FF2B5EF4-FFF2-40B4-BE49-F238E27FC236}">
+                <a16:creationId xmlns:a16="http://schemas.microsoft.com/office/drawing/2014/main" id="{0959210F-B337-49F6-BFF6-4541B4ADC66F}"/>
+              </a:ext>
+            </a:extLst>
+          </p:cNvPr>
+          <p:cNvSpPr>
+            <a:spLocks noGrp="1"/>
+          </p:cNvSpPr>
+          <p:nvPr>
+            <p:ph idx="1"/>
+          </p:nvPr>
+        </p:nvSpPr>
+        <p:spPr>
+          <a:xfrm>
+            <a:off x="838200" y="1140431"/>
+            <a:ext cx="10515600" cy="5036532"/>
+          </a:xfrm>
+        </p:spPr>
+        <p:txBody>
+          <a:bodyPr>
+            <a:normAutofit/>
+          </a:bodyPr>
+          <a:lstStyle/>
+          <a:p>
+            <a:pPr marL="0" indent="0">
+              <a:buNone/>
+            </a:pPr>
+            <a:r>
+              <a:rPr lang="en-US" b="1" dirty="0"/>
+              <a:t>Storage virtualization</a:t>
+            </a:r>
+            <a:r>
+              <a:rPr lang="en-US" dirty="0"/>
+              <a:t> combines physical storage resources and presents them as logical storage resources.</a:t>
+            </a:r>
+          </a:p>
+          <a:p>
+            <a:pPr marL="0" indent="0">
+              <a:buNone/>
+            </a:pPr>
+            <a:r>
+              <a:rPr lang="en-US" dirty="0"/>
+              <a:t>The physical storage may be distributed across:</a:t>
+            </a:r>
+          </a:p>
+          <a:p>
+            <a:r>
+              <a:rPr lang="en-US" dirty="0"/>
+              <a:t>Multiple storage arrays </a:t>
+            </a:r>
+          </a:p>
+          <a:p>
+            <a:r>
+              <a:rPr lang="en-US" dirty="0"/>
+              <a:t>Multiple disks </a:t>
+            </a:r>
+          </a:p>
+          <a:p>
+            <a:r>
+              <a:rPr lang="en-US" dirty="0"/>
+              <a:t>Different storage systems </a:t>
+            </a:r>
+          </a:p>
+          <a:p>
+            <a:r>
+              <a:rPr lang="en-US" dirty="0"/>
+              <a:t>Different locations </a:t>
+            </a:r>
+          </a:p>
+          <a:p>
+            <a:pPr marL="0" indent="0">
+              <a:buNone/>
+            </a:pPr>
+            <a:r>
+              <a:rPr lang="en-US" dirty="0"/>
+              <a:t>The user sees a logical storage resource rather than </a:t>
+            </a:r>
+          </a:p>
+          <a:p>
+            <a:pPr marL="0" indent="0">
+              <a:buNone/>
+            </a:pPr>
+            <a:r>
+              <a:rPr lang="en-US" dirty="0"/>
+              <a:t>the physical disks.</a:t>
+            </a:r>
+          </a:p>
+          <a:p>
+            <a:pPr marL="0" indent="0">
+              <a:buNone/>
+            </a:pPr>
+            <a:endParaRPr lang="en-US" dirty="0"/>
+          </a:p>
+          <a:p>
+            <a:pPr marL="0" indent="0">
+              <a:buNone/>
+            </a:pPr>
+            <a:r>
+              <a:rPr lang="en-US" dirty="0"/>
+              <a:t>The storage virtualization layer hides the physical storage details from the host.</a:t>
+            </a:r>
+          </a:p>
+          <a:p>
+            <a:pPr marL="0" indent="0">
+              <a:buNone/>
+            </a:pPr>
+            <a:endParaRPr lang="en-IN" dirty="0"/>
+          </a:p>
+        </p:txBody>
+      </p:sp>
+      <p:pic>
+        <p:nvPicPr>
+          <p:cNvPr id="4" name="Picture 3">
+            <a:extLst>
+              <a:ext uri="{FF2B5EF4-FFF2-40B4-BE49-F238E27FC236}">
+                <a16:creationId xmlns:a16="http://schemas.microsoft.com/office/drawing/2014/main" id="{6FDE56EB-1EE2-4221-A20C-C906338F48A7}"/>
+              </a:ext>
+            </a:extLst>
+          </p:cNvPr>
+          <p:cNvPicPr>
+            <a:picLocks noChangeAspect="1"/>
+          </p:cNvPicPr>
+          <p:nvPr/>
+        </p:nvPicPr>
+        <p:blipFill>
+          <a:blip r:embed="rId2"/>
+          <a:stretch>
+            <a:fillRect/>
+          </a:stretch>
+        </p:blipFill>
+        <p:spPr>
+          <a:xfrm>
+            <a:off x="8013844" y="1639317"/>
+            <a:ext cx="3038218" cy="3873699"/>
+          </a:xfrm>
+          <a:prstGeom prst="rect">
+            <a:avLst/>
+          </a:prstGeom>
+        </p:spPr>
+      </p:pic>
+    </p:spTree>
+    <p:extLst>
+      <p:ext uri="{BB962C8B-B14F-4D97-AF65-F5344CB8AC3E}">
+        <p14:creationId xmlns:p14="http://schemas.microsoft.com/office/powerpoint/2010/main" val="2209694789"/>
+      </p:ext>
+    </p:extLst>
+  </p:cSld>
+  <p:clrMapOvr>
+    <a:masterClrMapping/>
+  </p:clrMapOvr>
+</p:sld>
+</file>
+
 <file path=ppt/slides/slide5.xml><?xml version="1.0" encoding="utf-8"?>
 <p:sld xmlns:a="http://schemas.openxmlformats.org/drawingml/2006/main" xmlns:r="http://schemas.openxmlformats.org/officeDocument/2006/relationships" xmlns:p="http://schemas.openxmlformats.org/presentationml/2006/main">
   <p:cSld>
@@ -10791,6 +13556,1476 @@
     <p:extLst>
       <p:ext uri="{BB962C8B-B14F-4D97-AF65-F5344CB8AC3E}">
         <p14:creationId xmlns:p14="http://schemas.microsoft.com/office/powerpoint/2010/main" val="2539470205"/>
+      </p:ext>
+    </p:extLst>
+  </p:cSld>
+  <p:clrMapOvr>
+    <a:masterClrMapping/>
+  </p:clrMapOvr>
+</p:sld>
+</file>
+
+<file path=ppt/slides/slide50.xml><?xml version="1.0" encoding="utf-8"?>
+<p:sld xmlns:a="http://schemas.openxmlformats.org/drawingml/2006/main" xmlns:r="http://schemas.openxmlformats.org/officeDocument/2006/relationships" xmlns:p="http://schemas.openxmlformats.org/presentationml/2006/main">
+  <p:cSld>
+    <p:spTree>
+      <p:nvGrpSpPr>
+        <p:cNvPr id="1" name=""/>
+        <p:cNvGrpSpPr/>
+        <p:nvPr/>
+      </p:nvGrpSpPr>
+      <p:grpSpPr>
+        <a:xfrm>
+          <a:off x="0" y="0"/>
+          <a:ext cx="0" cy="0"/>
+          <a:chOff x="0" y="0"/>
+          <a:chExt cx="0" cy="0"/>
+        </a:xfrm>
+      </p:grpSpPr>
+      <p:sp>
+        <p:nvSpPr>
+          <p:cNvPr id="2" name="Title 1">
+            <a:extLst>
+              <a:ext uri="{FF2B5EF4-FFF2-40B4-BE49-F238E27FC236}">
+                <a16:creationId xmlns:a16="http://schemas.microsoft.com/office/drawing/2014/main" id="{C8D234FB-8F3E-4084-B1CC-5CBE5ECA084A}"/>
+              </a:ext>
+            </a:extLst>
+          </p:cNvPr>
+          <p:cNvSpPr>
+            <a:spLocks noGrp="1"/>
+          </p:cNvSpPr>
+          <p:nvPr>
+            <p:ph type="title"/>
+          </p:nvPr>
+        </p:nvSpPr>
+        <p:spPr/>
+        <p:txBody>
+          <a:bodyPr/>
+          <a:lstStyle/>
+          <a:p>
+            <a:r>
+              <a:rPr lang="en-IN" dirty="0"/>
+              <a:t>3. FC Network Virtualization</a:t>
+            </a:r>
+          </a:p>
+        </p:txBody>
+      </p:sp>
+      <p:sp>
+        <p:nvSpPr>
+          <p:cNvPr id="3" name="Content Placeholder 2">
+            <a:extLst>
+              <a:ext uri="{FF2B5EF4-FFF2-40B4-BE49-F238E27FC236}">
+                <a16:creationId xmlns:a16="http://schemas.microsoft.com/office/drawing/2014/main" id="{92B4315D-0AED-4D27-B1E8-A990264F67D9}"/>
+              </a:ext>
+            </a:extLst>
+          </p:cNvPr>
+          <p:cNvSpPr>
+            <a:spLocks noGrp="1"/>
+          </p:cNvSpPr>
+          <p:nvPr>
+            <p:ph idx="1"/>
+          </p:nvPr>
+        </p:nvSpPr>
+        <p:spPr/>
+        <p:txBody>
+          <a:bodyPr/>
+          <a:lstStyle/>
+          <a:p>
+            <a:r>
+              <a:rPr lang="en-US" dirty="0"/>
+              <a:t>In network-based storage virtualization, a virtualization appliance or intelligent network device sits between the servers and storage systems.</a:t>
+            </a:r>
+          </a:p>
+          <a:p>
+            <a:r>
+              <a:rPr lang="en-US" dirty="0"/>
+              <a:t>The virtualization device presents virtual storage resources to hosts while managing the underlying physical storage.</a:t>
+            </a:r>
+          </a:p>
+          <a:p>
+            <a:endParaRPr lang="en-IN" dirty="0"/>
+          </a:p>
+        </p:txBody>
+      </p:sp>
+      <p:pic>
+        <p:nvPicPr>
+          <p:cNvPr id="4" name="Picture 3">
+            <a:extLst>
+              <a:ext uri="{FF2B5EF4-FFF2-40B4-BE49-F238E27FC236}">
+                <a16:creationId xmlns:a16="http://schemas.microsoft.com/office/drawing/2014/main" id="{F0593750-A014-42EE-A95E-814A6BFEC373}"/>
+              </a:ext>
+            </a:extLst>
+          </p:cNvPr>
+          <p:cNvPicPr>
+            <a:picLocks noChangeAspect="1"/>
+          </p:cNvPicPr>
+          <p:nvPr/>
+        </p:nvPicPr>
+        <p:blipFill>
+          <a:blip r:embed="rId2"/>
+          <a:stretch>
+            <a:fillRect/>
+          </a:stretch>
+        </p:blipFill>
+        <p:spPr>
+          <a:xfrm>
+            <a:off x="8167955" y="3428999"/>
+            <a:ext cx="2321960" cy="3063875"/>
+          </a:xfrm>
+          <a:prstGeom prst="rect">
+            <a:avLst/>
+          </a:prstGeom>
+        </p:spPr>
+      </p:pic>
+    </p:spTree>
+    <p:extLst>
+      <p:ext uri="{BB962C8B-B14F-4D97-AF65-F5344CB8AC3E}">
+        <p14:creationId xmlns:p14="http://schemas.microsoft.com/office/powerpoint/2010/main" val="4053863769"/>
+      </p:ext>
+    </p:extLst>
+  </p:cSld>
+  <p:clrMapOvr>
+    <a:masterClrMapping/>
+  </p:clrMapOvr>
+</p:sld>
+</file>
+
+<file path=ppt/slides/slide51.xml><?xml version="1.0" encoding="utf-8"?>
+<p:sld xmlns:a="http://schemas.openxmlformats.org/drawingml/2006/main" xmlns:r="http://schemas.openxmlformats.org/officeDocument/2006/relationships" xmlns:p="http://schemas.openxmlformats.org/presentationml/2006/main">
+  <p:cSld>
+    <p:spTree>
+      <p:nvGrpSpPr>
+        <p:cNvPr id="1" name=""/>
+        <p:cNvGrpSpPr/>
+        <p:nvPr/>
+      </p:nvGrpSpPr>
+      <p:grpSpPr>
+        <a:xfrm>
+          <a:off x="0" y="0"/>
+          <a:ext cx="0" cy="0"/>
+          <a:chOff x="0" y="0"/>
+          <a:chExt cx="0" cy="0"/>
+        </a:xfrm>
+      </p:grpSpPr>
+      <p:sp>
+        <p:nvSpPr>
+          <p:cNvPr id="2" name="Title 1">
+            <a:extLst>
+              <a:ext uri="{FF2B5EF4-FFF2-40B4-BE49-F238E27FC236}">
+                <a16:creationId xmlns:a16="http://schemas.microsoft.com/office/drawing/2014/main" id="{F2C3D918-4D03-4CF1-97B4-0FB5FDA97C38}"/>
+              </a:ext>
+            </a:extLst>
+          </p:cNvPr>
+          <p:cNvSpPr>
+            <a:spLocks noGrp="1"/>
+          </p:cNvSpPr>
+          <p:nvPr>
+            <p:ph type="title"/>
+          </p:nvPr>
+        </p:nvSpPr>
+        <p:spPr/>
+        <p:txBody>
+          <a:bodyPr/>
+          <a:lstStyle/>
+          <a:p>
+            <a:r>
+              <a:rPr lang="en-US" dirty="0"/>
+              <a:t>4. Virtual HBA</a:t>
+            </a:r>
+            <a:br>
+              <a:rPr lang="en-US" dirty="0"/>
+            </a:br>
+            <a:endParaRPr lang="en-IN" dirty="0"/>
+          </a:p>
+        </p:txBody>
+      </p:sp>
+      <p:sp>
+        <p:nvSpPr>
+          <p:cNvPr id="3" name="Content Placeholder 2">
+            <a:extLst>
+              <a:ext uri="{FF2B5EF4-FFF2-40B4-BE49-F238E27FC236}">
+                <a16:creationId xmlns:a16="http://schemas.microsoft.com/office/drawing/2014/main" id="{360FE6FD-18FE-42F4-B3ED-28A85639052E}"/>
+              </a:ext>
+            </a:extLst>
+          </p:cNvPr>
+          <p:cNvSpPr>
+            <a:spLocks noGrp="1"/>
+          </p:cNvSpPr>
+          <p:nvPr>
+            <p:ph idx="1"/>
+          </p:nvPr>
+        </p:nvSpPr>
+        <p:spPr>
+          <a:xfrm>
+            <a:off x="838200" y="1150706"/>
+            <a:ext cx="10515600" cy="5026257"/>
+          </a:xfrm>
+        </p:spPr>
+        <p:txBody>
+          <a:bodyPr/>
+          <a:lstStyle/>
+          <a:p>
+            <a:r>
+              <a:rPr lang="en-US" dirty="0"/>
+              <a:t>A physical server normally uses an </a:t>
+            </a:r>
+            <a:r>
+              <a:rPr lang="en-US" b="1" dirty="0"/>
+              <a:t>HBA (Host Bus Adapter)</a:t>
+            </a:r>
+            <a:r>
+              <a:rPr lang="en-US" dirty="0"/>
+              <a:t> to connect to the FC SAN.</a:t>
+            </a:r>
+          </a:p>
+          <a:p>
+            <a:r>
+              <a:rPr lang="en-US" dirty="0"/>
+              <a:t>In a virtualized server environment, a physical HBA can support multiple </a:t>
+            </a:r>
+            <a:r>
+              <a:rPr lang="en-US" b="1" dirty="0"/>
+              <a:t>virtual HBAs</a:t>
+            </a:r>
+            <a:r>
+              <a:rPr lang="en-US" dirty="0"/>
+              <a:t>.</a:t>
+            </a:r>
+          </a:p>
+          <a:p>
+            <a:r>
+              <a:rPr lang="en-US" dirty="0"/>
+              <a:t>A virtual HBA provides each VM with an identity that allows it to access FC storage.</a:t>
+            </a:r>
+          </a:p>
+          <a:p>
+            <a:endParaRPr lang="en-IN" dirty="0"/>
+          </a:p>
+        </p:txBody>
+      </p:sp>
+      <p:pic>
+        <p:nvPicPr>
+          <p:cNvPr id="4" name="Picture 3">
+            <a:extLst>
+              <a:ext uri="{FF2B5EF4-FFF2-40B4-BE49-F238E27FC236}">
+                <a16:creationId xmlns:a16="http://schemas.microsoft.com/office/drawing/2014/main" id="{B8D108CC-7FE3-483F-8C95-73360FFCFF89}"/>
+              </a:ext>
+            </a:extLst>
+          </p:cNvPr>
+          <p:cNvPicPr>
+            <a:picLocks noChangeAspect="1"/>
+          </p:cNvPicPr>
+          <p:nvPr/>
+        </p:nvPicPr>
+        <p:blipFill>
+          <a:blip r:embed="rId2"/>
+          <a:stretch>
+            <a:fillRect/>
+          </a:stretch>
+        </p:blipFill>
+        <p:spPr>
+          <a:xfrm>
+            <a:off x="8044665" y="3125760"/>
+            <a:ext cx="2772975" cy="3244218"/>
+          </a:xfrm>
+          <a:prstGeom prst="rect">
+            <a:avLst/>
+          </a:prstGeom>
+        </p:spPr>
+      </p:pic>
+    </p:spTree>
+    <p:extLst>
+      <p:ext uri="{BB962C8B-B14F-4D97-AF65-F5344CB8AC3E}">
+        <p14:creationId xmlns:p14="http://schemas.microsoft.com/office/powerpoint/2010/main" val="1376793160"/>
+      </p:ext>
+    </p:extLst>
+  </p:cSld>
+  <p:clrMapOvr>
+    <a:masterClrMapping/>
+  </p:clrMapOvr>
+</p:sld>
+</file>
+
+<file path=ppt/slides/slide52.xml><?xml version="1.0" encoding="utf-8"?>
+<p:sld xmlns:a="http://schemas.openxmlformats.org/drawingml/2006/main" xmlns:r="http://schemas.openxmlformats.org/officeDocument/2006/relationships" xmlns:p="http://schemas.openxmlformats.org/presentationml/2006/main">
+  <p:cSld>
+    <p:spTree>
+      <p:nvGrpSpPr>
+        <p:cNvPr id="1" name=""/>
+        <p:cNvGrpSpPr/>
+        <p:nvPr/>
+      </p:nvGrpSpPr>
+      <p:grpSpPr>
+        <a:xfrm>
+          <a:off x="0" y="0"/>
+          <a:ext cx="0" cy="0"/>
+          <a:chOff x="0" y="0"/>
+          <a:chExt cx="0" cy="0"/>
+        </a:xfrm>
+      </p:grpSpPr>
+      <p:sp>
+        <p:nvSpPr>
+          <p:cNvPr id="2" name="Title 1">
+            <a:extLst>
+              <a:ext uri="{FF2B5EF4-FFF2-40B4-BE49-F238E27FC236}">
+                <a16:creationId xmlns:a16="http://schemas.microsoft.com/office/drawing/2014/main" id="{81EA4B7B-42BF-4C33-A8A9-574391E1CDFB}"/>
+              </a:ext>
+            </a:extLst>
+          </p:cNvPr>
+          <p:cNvSpPr>
+            <a:spLocks noGrp="1"/>
+          </p:cNvSpPr>
+          <p:nvPr>
+            <p:ph type="title"/>
+          </p:nvPr>
+        </p:nvSpPr>
+        <p:spPr/>
+        <p:txBody>
+          <a:bodyPr/>
+          <a:lstStyle/>
+          <a:p>
+            <a:r>
+              <a:rPr lang="en-IN" dirty="0"/>
+              <a:t>5. </a:t>
+            </a:r>
+            <a:r>
+              <a:rPr lang="en-US" dirty="0"/>
+              <a:t>Virtual SAN (VSAN)</a:t>
+            </a:r>
+            <a:endParaRPr lang="en-IN" dirty="0"/>
+          </a:p>
+        </p:txBody>
+      </p:sp>
+      <p:sp>
+        <p:nvSpPr>
+          <p:cNvPr id="3" name="Content Placeholder 2">
+            <a:extLst>
+              <a:ext uri="{FF2B5EF4-FFF2-40B4-BE49-F238E27FC236}">
+                <a16:creationId xmlns:a16="http://schemas.microsoft.com/office/drawing/2014/main" id="{6A15A5B8-017E-4DA3-9752-29F4C7E17C97}"/>
+              </a:ext>
+            </a:extLst>
+          </p:cNvPr>
+          <p:cNvSpPr>
+            <a:spLocks noGrp="1"/>
+          </p:cNvSpPr>
+          <p:nvPr>
+            <p:ph idx="1"/>
+          </p:nvPr>
+        </p:nvSpPr>
+        <p:spPr>
+          <a:xfrm>
+            <a:off x="838200" y="1376737"/>
+            <a:ext cx="10515600" cy="4800226"/>
+          </a:xfrm>
+        </p:spPr>
+        <p:txBody>
+          <a:bodyPr/>
+          <a:lstStyle/>
+          <a:p>
+            <a:r>
+              <a:rPr lang="en-US" dirty="0"/>
+              <a:t>A </a:t>
+            </a:r>
+            <a:r>
+              <a:rPr lang="en-US" b="1" dirty="0"/>
+              <a:t>VSAN (Virtual Storage Area Network)</a:t>
+            </a:r>
+            <a:r>
+              <a:rPr lang="en-US" dirty="0"/>
+              <a:t> divides a physical FC switch or physical FC fabric into multiple logical SANs.</a:t>
+            </a:r>
+          </a:p>
+          <a:p>
+            <a:r>
+              <a:rPr lang="en-US" dirty="0"/>
+              <a:t>Each VSAN operates as an independent logical fabric.</a:t>
+            </a:r>
+          </a:p>
+          <a:p>
+            <a:r>
+              <a:rPr lang="en-US" dirty="0"/>
+              <a:t>Although VSANs share the same physical switch hardware, their traffic is logically separated.</a:t>
+            </a:r>
+            <a:endParaRPr lang="en-IN" dirty="0"/>
+          </a:p>
+        </p:txBody>
+      </p:sp>
+      <p:pic>
+        <p:nvPicPr>
+          <p:cNvPr id="4" name="Picture 3">
+            <a:extLst>
+              <a:ext uri="{FF2B5EF4-FFF2-40B4-BE49-F238E27FC236}">
+                <a16:creationId xmlns:a16="http://schemas.microsoft.com/office/drawing/2014/main" id="{CBB6FF4F-ED2B-4E64-8CFF-2C53EEF4D6DD}"/>
+              </a:ext>
+            </a:extLst>
+          </p:cNvPr>
+          <p:cNvPicPr>
+            <a:picLocks noChangeAspect="1"/>
+          </p:cNvPicPr>
+          <p:nvPr/>
+        </p:nvPicPr>
+        <p:blipFill>
+          <a:blip r:embed="rId2"/>
+          <a:stretch>
+            <a:fillRect/>
+          </a:stretch>
+        </p:blipFill>
+        <p:spPr>
+          <a:xfrm>
+            <a:off x="5181218" y="3199827"/>
+            <a:ext cx="2935365" cy="3519472"/>
+          </a:xfrm>
+          <a:prstGeom prst="rect">
+            <a:avLst/>
+          </a:prstGeom>
+        </p:spPr>
+      </p:pic>
+    </p:spTree>
+    <p:extLst>
+      <p:ext uri="{BB962C8B-B14F-4D97-AF65-F5344CB8AC3E}">
+        <p14:creationId xmlns:p14="http://schemas.microsoft.com/office/powerpoint/2010/main" val="3182774821"/>
+      </p:ext>
+    </p:extLst>
+  </p:cSld>
+  <p:clrMapOvr>
+    <a:masterClrMapping/>
+  </p:clrMapOvr>
+</p:sld>
+</file>
+
+<file path=ppt/slides/slide53.xml><?xml version="1.0" encoding="utf-8"?>
+<p:sld xmlns:a="http://schemas.openxmlformats.org/drawingml/2006/main" xmlns:r="http://schemas.openxmlformats.org/officeDocument/2006/relationships" xmlns:p="http://schemas.openxmlformats.org/presentationml/2006/main">
+  <p:cSld>
+    <p:spTree>
+      <p:nvGrpSpPr>
+        <p:cNvPr id="1" name=""/>
+        <p:cNvGrpSpPr/>
+        <p:nvPr/>
+      </p:nvGrpSpPr>
+      <p:grpSpPr>
+        <a:xfrm>
+          <a:off x="0" y="0"/>
+          <a:ext cx="0" cy="0"/>
+          <a:chOff x="0" y="0"/>
+          <a:chExt cx="0" cy="0"/>
+        </a:xfrm>
+      </p:grpSpPr>
+      <p:sp>
+        <p:nvSpPr>
+          <p:cNvPr id="2" name="Title 1">
+            <a:extLst>
+              <a:ext uri="{FF2B5EF4-FFF2-40B4-BE49-F238E27FC236}">
+                <a16:creationId xmlns:a16="http://schemas.microsoft.com/office/drawing/2014/main" id="{AD5DDF6B-DAE5-4D5A-98FD-9AD7F24C60BB}"/>
+              </a:ext>
+            </a:extLst>
+          </p:cNvPr>
+          <p:cNvSpPr>
+            <a:spLocks noGrp="1"/>
+          </p:cNvSpPr>
+          <p:nvPr>
+            <p:ph type="title"/>
+          </p:nvPr>
+        </p:nvSpPr>
+        <p:spPr/>
+        <p:txBody>
+          <a:bodyPr/>
+          <a:lstStyle/>
+          <a:p>
+            <a:r>
+              <a:rPr lang="en-US" dirty="0"/>
+              <a:t>End-to-End Operation</a:t>
+            </a:r>
+            <a:br>
+              <a:rPr lang="en-US" dirty="0"/>
+            </a:br>
+            <a:endParaRPr lang="en-IN" dirty="0"/>
+          </a:p>
+        </p:txBody>
+      </p:sp>
+      <p:sp>
+        <p:nvSpPr>
+          <p:cNvPr id="3" name="Content Placeholder 2">
+            <a:extLst>
+              <a:ext uri="{FF2B5EF4-FFF2-40B4-BE49-F238E27FC236}">
+                <a16:creationId xmlns:a16="http://schemas.microsoft.com/office/drawing/2014/main" id="{BE1491D9-BB9B-439A-B963-FE99D4499C6E}"/>
+              </a:ext>
+            </a:extLst>
+          </p:cNvPr>
+          <p:cNvSpPr>
+            <a:spLocks noGrp="1"/>
+          </p:cNvSpPr>
+          <p:nvPr>
+            <p:ph idx="1"/>
+          </p:nvPr>
+        </p:nvSpPr>
+        <p:spPr>
+          <a:xfrm>
+            <a:off x="838200" y="1099334"/>
+            <a:ext cx="10515600" cy="5558319"/>
+          </a:xfrm>
+        </p:spPr>
+        <p:txBody>
+          <a:bodyPr>
+            <a:normAutofit fontScale="70000" lnSpcReduction="20000"/>
+          </a:bodyPr>
+          <a:lstStyle/>
+          <a:p>
+            <a:pPr marL="0" indent="0">
+              <a:buNone/>
+            </a:pPr>
+            <a:r>
+              <a:rPr lang="en-US" dirty="0"/>
+              <a:t>Consider a virtual machine </a:t>
+            </a:r>
+            <a:r>
+              <a:rPr lang="en-US" b="1" dirty="0"/>
+              <a:t>VM1</a:t>
+            </a:r>
+            <a:r>
+              <a:rPr lang="en-US" dirty="0"/>
+              <a:t> that needs to access a database LUN.</a:t>
+            </a:r>
+          </a:p>
+          <a:p>
+            <a:pPr marL="0" indent="0">
+              <a:buNone/>
+            </a:pPr>
+            <a:r>
+              <a:rPr lang="en-US" b="1" dirty="0"/>
+              <a:t>Step 1 – VM requests storage</a:t>
+            </a:r>
+          </a:p>
+          <a:p>
+            <a:pPr marL="0" indent="0">
+              <a:buNone/>
+            </a:pPr>
+            <a:r>
+              <a:rPr lang="en-US" dirty="0"/>
+              <a:t>VM1 sends an I/O request to its virtual disk.</a:t>
+            </a:r>
+          </a:p>
+          <a:p>
+            <a:pPr marL="0" indent="0">
+              <a:buNone/>
+            </a:pPr>
+            <a:r>
+              <a:rPr lang="en-US" b="1" dirty="0"/>
+              <a:t>Step 2 – Hypervisor processes the request</a:t>
+            </a:r>
+          </a:p>
+          <a:p>
+            <a:pPr marL="0" indent="0">
+              <a:buNone/>
+            </a:pPr>
+            <a:r>
+              <a:rPr lang="en-US" dirty="0"/>
+              <a:t>The hypervisor maps the VM's virtual disk to an FC-accessible storage resource.</a:t>
+            </a:r>
+          </a:p>
+          <a:p>
+            <a:pPr marL="0" indent="0">
+              <a:buNone/>
+            </a:pPr>
+            <a:r>
+              <a:rPr lang="en-US" b="1" dirty="0"/>
+              <a:t>Step 3 – Virtual HBA identifies VM</a:t>
+            </a:r>
+          </a:p>
+          <a:p>
+            <a:pPr marL="0" indent="0">
+              <a:buNone/>
+            </a:pPr>
+            <a:r>
+              <a:rPr lang="en-US" dirty="0"/>
+              <a:t>The virtual HBA provides a virtual FC identity, generally represented using a virtual WWPN.</a:t>
+            </a:r>
+          </a:p>
+          <a:p>
+            <a:pPr marL="0" indent="0">
+              <a:buNone/>
+            </a:pPr>
+            <a:r>
+              <a:rPr lang="en-US" b="1" dirty="0"/>
+              <a:t>Step 4 – FC switch receives request</a:t>
+            </a:r>
+          </a:p>
+          <a:p>
+            <a:pPr marL="0" indent="0">
+              <a:buNone/>
+            </a:pPr>
+            <a:r>
+              <a:rPr lang="en-US" dirty="0"/>
+              <a:t>The FC switch identifies the source and destination.</a:t>
+            </a:r>
+          </a:p>
+          <a:p>
+            <a:pPr marL="0" indent="0">
+              <a:buNone/>
+            </a:pPr>
+            <a:r>
+              <a:rPr lang="en-US" b="1" dirty="0"/>
+              <a:t>Step 5 – Zoning is checked</a:t>
+            </a:r>
+          </a:p>
+          <a:p>
+            <a:pPr marL="0" indent="0">
+              <a:buNone/>
+            </a:pPr>
+            <a:r>
+              <a:rPr lang="en-US" dirty="0"/>
+              <a:t>The FC fabric verifies whether VM1 is permitted to access the destination storage port.</a:t>
+            </a:r>
+          </a:p>
+          <a:p>
+            <a:pPr marL="0" indent="0">
+              <a:buNone/>
+            </a:pPr>
+            <a:r>
+              <a:rPr lang="en-US" b="1" dirty="0"/>
+              <a:t>Step 6 – Storage array receives request</a:t>
+            </a:r>
+          </a:p>
+          <a:p>
+            <a:pPr marL="0" indent="0">
+              <a:buNone/>
+            </a:pPr>
+            <a:r>
+              <a:rPr lang="en-US" dirty="0"/>
+              <a:t>The storage array identifies the host through its WWPN.</a:t>
+            </a:r>
+          </a:p>
+          <a:p>
+            <a:pPr marL="0" indent="0">
+              <a:buNone/>
+            </a:pPr>
+            <a:r>
+              <a:rPr lang="en-US" b="1" dirty="0"/>
+              <a:t>Step 7 – LUN masking is applied</a:t>
+            </a:r>
+          </a:p>
+          <a:p>
+            <a:pPr marL="0" indent="0">
+              <a:buNone/>
+            </a:pPr>
+            <a:r>
+              <a:rPr lang="en-US" dirty="0"/>
+              <a:t>The storage system checks whether the host is authorized to access the requested LUN.</a:t>
+            </a:r>
+          </a:p>
+          <a:p>
+            <a:pPr marL="0" indent="0">
+              <a:buNone/>
+            </a:pPr>
+            <a:r>
+              <a:rPr lang="en-US" b="1" dirty="0"/>
+              <a:t>Step 8 – Data is transferred</a:t>
+            </a:r>
+          </a:p>
+          <a:p>
+            <a:pPr marL="0" indent="0">
+              <a:buNone/>
+            </a:pPr>
+            <a:r>
+              <a:rPr lang="en-US" dirty="0"/>
+              <a:t>The requested data travels back through the FC fabric to VM1.</a:t>
+            </a:r>
+          </a:p>
+          <a:p>
+            <a:endParaRPr lang="en-IN" dirty="0"/>
+          </a:p>
+        </p:txBody>
+      </p:sp>
+    </p:spTree>
+    <p:extLst>
+      <p:ext uri="{BB962C8B-B14F-4D97-AF65-F5344CB8AC3E}">
+        <p14:creationId xmlns:p14="http://schemas.microsoft.com/office/powerpoint/2010/main" val="339471471"/>
+      </p:ext>
+    </p:extLst>
+  </p:cSld>
+  <p:clrMapOvr>
+    <a:masterClrMapping/>
+  </p:clrMapOvr>
+</p:sld>
+</file>
+
+<file path=ppt/slides/slide54.xml><?xml version="1.0" encoding="utf-8"?>
+<p:sld xmlns:a="http://schemas.openxmlformats.org/drawingml/2006/main" xmlns:r="http://schemas.openxmlformats.org/officeDocument/2006/relationships" xmlns:p="http://schemas.openxmlformats.org/presentationml/2006/main">
+  <p:cSld>
+    <p:spTree>
+      <p:nvGrpSpPr>
+        <p:cNvPr id="1" name=""/>
+        <p:cNvGrpSpPr/>
+        <p:nvPr/>
+      </p:nvGrpSpPr>
+      <p:grpSpPr>
+        <a:xfrm>
+          <a:off x="0" y="0"/>
+          <a:ext cx="0" cy="0"/>
+          <a:chOff x="0" y="0"/>
+          <a:chExt cx="0" cy="0"/>
+        </a:xfrm>
+      </p:grpSpPr>
+      <p:sp>
+        <p:nvSpPr>
+          <p:cNvPr id="2" name="Title 1">
+            <a:extLst>
+              <a:ext uri="{FF2B5EF4-FFF2-40B4-BE49-F238E27FC236}">
+                <a16:creationId xmlns:a16="http://schemas.microsoft.com/office/drawing/2014/main" id="{F24C3A1B-5B14-4A4F-A862-0A9970639D59}"/>
+              </a:ext>
+            </a:extLst>
+          </p:cNvPr>
+          <p:cNvSpPr>
+            <a:spLocks noGrp="1"/>
+          </p:cNvSpPr>
+          <p:nvPr>
+            <p:ph type="title"/>
+          </p:nvPr>
+        </p:nvSpPr>
+        <p:spPr/>
+        <p:txBody>
+          <a:bodyPr/>
+          <a:lstStyle/>
+          <a:p>
+            <a:r>
+              <a:rPr lang="en-IN" dirty="0"/>
+              <a:t>Virtualization and Multipathing</a:t>
+            </a:r>
+          </a:p>
+        </p:txBody>
+      </p:sp>
+      <p:sp>
+        <p:nvSpPr>
+          <p:cNvPr id="3" name="Content Placeholder 2">
+            <a:extLst>
+              <a:ext uri="{FF2B5EF4-FFF2-40B4-BE49-F238E27FC236}">
+                <a16:creationId xmlns:a16="http://schemas.microsoft.com/office/drawing/2014/main" id="{28C74A17-5EC0-4DCF-B45A-8F4C8449502F}"/>
+              </a:ext>
+            </a:extLst>
+          </p:cNvPr>
+          <p:cNvSpPr>
+            <a:spLocks noGrp="1"/>
+          </p:cNvSpPr>
+          <p:nvPr>
+            <p:ph idx="1"/>
+          </p:nvPr>
+        </p:nvSpPr>
+        <p:spPr/>
+        <p:txBody>
+          <a:bodyPr>
+            <a:normAutofit lnSpcReduction="10000"/>
+          </a:bodyPr>
+          <a:lstStyle/>
+          <a:p>
+            <a:pPr marL="0" indent="0">
+              <a:buNone/>
+            </a:pPr>
+            <a:r>
+              <a:rPr lang="en-US" dirty="0"/>
+              <a:t>FC SANs normally use multiple paths for high availability.</a:t>
+            </a:r>
+          </a:p>
+          <a:p>
+            <a:pPr marL="0" indent="0">
+              <a:buNone/>
+            </a:pPr>
+            <a:r>
+              <a:rPr lang="en-US" dirty="0"/>
+              <a:t>For example:</a:t>
+            </a:r>
+          </a:p>
+          <a:p>
+            <a:pPr marL="0" indent="0">
+              <a:buNone/>
+            </a:pPr>
+            <a:r>
+              <a:rPr lang="en-US" dirty="0"/>
+              <a:t>If one path fails, the other path can continue carrying traffic.</a:t>
+            </a:r>
+          </a:p>
+          <a:p>
+            <a:pPr marL="0" indent="0">
+              <a:buNone/>
+            </a:pPr>
+            <a:r>
+              <a:rPr lang="en-US" dirty="0"/>
+              <a:t>This technique is called </a:t>
+            </a:r>
+            <a:r>
+              <a:rPr lang="en-US" b="1" dirty="0"/>
+              <a:t>multipathing</a:t>
+            </a:r>
+            <a:r>
+              <a:rPr lang="en-US" dirty="0"/>
+              <a:t>.</a:t>
+            </a:r>
+          </a:p>
+          <a:p>
+            <a:pPr marL="0" indent="0">
+              <a:buNone/>
+            </a:pPr>
+            <a:r>
+              <a:rPr lang="en-US" dirty="0"/>
+              <a:t>A software component called </a:t>
+            </a:r>
+            <a:r>
+              <a:rPr lang="en-US" b="1" dirty="0"/>
+              <a:t>MPIO (Multipath I/O)</a:t>
+            </a:r>
+            <a:r>
+              <a:rPr lang="en-US" dirty="0"/>
+              <a:t> or an equivalent multipathing framework manages multiple paths.</a:t>
+            </a:r>
+          </a:p>
+          <a:p>
+            <a:pPr marL="0" indent="0">
+              <a:buNone/>
+            </a:pPr>
+            <a:r>
+              <a:rPr lang="en-US" b="1" dirty="0"/>
+              <a:t>Benefits</a:t>
+            </a:r>
+          </a:p>
+          <a:p>
+            <a:pPr lvl="1"/>
+            <a:r>
+              <a:rPr lang="en-US" dirty="0"/>
+              <a:t>High availability </a:t>
+            </a:r>
+          </a:p>
+          <a:p>
+            <a:pPr lvl="1"/>
+            <a:r>
+              <a:rPr lang="en-US" dirty="0"/>
+              <a:t>Fault tolerance </a:t>
+            </a:r>
+          </a:p>
+          <a:p>
+            <a:pPr lvl="1"/>
+            <a:r>
+              <a:rPr lang="en-US" dirty="0"/>
+              <a:t>Load balancing </a:t>
+            </a:r>
+          </a:p>
+          <a:p>
+            <a:pPr lvl="1"/>
+            <a:r>
+              <a:rPr lang="en-US" dirty="0"/>
+              <a:t>Continuous access to storage</a:t>
+            </a:r>
+          </a:p>
+          <a:p>
+            <a:endParaRPr lang="en-US" dirty="0"/>
+          </a:p>
+          <a:p>
+            <a:endParaRPr lang="en-US" dirty="0"/>
+          </a:p>
+          <a:p>
+            <a:endParaRPr lang="en-IN" b="1" dirty="0"/>
+          </a:p>
+        </p:txBody>
+      </p:sp>
+      <p:pic>
+        <p:nvPicPr>
+          <p:cNvPr id="4" name="Picture 3">
+            <a:extLst>
+              <a:ext uri="{FF2B5EF4-FFF2-40B4-BE49-F238E27FC236}">
+                <a16:creationId xmlns:a16="http://schemas.microsoft.com/office/drawing/2014/main" id="{BCD5BFD6-788A-4A5E-802C-030699351822}"/>
+              </a:ext>
+            </a:extLst>
+          </p:cNvPr>
+          <p:cNvPicPr>
+            <a:picLocks noChangeAspect="1"/>
+          </p:cNvPicPr>
+          <p:nvPr/>
+        </p:nvPicPr>
+        <p:blipFill>
+          <a:blip r:embed="rId2"/>
+          <a:stretch>
+            <a:fillRect/>
+          </a:stretch>
+        </p:blipFill>
+        <p:spPr>
+          <a:xfrm>
+            <a:off x="9082559" y="3893180"/>
+            <a:ext cx="2445046" cy="2418720"/>
+          </a:xfrm>
+          <a:prstGeom prst="rect">
+            <a:avLst/>
+          </a:prstGeom>
+        </p:spPr>
+      </p:pic>
+    </p:spTree>
+    <p:extLst>
+      <p:ext uri="{BB962C8B-B14F-4D97-AF65-F5344CB8AC3E}">
+        <p14:creationId xmlns:p14="http://schemas.microsoft.com/office/powerpoint/2010/main" val="3500627368"/>
+      </p:ext>
+    </p:extLst>
+  </p:cSld>
+  <p:clrMapOvr>
+    <a:masterClrMapping/>
+  </p:clrMapOvr>
+</p:sld>
+</file>
+
+<file path=ppt/slides/slide55.xml><?xml version="1.0" encoding="utf-8"?>
+<p:sld xmlns:a="http://schemas.openxmlformats.org/drawingml/2006/main" xmlns:r="http://schemas.openxmlformats.org/officeDocument/2006/relationships" xmlns:p="http://schemas.openxmlformats.org/presentationml/2006/main">
+  <p:cSld>
+    <p:spTree>
+      <p:nvGrpSpPr>
+        <p:cNvPr id="1" name=""/>
+        <p:cNvGrpSpPr/>
+        <p:nvPr/>
+      </p:nvGrpSpPr>
+      <p:grpSpPr>
+        <a:xfrm>
+          <a:off x="0" y="0"/>
+          <a:ext cx="0" cy="0"/>
+          <a:chOff x="0" y="0"/>
+          <a:chExt cx="0" cy="0"/>
+        </a:xfrm>
+      </p:grpSpPr>
+      <p:sp>
+        <p:nvSpPr>
+          <p:cNvPr id="2" name="Title 1">
+            <a:extLst>
+              <a:ext uri="{FF2B5EF4-FFF2-40B4-BE49-F238E27FC236}">
+                <a16:creationId xmlns:a16="http://schemas.microsoft.com/office/drawing/2014/main" id="{2CC036AA-F26B-4AA4-B55E-B1E7A0066C96}"/>
+              </a:ext>
+            </a:extLst>
+          </p:cNvPr>
+          <p:cNvSpPr>
+            <a:spLocks noGrp="1"/>
+          </p:cNvSpPr>
+          <p:nvPr>
+            <p:ph type="title"/>
+          </p:nvPr>
+        </p:nvSpPr>
+        <p:spPr/>
+        <p:txBody>
+          <a:bodyPr/>
+          <a:lstStyle/>
+          <a:p>
+            <a:r>
+              <a:rPr lang="en-IN" dirty="0"/>
+              <a:t>Example Scenario</a:t>
+            </a:r>
+          </a:p>
+        </p:txBody>
+      </p:sp>
+      <p:sp>
+        <p:nvSpPr>
+          <p:cNvPr id="3" name="Content Placeholder 2">
+            <a:extLst>
+              <a:ext uri="{FF2B5EF4-FFF2-40B4-BE49-F238E27FC236}">
+                <a16:creationId xmlns:a16="http://schemas.microsoft.com/office/drawing/2014/main" id="{F7B64C26-9543-4091-B202-B1A997322906}"/>
+              </a:ext>
+            </a:extLst>
+          </p:cNvPr>
+          <p:cNvSpPr>
+            <a:spLocks noGrp="1"/>
+          </p:cNvSpPr>
+          <p:nvPr>
+            <p:ph idx="1"/>
+          </p:nvPr>
+        </p:nvSpPr>
+        <p:spPr/>
+        <p:txBody>
+          <a:bodyPr/>
+          <a:lstStyle/>
+          <a:p>
+            <a:r>
+              <a:rPr lang="en-US" dirty="0"/>
+              <a:t>Consider a data center with:</a:t>
+            </a:r>
+          </a:p>
+          <a:p>
+            <a:r>
+              <a:rPr lang="en-US" dirty="0"/>
+              <a:t>10 physical servers </a:t>
+            </a:r>
+          </a:p>
+          <a:p>
+            <a:r>
+              <a:rPr lang="en-US" dirty="0"/>
+              <a:t>50 virtual machines </a:t>
+            </a:r>
+          </a:p>
+          <a:p>
+            <a:r>
+              <a:rPr lang="en-US" dirty="0"/>
+              <a:t>2 FC switches </a:t>
+            </a:r>
+          </a:p>
+          <a:p>
+            <a:r>
+              <a:rPr lang="en-US" dirty="0"/>
+              <a:t>3 storage arrays </a:t>
+            </a:r>
+          </a:p>
+          <a:p>
+            <a:r>
+              <a:rPr lang="en-US" dirty="0"/>
+              <a:t>Without virtualization, managing 50 workloads individually would be difficult.</a:t>
+            </a:r>
+          </a:p>
+          <a:p>
+            <a:endParaRPr lang="en-IN" dirty="0"/>
+          </a:p>
+        </p:txBody>
+      </p:sp>
+    </p:spTree>
+    <p:extLst>
+      <p:ext uri="{BB962C8B-B14F-4D97-AF65-F5344CB8AC3E}">
+        <p14:creationId xmlns:p14="http://schemas.microsoft.com/office/powerpoint/2010/main" val="2883947347"/>
+      </p:ext>
+    </p:extLst>
+  </p:cSld>
+  <p:clrMapOvr>
+    <a:masterClrMapping/>
+  </p:clrMapOvr>
+</p:sld>
+</file>
+
+<file path=ppt/slides/slide56.xml><?xml version="1.0" encoding="utf-8"?>
+<p:sld xmlns:a="http://schemas.openxmlformats.org/drawingml/2006/main" xmlns:r="http://schemas.openxmlformats.org/officeDocument/2006/relationships" xmlns:p="http://schemas.openxmlformats.org/presentationml/2006/main">
+  <p:cSld>
+    <p:spTree>
+      <p:nvGrpSpPr>
+        <p:cNvPr id="1" name=""/>
+        <p:cNvGrpSpPr/>
+        <p:nvPr/>
+      </p:nvGrpSpPr>
+      <p:grpSpPr>
+        <a:xfrm>
+          <a:off x="0" y="0"/>
+          <a:ext cx="0" cy="0"/>
+          <a:chOff x="0" y="0"/>
+          <a:chExt cx="0" cy="0"/>
+        </a:xfrm>
+      </p:grpSpPr>
+      <p:sp>
+        <p:nvSpPr>
+          <p:cNvPr id="2" name="Title 1">
+            <a:extLst>
+              <a:ext uri="{FF2B5EF4-FFF2-40B4-BE49-F238E27FC236}">
+                <a16:creationId xmlns:a16="http://schemas.microsoft.com/office/drawing/2014/main" id="{1C78D2CE-43CA-4E78-9660-7140A68B1517}"/>
+              </a:ext>
+            </a:extLst>
+          </p:cNvPr>
+          <p:cNvSpPr>
+            <a:spLocks noGrp="1"/>
+          </p:cNvSpPr>
+          <p:nvPr>
+            <p:ph type="title"/>
+          </p:nvPr>
+        </p:nvSpPr>
+        <p:spPr/>
+        <p:txBody>
+          <a:bodyPr/>
+          <a:lstStyle/>
+          <a:p>
+            <a:r>
+              <a:rPr lang="en-IN" dirty="0"/>
+              <a:t>With virtualization:</a:t>
+            </a:r>
+          </a:p>
+        </p:txBody>
+      </p:sp>
+      <p:pic>
+        <p:nvPicPr>
+          <p:cNvPr id="4" name="Content Placeholder 3">
+            <a:extLst>
+              <a:ext uri="{FF2B5EF4-FFF2-40B4-BE49-F238E27FC236}">
+                <a16:creationId xmlns:a16="http://schemas.microsoft.com/office/drawing/2014/main" id="{7320B04B-F3B3-4E5E-A91A-8748A2BC9C51}"/>
+              </a:ext>
+            </a:extLst>
+          </p:cNvPr>
+          <p:cNvPicPr>
+            <a:picLocks noGrp="1" noChangeAspect="1"/>
+          </p:cNvPicPr>
+          <p:nvPr>
+            <p:ph idx="1"/>
+          </p:nvPr>
+        </p:nvPicPr>
+        <p:blipFill>
+          <a:blip r:embed="rId2"/>
+          <a:stretch>
+            <a:fillRect/>
+          </a:stretch>
+        </p:blipFill>
+        <p:spPr>
+          <a:xfrm>
+            <a:off x="3893906" y="1602770"/>
+            <a:ext cx="4869949" cy="4231162"/>
+          </a:xfrm>
+          <a:prstGeom prst="rect">
+            <a:avLst/>
+          </a:prstGeom>
+        </p:spPr>
+      </p:pic>
+      <p:sp>
+        <p:nvSpPr>
+          <p:cNvPr id="5" name="Rectangle 4">
+            <a:extLst>
+              <a:ext uri="{FF2B5EF4-FFF2-40B4-BE49-F238E27FC236}">
+                <a16:creationId xmlns:a16="http://schemas.microsoft.com/office/drawing/2014/main" id="{3F13394C-5741-445C-A750-1F4BC8DF6440}"/>
+              </a:ext>
+            </a:extLst>
+          </p:cNvPr>
+          <p:cNvSpPr/>
+          <p:nvPr/>
+        </p:nvSpPr>
+        <p:spPr>
+          <a:xfrm>
+            <a:off x="400692" y="6054518"/>
+            <a:ext cx="11352944" cy="861774"/>
+          </a:xfrm>
+          <a:prstGeom prst="rect">
+            <a:avLst/>
+          </a:prstGeom>
+        </p:spPr>
+        <p:txBody>
+          <a:bodyPr wrap="square">
+            <a:spAutoFit/>
+          </a:bodyPr>
+          <a:lstStyle/>
+          <a:p>
+            <a:r>
+              <a:rPr lang="en-US" sz="2500" dirty="0">
+                <a:latin typeface="Times New Roman" panose="02020603050405020304" pitchFamily="18" charset="0"/>
+                <a:cs typeface="Times New Roman" panose="02020603050405020304" pitchFamily="18" charset="0"/>
+              </a:rPr>
+              <a:t>The infrastructure can therefore be managed as logical resources while the physical infrastructure remains shared.</a:t>
+            </a:r>
+            <a:endParaRPr lang="en-IN" sz="2500" dirty="0">
+              <a:latin typeface="Times New Roman" panose="02020603050405020304" pitchFamily="18" charset="0"/>
+              <a:cs typeface="Times New Roman" panose="02020603050405020304" pitchFamily="18" charset="0"/>
+            </a:endParaRPr>
+          </a:p>
+        </p:txBody>
+      </p:sp>
+    </p:spTree>
+    <p:extLst>
+      <p:ext uri="{BB962C8B-B14F-4D97-AF65-F5344CB8AC3E}">
+        <p14:creationId xmlns:p14="http://schemas.microsoft.com/office/powerpoint/2010/main" val="4153551946"/>
+      </p:ext>
+    </p:extLst>
+  </p:cSld>
+  <p:clrMapOvr>
+    <a:masterClrMapping/>
+  </p:clrMapOvr>
+</p:sld>
+</file>
+
+<file path=ppt/slides/slide57.xml><?xml version="1.0" encoding="utf-8"?>
+<p:sld xmlns:a="http://schemas.openxmlformats.org/drawingml/2006/main" xmlns:r="http://schemas.openxmlformats.org/officeDocument/2006/relationships" xmlns:p="http://schemas.openxmlformats.org/presentationml/2006/main">
+  <p:cSld>
+    <p:spTree>
+      <p:nvGrpSpPr>
+        <p:cNvPr id="1" name=""/>
+        <p:cNvGrpSpPr/>
+        <p:nvPr/>
+      </p:nvGrpSpPr>
+      <p:grpSpPr>
+        <a:xfrm>
+          <a:off x="0" y="0"/>
+          <a:ext cx="0" cy="0"/>
+          <a:chOff x="0" y="0"/>
+          <a:chExt cx="0" cy="0"/>
+        </a:xfrm>
+      </p:grpSpPr>
+      <p:sp>
+        <p:nvSpPr>
+          <p:cNvPr id="2" name="Title 1">
+            <a:extLst>
+              <a:ext uri="{FF2B5EF4-FFF2-40B4-BE49-F238E27FC236}">
+                <a16:creationId xmlns:a16="http://schemas.microsoft.com/office/drawing/2014/main" id="{73782D36-5418-4971-9247-0C6B29045E80}"/>
+              </a:ext>
+            </a:extLst>
+          </p:cNvPr>
+          <p:cNvSpPr>
+            <a:spLocks noGrp="1"/>
+          </p:cNvSpPr>
+          <p:nvPr>
+            <p:ph type="title"/>
+          </p:nvPr>
+        </p:nvSpPr>
+        <p:spPr/>
+        <p:txBody>
+          <a:bodyPr/>
+          <a:lstStyle/>
+          <a:p>
+            <a:r>
+              <a:rPr lang="en-IN" dirty="0"/>
+              <a:t>Internet Protocol SAN:</a:t>
+            </a:r>
+          </a:p>
+        </p:txBody>
+      </p:sp>
+      <p:sp>
+        <p:nvSpPr>
+          <p:cNvPr id="3" name="Content Placeholder 2">
+            <a:extLst>
+              <a:ext uri="{FF2B5EF4-FFF2-40B4-BE49-F238E27FC236}">
+                <a16:creationId xmlns:a16="http://schemas.microsoft.com/office/drawing/2014/main" id="{73CDE483-E3D8-4B19-87D2-A5D4E994F4ED}"/>
+              </a:ext>
+            </a:extLst>
+          </p:cNvPr>
+          <p:cNvSpPr>
+            <a:spLocks noGrp="1"/>
+          </p:cNvSpPr>
+          <p:nvPr>
+            <p:ph idx="1"/>
+          </p:nvPr>
+        </p:nvSpPr>
+        <p:spPr/>
+        <p:txBody>
+          <a:bodyPr/>
+          <a:lstStyle/>
+          <a:p>
+            <a:pPr marL="0" indent="0" algn="just">
+              <a:buNone/>
+            </a:pPr>
+            <a:r>
+              <a:rPr lang="en-IN" dirty="0"/>
+              <a:t>iSCSI protocol - network components - and connectivity - Link aggregation - switch aggregation - and VLAN - FCIP protocol - connectivity - and configuration. </a:t>
+            </a:r>
+          </a:p>
+        </p:txBody>
+      </p:sp>
+    </p:spTree>
+    <p:extLst>
+      <p:ext uri="{BB962C8B-B14F-4D97-AF65-F5344CB8AC3E}">
+        <p14:creationId xmlns:p14="http://schemas.microsoft.com/office/powerpoint/2010/main" val="2947982416"/>
+      </p:ext>
+    </p:extLst>
+  </p:cSld>
+  <p:clrMapOvr>
+    <a:masterClrMapping/>
+  </p:clrMapOvr>
+</p:sld>
+</file>
+
+<file path=ppt/slides/slide58.xml><?xml version="1.0" encoding="utf-8"?>
+<p:sld xmlns:a="http://schemas.openxmlformats.org/drawingml/2006/main" xmlns:r="http://schemas.openxmlformats.org/officeDocument/2006/relationships" xmlns:p="http://schemas.openxmlformats.org/presentationml/2006/main">
+  <p:cSld>
+    <p:spTree>
+      <p:nvGrpSpPr>
+        <p:cNvPr id="1" name=""/>
+        <p:cNvGrpSpPr/>
+        <p:nvPr/>
+      </p:nvGrpSpPr>
+      <p:grpSpPr>
+        <a:xfrm>
+          <a:off x="0" y="0"/>
+          <a:ext cx="0" cy="0"/>
+          <a:chOff x="0" y="0"/>
+          <a:chExt cx="0" cy="0"/>
+        </a:xfrm>
+      </p:grpSpPr>
+      <p:sp>
+        <p:nvSpPr>
+          <p:cNvPr id="2" name="Title 1">
+            <a:extLst>
+              <a:ext uri="{FF2B5EF4-FFF2-40B4-BE49-F238E27FC236}">
+                <a16:creationId xmlns:a16="http://schemas.microsoft.com/office/drawing/2014/main" id="{3EE2300B-BC25-4268-A977-CC2619B10B06}"/>
+              </a:ext>
+            </a:extLst>
+          </p:cNvPr>
+          <p:cNvSpPr>
+            <a:spLocks noGrp="1"/>
+          </p:cNvSpPr>
+          <p:nvPr>
+            <p:ph type="title"/>
+          </p:nvPr>
+        </p:nvSpPr>
+        <p:spPr/>
+        <p:txBody>
+          <a:bodyPr/>
+          <a:lstStyle/>
+          <a:p>
+            <a:r>
+              <a:rPr lang="en-IN" dirty="0"/>
+              <a:t>Introduction to iSCSI Protocol</a:t>
+            </a:r>
+          </a:p>
+        </p:txBody>
+      </p:sp>
+      <p:sp>
+        <p:nvSpPr>
+          <p:cNvPr id="3" name="Content Placeholder 2">
+            <a:extLst>
+              <a:ext uri="{FF2B5EF4-FFF2-40B4-BE49-F238E27FC236}">
+                <a16:creationId xmlns:a16="http://schemas.microsoft.com/office/drawing/2014/main" id="{D02C3E36-EBA0-4967-8E05-54D87B30644B}"/>
+              </a:ext>
+            </a:extLst>
+          </p:cNvPr>
+          <p:cNvSpPr>
+            <a:spLocks noGrp="1"/>
+          </p:cNvSpPr>
+          <p:nvPr>
+            <p:ph idx="1"/>
+          </p:nvPr>
+        </p:nvSpPr>
+        <p:spPr/>
+        <p:txBody>
+          <a:bodyPr/>
+          <a:lstStyle/>
+          <a:p>
+            <a:r>
+              <a:rPr lang="en-US" b="1" dirty="0"/>
+              <a:t>iSCSI (Internet Small Computer Systems Interface)</a:t>
+            </a:r>
+            <a:r>
+              <a:rPr lang="en-US" dirty="0"/>
+              <a:t> is a storage networking protocol that allows </a:t>
+            </a:r>
+            <a:r>
+              <a:rPr lang="en-US" b="1" dirty="0"/>
+              <a:t>SCSI commands to be transported over an IP network</a:t>
+            </a:r>
+            <a:r>
+              <a:rPr lang="en-US" dirty="0"/>
+              <a:t>.</a:t>
+            </a:r>
+          </a:p>
+          <a:p>
+            <a:r>
+              <a:rPr lang="en-US" dirty="0"/>
+              <a:t>In simple terms:</a:t>
+            </a:r>
+          </a:p>
+          <a:p>
+            <a:r>
+              <a:rPr lang="en-US" dirty="0"/>
+              <a:t>iSCSI enables a computer to access storage devices over a standard Ethernet/IP network as if the storage were directly attached to the computer.</a:t>
+            </a:r>
+          </a:p>
+          <a:p>
+            <a:r>
+              <a:rPr lang="en-US" dirty="0"/>
+              <a:t>Traditionally, SCSI devices were connected directly to servers using SCSI cables. iSCSI removes this physical limitation by encapsulating SCSI commands and data inside </a:t>
+            </a:r>
+            <a:r>
+              <a:rPr lang="en-US" b="1" dirty="0"/>
+              <a:t>TCP/IP packets</a:t>
+            </a:r>
+            <a:r>
+              <a:rPr lang="en-US" dirty="0"/>
+              <a:t>.</a:t>
+            </a:r>
+            <a:endParaRPr lang="en-IN" dirty="0"/>
+          </a:p>
+        </p:txBody>
+      </p:sp>
+    </p:spTree>
+    <p:extLst>
+      <p:ext uri="{BB962C8B-B14F-4D97-AF65-F5344CB8AC3E}">
+        <p14:creationId xmlns:p14="http://schemas.microsoft.com/office/powerpoint/2010/main" val="1728422045"/>
+      </p:ext>
+    </p:extLst>
+  </p:cSld>
+  <p:clrMapOvr>
+    <a:masterClrMapping/>
+  </p:clrMapOvr>
+</p:sld>
+</file>
+
+<file path=ppt/slides/slide59.xml><?xml version="1.0" encoding="utf-8"?>
+<p:sld xmlns:a="http://schemas.openxmlformats.org/drawingml/2006/main" xmlns:r="http://schemas.openxmlformats.org/officeDocument/2006/relationships" xmlns:p="http://schemas.openxmlformats.org/presentationml/2006/main">
+  <p:cSld>
+    <p:spTree>
+      <p:nvGrpSpPr>
+        <p:cNvPr id="1" name=""/>
+        <p:cNvGrpSpPr/>
+        <p:nvPr/>
+      </p:nvGrpSpPr>
+      <p:grpSpPr>
+        <a:xfrm>
+          <a:off x="0" y="0"/>
+          <a:ext cx="0" cy="0"/>
+          <a:chOff x="0" y="0"/>
+          <a:chExt cx="0" cy="0"/>
+        </a:xfrm>
+      </p:grpSpPr>
+      <p:sp>
+        <p:nvSpPr>
+          <p:cNvPr id="2" name="Title 1">
+            <a:extLst>
+              <a:ext uri="{FF2B5EF4-FFF2-40B4-BE49-F238E27FC236}">
+                <a16:creationId xmlns:a16="http://schemas.microsoft.com/office/drawing/2014/main" id="{F7F39F73-A0AB-4A27-A646-D8E2413A46A6}"/>
+              </a:ext>
+            </a:extLst>
+          </p:cNvPr>
+          <p:cNvSpPr>
+            <a:spLocks noGrp="1"/>
+          </p:cNvSpPr>
+          <p:nvPr>
+            <p:ph type="title"/>
+          </p:nvPr>
+        </p:nvSpPr>
+        <p:spPr/>
+        <p:txBody>
+          <a:bodyPr/>
+          <a:lstStyle/>
+          <a:p>
+            <a:endParaRPr lang="en-IN"/>
+          </a:p>
+        </p:txBody>
+      </p:sp>
+      <p:pic>
+        <p:nvPicPr>
+          <p:cNvPr id="2050" name="Picture 2" descr="The iSCSI's Internet Protocol System">
+            <a:extLst>
+              <a:ext uri="{FF2B5EF4-FFF2-40B4-BE49-F238E27FC236}">
+                <a16:creationId xmlns:a16="http://schemas.microsoft.com/office/drawing/2014/main" id="{5DF7FDEA-2806-4A9F-BEC6-A1A6733C33A0}"/>
+              </a:ext>
+            </a:extLst>
+          </p:cNvPr>
+          <p:cNvPicPr>
+            <a:picLocks noGrp="1" noChangeAspect="1" noChangeArrowheads="1"/>
+          </p:cNvPicPr>
+          <p:nvPr>
+            <p:ph idx="1"/>
+          </p:nvPr>
+        </p:nvPicPr>
+        <p:blipFill>
+          <a:blip r:embed="rId2">
+            <a:extLst>
+              <a:ext uri="{28A0092B-C50C-407E-A947-70E740481C1C}">
+                <a14:useLocalDpi xmlns:a14="http://schemas.microsoft.com/office/drawing/2010/main" val="0"/>
+              </a:ext>
+            </a:extLst>
+          </a:blip>
+          <a:srcRect/>
+          <a:stretch>
+            <a:fillRect/>
+          </a:stretch>
+        </p:blipFill>
+        <p:spPr bwMode="auto">
+          <a:xfrm>
+            <a:off x="2424701" y="1825625"/>
+            <a:ext cx="7058346" cy="4667250"/>
+          </a:xfrm>
+          <a:prstGeom prst="rect">
+            <a:avLst/>
+          </a:prstGeom>
+          <a:noFill/>
+          <a:extLst>
+            <a:ext uri="{909E8E84-426E-40DD-AFC4-6F175D3DCCD1}">
+              <a14:hiddenFill xmlns:a14="http://schemas.microsoft.com/office/drawing/2010/main">
+                <a:solidFill>
+                  <a:srgbClr val="FFFFFF"/>
+                </a:solidFill>
+              </a14:hiddenFill>
+            </a:ext>
+          </a:extLst>
+        </p:spPr>
+      </p:pic>
+    </p:spTree>
+    <p:extLst>
+      <p:ext uri="{BB962C8B-B14F-4D97-AF65-F5344CB8AC3E}">
+        <p14:creationId xmlns:p14="http://schemas.microsoft.com/office/powerpoint/2010/main" val="2699181120"/>
       </p:ext>
     </p:extLst>
   </p:cSld>
@@ -10890,6 +15125,1767 @@
 </p:sld>
 </file>
 
+<file path=ppt/slides/slide60.xml><?xml version="1.0" encoding="utf-8"?>
+<p:sld xmlns:a="http://schemas.openxmlformats.org/drawingml/2006/main" xmlns:r="http://schemas.openxmlformats.org/officeDocument/2006/relationships" xmlns:p="http://schemas.openxmlformats.org/presentationml/2006/main">
+  <p:cSld>
+    <p:spTree>
+      <p:nvGrpSpPr>
+        <p:cNvPr id="1" name=""/>
+        <p:cNvGrpSpPr/>
+        <p:nvPr/>
+      </p:nvGrpSpPr>
+      <p:grpSpPr>
+        <a:xfrm>
+          <a:off x="0" y="0"/>
+          <a:ext cx="0" cy="0"/>
+          <a:chOff x="0" y="0"/>
+          <a:chExt cx="0" cy="0"/>
+        </a:xfrm>
+      </p:grpSpPr>
+      <p:sp>
+        <p:nvSpPr>
+          <p:cNvPr id="2" name="Title 1">
+            <a:extLst>
+              <a:ext uri="{FF2B5EF4-FFF2-40B4-BE49-F238E27FC236}">
+                <a16:creationId xmlns:a16="http://schemas.microsoft.com/office/drawing/2014/main" id="{24565304-724B-435E-B69E-910C3BFF59B6}"/>
+              </a:ext>
+            </a:extLst>
+          </p:cNvPr>
+          <p:cNvSpPr>
+            <a:spLocks noGrp="1"/>
+          </p:cNvSpPr>
+          <p:nvPr>
+            <p:ph type="title"/>
+          </p:nvPr>
+        </p:nvSpPr>
+        <p:spPr>
+          <a:xfrm>
+            <a:off x="838200" y="365126"/>
+            <a:ext cx="10515600" cy="600646"/>
+          </a:xfrm>
+        </p:spPr>
+        <p:txBody>
+          <a:bodyPr/>
+          <a:lstStyle/>
+          <a:p>
+            <a:endParaRPr lang="en-IN" dirty="0"/>
+          </a:p>
+        </p:txBody>
+      </p:sp>
+      <p:pic>
+        <p:nvPicPr>
+          <p:cNvPr id="3074" name="Picture 2" descr="ISCSI Storage Area Network SCSI Initiator And Target Internet Storage Name Service Internet Protocol PNG">
+            <a:extLst>
+              <a:ext uri="{FF2B5EF4-FFF2-40B4-BE49-F238E27FC236}">
+                <a16:creationId xmlns:a16="http://schemas.microsoft.com/office/drawing/2014/main" id="{29194D52-698B-4C8E-8DE6-D951F884E9A5}"/>
+              </a:ext>
+            </a:extLst>
+          </p:cNvPr>
+          <p:cNvPicPr>
+            <a:picLocks noGrp="1" noChangeAspect="1" noChangeArrowheads="1"/>
+          </p:cNvPicPr>
+          <p:nvPr>
+            <p:ph idx="1"/>
+          </p:nvPr>
+        </p:nvPicPr>
+        <p:blipFill>
+          <a:blip r:embed="rId2">
+            <a:extLst>
+              <a:ext uri="{28A0092B-C50C-407E-A947-70E740481C1C}">
+                <a14:useLocalDpi xmlns:a14="http://schemas.microsoft.com/office/drawing/2010/main" val="0"/>
+              </a:ext>
+            </a:extLst>
+          </a:blip>
+          <a:srcRect/>
+          <a:stretch>
+            <a:fillRect/>
+          </a:stretch>
+        </p:blipFill>
+        <p:spPr bwMode="auto">
+          <a:xfrm>
+            <a:off x="1756883" y="2070747"/>
+            <a:ext cx="7698930" cy="4667250"/>
+          </a:xfrm>
+          <a:prstGeom prst="rect">
+            <a:avLst/>
+          </a:prstGeom>
+          <a:noFill/>
+          <a:extLst>
+            <a:ext uri="{909E8E84-426E-40DD-AFC4-6F175D3DCCD1}">
+              <a14:hiddenFill xmlns:a14="http://schemas.microsoft.com/office/drawing/2010/main">
+                <a:solidFill>
+                  <a:srgbClr val="FFFFFF"/>
+                </a:solidFill>
+              </a14:hiddenFill>
+            </a:ext>
+          </a:extLst>
+        </p:spPr>
+      </p:pic>
+      <p:sp>
+        <p:nvSpPr>
+          <p:cNvPr id="5" name="Rectangle 4">
+            <a:extLst>
+              <a:ext uri="{FF2B5EF4-FFF2-40B4-BE49-F238E27FC236}">
+                <a16:creationId xmlns:a16="http://schemas.microsoft.com/office/drawing/2014/main" id="{79371892-FA33-4C51-8141-FA5342DFC053}"/>
+              </a:ext>
+            </a:extLst>
+          </p:cNvPr>
+          <p:cNvSpPr/>
+          <p:nvPr/>
+        </p:nvSpPr>
+        <p:spPr>
+          <a:xfrm>
+            <a:off x="838201" y="1097439"/>
+            <a:ext cx="10515600" cy="707886"/>
+          </a:xfrm>
+          <a:prstGeom prst="rect">
+            <a:avLst/>
+          </a:prstGeom>
+        </p:spPr>
+        <p:txBody>
+          <a:bodyPr wrap="square">
+            <a:spAutoFit/>
+          </a:bodyPr>
+          <a:lstStyle/>
+          <a:p>
+            <a:r>
+              <a:rPr lang="en-US" sz="2000" dirty="0">
+                <a:latin typeface="Times New Roman" panose="02020603050405020304" pitchFamily="18" charset="0"/>
+                <a:cs typeface="Times New Roman" panose="02020603050405020304" pitchFamily="18" charset="0"/>
+              </a:rPr>
+              <a:t>The server sends SCSI commands through the IP network to the storage system. The storage system processes the commands and returns the requested data.</a:t>
+            </a:r>
+            <a:endParaRPr lang="en-IN" sz="2000" dirty="0">
+              <a:latin typeface="Times New Roman" panose="02020603050405020304" pitchFamily="18" charset="0"/>
+              <a:cs typeface="Times New Roman" panose="02020603050405020304" pitchFamily="18" charset="0"/>
+            </a:endParaRPr>
+          </a:p>
+        </p:txBody>
+      </p:sp>
+    </p:spTree>
+    <p:extLst>
+      <p:ext uri="{BB962C8B-B14F-4D97-AF65-F5344CB8AC3E}">
+        <p14:creationId xmlns:p14="http://schemas.microsoft.com/office/powerpoint/2010/main" val="764043215"/>
+      </p:ext>
+    </p:extLst>
+  </p:cSld>
+  <p:clrMapOvr>
+    <a:masterClrMapping/>
+  </p:clrMapOvr>
+</p:sld>
+</file>
+
+<file path=ppt/slides/slide61.xml><?xml version="1.0" encoding="utf-8"?>
+<p:sld xmlns:a="http://schemas.openxmlformats.org/drawingml/2006/main" xmlns:r="http://schemas.openxmlformats.org/officeDocument/2006/relationships" xmlns:p="http://schemas.openxmlformats.org/presentationml/2006/main">
+  <p:cSld>
+    <p:spTree>
+      <p:nvGrpSpPr>
+        <p:cNvPr id="1" name=""/>
+        <p:cNvGrpSpPr/>
+        <p:nvPr/>
+      </p:nvGrpSpPr>
+      <p:grpSpPr>
+        <a:xfrm>
+          <a:off x="0" y="0"/>
+          <a:ext cx="0" cy="0"/>
+          <a:chOff x="0" y="0"/>
+          <a:chExt cx="0" cy="0"/>
+        </a:xfrm>
+      </p:grpSpPr>
+      <p:sp>
+        <p:nvSpPr>
+          <p:cNvPr id="2" name="Title 1">
+            <a:extLst>
+              <a:ext uri="{FF2B5EF4-FFF2-40B4-BE49-F238E27FC236}">
+                <a16:creationId xmlns:a16="http://schemas.microsoft.com/office/drawing/2014/main" id="{B5F4EC09-334E-4757-9677-E3E86867BA15}"/>
+              </a:ext>
+            </a:extLst>
+          </p:cNvPr>
+          <p:cNvSpPr>
+            <a:spLocks noGrp="1"/>
+          </p:cNvSpPr>
+          <p:nvPr>
+            <p:ph type="title"/>
+          </p:nvPr>
+        </p:nvSpPr>
+        <p:spPr/>
+        <p:txBody>
+          <a:bodyPr/>
+          <a:lstStyle/>
+          <a:p>
+            <a:endParaRPr lang="en-IN"/>
+          </a:p>
+        </p:txBody>
+      </p:sp>
+      <p:sp>
+        <p:nvSpPr>
+          <p:cNvPr id="3" name="Content Placeholder 2">
+            <a:extLst>
+              <a:ext uri="{FF2B5EF4-FFF2-40B4-BE49-F238E27FC236}">
+                <a16:creationId xmlns:a16="http://schemas.microsoft.com/office/drawing/2014/main" id="{4E879266-8305-42CF-9873-BBE98DD9CE06}"/>
+              </a:ext>
+            </a:extLst>
+          </p:cNvPr>
+          <p:cNvSpPr>
+            <a:spLocks noGrp="1"/>
+          </p:cNvSpPr>
+          <p:nvPr>
+            <p:ph idx="1"/>
+          </p:nvPr>
+        </p:nvSpPr>
+        <p:spPr/>
+        <p:txBody>
+          <a:bodyPr>
+            <a:normAutofit fontScale="92500" lnSpcReduction="20000"/>
+          </a:bodyPr>
+          <a:lstStyle/>
+          <a:p>
+            <a:r>
+              <a:rPr lang="en-IN" b="1" dirty="0"/>
+              <a:t>iSCSI stands for Internet Small Computer Systems Interface.</a:t>
+            </a:r>
+            <a:endParaRPr lang="en-IN" dirty="0"/>
+          </a:p>
+          <a:p>
+            <a:r>
+              <a:rPr lang="en-IN" dirty="0"/>
+              <a:t>It is an </a:t>
+            </a:r>
+            <a:r>
+              <a:rPr lang="en-IN" b="1" dirty="0"/>
+              <a:t>IP-based storage networking protocol</a:t>
+            </a:r>
+            <a:r>
+              <a:rPr lang="en-IN" dirty="0"/>
+              <a:t> that provides block-level access to storage devices over TCP/IP networks.</a:t>
+            </a:r>
+          </a:p>
+          <a:p>
+            <a:r>
+              <a:rPr lang="en-IN" dirty="0"/>
+              <a:t>The important idea behind iSCSI is:</a:t>
+            </a:r>
+          </a:p>
+          <a:p>
+            <a:r>
+              <a:rPr lang="en-IN" b="1" dirty="0"/>
+              <a:t>SCSI → encapsulated in iSCSI → transported using TCP → transmitted over IP/Ethernet</a:t>
+            </a:r>
+            <a:endParaRPr lang="en-IN" dirty="0"/>
+          </a:p>
+          <a:p>
+            <a:r>
+              <a:rPr lang="en-IN" dirty="0"/>
+              <a:t>Thus, iSCSI combines:</a:t>
+            </a:r>
+          </a:p>
+          <a:p>
+            <a:r>
+              <a:rPr lang="en-IN" b="1" dirty="0"/>
+              <a:t>SCSI</a:t>
+            </a:r>
+            <a:r>
+              <a:rPr lang="en-IN" dirty="0"/>
+              <a:t> – storage command set </a:t>
+            </a:r>
+          </a:p>
+          <a:p>
+            <a:r>
+              <a:rPr lang="en-IN" b="1" dirty="0"/>
+              <a:t>iSCSI</a:t>
+            </a:r>
+            <a:r>
+              <a:rPr lang="en-IN" dirty="0"/>
+              <a:t> – encapsulation and communication protocol </a:t>
+            </a:r>
+          </a:p>
+          <a:p>
+            <a:r>
+              <a:rPr lang="en-IN" b="1" dirty="0"/>
+              <a:t>TCP</a:t>
+            </a:r>
+            <a:r>
+              <a:rPr lang="en-IN" dirty="0"/>
+              <a:t> – reliable transport </a:t>
+            </a:r>
+          </a:p>
+          <a:p>
+            <a:r>
+              <a:rPr lang="en-IN" b="1" dirty="0"/>
+              <a:t>IP</a:t>
+            </a:r>
+            <a:r>
+              <a:rPr lang="en-IN" dirty="0"/>
+              <a:t> – network addressing </a:t>
+            </a:r>
+          </a:p>
+          <a:p>
+            <a:r>
+              <a:rPr lang="en-IN" b="1" dirty="0"/>
+              <a:t>Ethernet</a:t>
+            </a:r>
+            <a:r>
+              <a:rPr lang="en-IN" dirty="0"/>
+              <a:t> – commonly used physical/network infrastructure</a:t>
+            </a:r>
+          </a:p>
+          <a:p>
+            <a:endParaRPr lang="en-IN" dirty="0"/>
+          </a:p>
+        </p:txBody>
+      </p:sp>
+    </p:spTree>
+    <p:extLst>
+      <p:ext uri="{BB962C8B-B14F-4D97-AF65-F5344CB8AC3E}">
+        <p14:creationId xmlns:p14="http://schemas.microsoft.com/office/powerpoint/2010/main" val="1498790646"/>
+      </p:ext>
+    </p:extLst>
+  </p:cSld>
+  <p:clrMapOvr>
+    <a:masterClrMapping/>
+  </p:clrMapOvr>
+</p:sld>
+</file>
+
+<file path=ppt/slides/slide62.xml><?xml version="1.0" encoding="utf-8"?>
+<p:sld xmlns:a="http://schemas.openxmlformats.org/drawingml/2006/main" xmlns:r="http://schemas.openxmlformats.org/officeDocument/2006/relationships" xmlns:p="http://schemas.openxmlformats.org/presentationml/2006/main">
+  <p:cSld>
+    <p:spTree>
+      <p:nvGrpSpPr>
+        <p:cNvPr id="1" name=""/>
+        <p:cNvGrpSpPr/>
+        <p:nvPr/>
+      </p:nvGrpSpPr>
+      <p:grpSpPr>
+        <a:xfrm>
+          <a:off x="0" y="0"/>
+          <a:ext cx="0" cy="0"/>
+          <a:chOff x="0" y="0"/>
+          <a:chExt cx="0" cy="0"/>
+        </a:xfrm>
+      </p:grpSpPr>
+      <p:sp>
+        <p:nvSpPr>
+          <p:cNvPr id="2" name="Title 1">
+            <a:extLst>
+              <a:ext uri="{FF2B5EF4-FFF2-40B4-BE49-F238E27FC236}">
+                <a16:creationId xmlns:a16="http://schemas.microsoft.com/office/drawing/2014/main" id="{3F56DAF3-7A6F-4352-82EC-A3FC4D9C1D3B}"/>
+              </a:ext>
+            </a:extLst>
+          </p:cNvPr>
+          <p:cNvSpPr>
+            <a:spLocks noGrp="1"/>
+          </p:cNvSpPr>
+          <p:nvPr>
+            <p:ph type="title"/>
+          </p:nvPr>
+        </p:nvSpPr>
+        <p:spPr>
+          <a:xfrm>
+            <a:off x="838200" y="365125"/>
+            <a:ext cx="10515600" cy="569823"/>
+          </a:xfrm>
+        </p:spPr>
+        <p:txBody>
+          <a:bodyPr/>
+          <a:lstStyle/>
+          <a:p>
+            <a:endParaRPr lang="en-IN" dirty="0"/>
+          </a:p>
+        </p:txBody>
+      </p:sp>
+      <p:sp>
+        <p:nvSpPr>
+          <p:cNvPr id="3" name="Content Placeholder 2">
+            <a:extLst>
+              <a:ext uri="{FF2B5EF4-FFF2-40B4-BE49-F238E27FC236}">
+                <a16:creationId xmlns:a16="http://schemas.microsoft.com/office/drawing/2014/main" id="{F60A1137-4788-486C-A71E-C7F2B97F33B8}"/>
+              </a:ext>
+            </a:extLst>
+          </p:cNvPr>
+          <p:cNvSpPr>
+            <a:spLocks noGrp="1"/>
+          </p:cNvSpPr>
+          <p:nvPr>
+            <p:ph idx="1"/>
+          </p:nvPr>
+        </p:nvSpPr>
+        <p:spPr>
+          <a:xfrm>
+            <a:off x="838200" y="1140431"/>
+            <a:ext cx="10515600" cy="5036532"/>
+          </a:xfrm>
+        </p:spPr>
+        <p:txBody>
+          <a:bodyPr>
+            <a:normAutofit fontScale="92500" lnSpcReduction="20000"/>
+          </a:bodyPr>
+          <a:lstStyle/>
+          <a:p>
+            <a:pPr marL="0" indent="0">
+              <a:buNone/>
+            </a:pPr>
+            <a:r>
+              <a:rPr lang="en-US" b="1" dirty="0"/>
+              <a:t>Example</a:t>
+            </a:r>
+          </a:p>
+          <a:p>
+            <a:pPr marL="0" indent="0">
+              <a:buNone/>
+            </a:pPr>
+            <a:r>
+              <a:rPr lang="en-US" dirty="0"/>
+              <a:t>Suppose a server wants to read a block of data from a remote storage device.</a:t>
+            </a:r>
+          </a:p>
+          <a:p>
+            <a:pPr marL="0" indent="0">
+              <a:buNone/>
+            </a:pPr>
+            <a:r>
+              <a:rPr lang="en-US" dirty="0"/>
+              <a:t>The process is approximately:</a:t>
+            </a:r>
+          </a:p>
+          <a:p>
+            <a:pPr marL="0" indent="0">
+              <a:buNone/>
+            </a:pPr>
+            <a:r>
+              <a:rPr lang="en-IN" dirty="0"/>
+              <a:t>Application</a:t>
+            </a:r>
+          </a:p>
+          <a:p>
+            <a:pPr marL="0" indent="0">
+              <a:buNone/>
+            </a:pPr>
+            <a:r>
+              <a:rPr lang="en-IN" dirty="0"/>
+              <a:t>Operating System </a:t>
+            </a:r>
+          </a:p>
+          <a:p>
+            <a:pPr marL="0" indent="0">
+              <a:buNone/>
+            </a:pPr>
+            <a:r>
+              <a:rPr lang="en-IN" dirty="0"/>
+              <a:t>SCSI Command</a:t>
+            </a:r>
+          </a:p>
+          <a:p>
+            <a:pPr marL="0" indent="0">
+              <a:buNone/>
+            </a:pPr>
+            <a:r>
+              <a:rPr lang="en-IN" dirty="0"/>
+              <a:t>iSCSI Encapsulation </a:t>
+            </a:r>
+          </a:p>
+          <a:p>
+            <a:pPr marL="0" indent="0">
+              <a:buNone/>
+            </a:pPr>
+            <a:r>
+              <a:rPr lang="en-IN" dirty="0"/>
+              <a:t>TCP  </a:t>
+            </a:r>
+          </a:p>
+          <a:p>
+            <a:pPr marL="0" indent="0">
+              <a:buNone/>
+            </a:pPr>
+            <a:r>
+              <a:rPr lang="en-IN" dirty="0"/>
+              <a:t>IP  </a:t>
+            </a:r>
+          </a:p>
+          <a:p>
+            <a:pPr marL="0" indent="0">
+              <a:buNone/>
+            </a:pPr>
+            <a:r>
+              <a:rPr lang="en-IN" dirty="0"/>
+              <a:t>Ethernet  </a:t>
+            </a:r>
+          </a:p>
+          <a:p>
+            <a:pPr marL="0" indent="0">
+              <a:buNone/>
+            </a:pPr>
+            <a:r>
+              <a:rPr lang="en-IN" dirty="0"/>
+              <a:t>Network </a:t>
+            </a:r>
+          </a:p>
+          <a:p>
+            <a:pPr marL="0" indent="0">
+              <a:buNone/>
+            </a:pPr>
+            <a:r>
+              <a:rPr lang="en-IN" dirty="0"/>
+              <a:t>iSCSI Target </a:t>
+            </a:r>
+          </a:p>
+          <a:p>
+            <a:pPr marL="0" indent="0">
+              <a:buNone/>
+            </a:pPr>
+            <a:r>
+              <a:rPr lang="en-IN" dirty="0"/>
+              <a:t>Storage Device</a:t>
+            </a:r>
+          </a:p>
+        </p:txBody>
+      </p:sp>
+    </p:spTree>
+    <p:extLst>
+      <p:ext uri="{BB962C8B-B14F-4D97-AF65-F5344CB8AC3E}">
+        <p14:creationId xmlns:p14="http://schemas.microsoft.com/office/powerpoint/2010/main" val="3994972131"/>
+      </p:ext>
+    </p:extLst>
+  </p:cSld>
+  <p:clrMapOvr>
+    <a:masterClrMapping/>
+  </p:clrMapOvr>
+</p:sld>
+</file>
+
+<file path=ppt/slides/slide63.xml><?xml version="1.0" encoding="utf-8"?>
+<p:sld xmlns:a="http://schemas.openxmlformats.org/drawingml/2006/main" xmlns:r="http://schemas.openxmlformats.org/officeDocument/2006/relationships" xmlns:p="http://schemas.openxmlformats.org/presentationml/2006/main">
+  <p:cSld>
+    <p:spTree>
+      <p:nvGrpSpPr>
+        <p:cNvPr id="1" name=""/>
+        <p:cNvGrpSpPr/>
+        <p:nvPr/>
+      </p:nvGrpSpPr>
+      <p:grpSpPr>
+        <a:xfrm>
+          <a:off x="0" y="0"/>
+          <a:ext cx="0" cy="0"/>
+          <a:chOff x="0" y="0"/>
+          <a:chExt cx="0" cy="0"/>
+        </a:xfrm>
+      </p:grpSpPr>
+      <p:sp>
+        <p:nvSpPr>
+          <p:cNvPr id="2" name="Title 1">
+            <a:extLst>
+              <a:ext uri="{FF2B5EF4-FFF2-40B4-BE49-F238E27FC236}">
+                <a16:creationId xmlns:a16="http://schemas.microsoft.com/office/drawing/2014/main" id="{88CCE55A-5EF1-42AF-A449-F385E8D036BA}"/>
+              </a:ext>
+            </a:extLst>
+          </p:cNvPr>
+          <p:cNvSpPr>
+            <a:spLocks noGrp="1"/>
+          </p:cNvSpPr>
+          <p:nvPr>
+            <p:ph type="title"/>
+          </p:nvPr>
+        </p:nvSpPr>
+        <p:spPr/>
+        <p:txBody>
+          <a:bodyPr/>
+          <a:lstStyle/>
+          <a:p>
+            <a:r>
+              <a:rPr lang="en-US" dirty="0"/>
+              <a:t>3. Why was iSCSI Developed?</a:t>
+            </a:r>
+            <a:br>
+              <a:rPr lang="en-US" dirty="0"/>
+            </a:br>
+            <a:endParaRPr lang="en-IN" dirty="0"/>
+          </a:p>
+        </p:txBody>
+      </p:sp>
+      <p:sp>
+        <p:nvSpPr>
+          <p:cNvPr id="3" name="Content Placeholder 2">
+            <a:extLst>
+              <a:ext uri="{FF2B5EF4-FFF2-40B4-BE49-F238E27FC236}">
+                <a16:creationId xmlns:a16="http://schemas.microsoft.com/office/drawing/2014/main" id="{DADCB381-BB94-4D36-9E59-CFEFD6689E56}"/>
+              </a:ext>
+            </a:extLst>
+          </p:cNvPr>
+          <p:cNvSpPr>
+            <a:spLocks noGrp="1"/>
+          </p:cNvSpPr>
+          <p:nvPr>
+            <p:ph idx="1"/>
+          </p:nvPr>
+        </p:nvSpPr>
+        <p:spPr>
+          <a:xfrm>
+            <a:off x="838200" y="1078787"/>
+            <a:ext cx="10515600" cy="5098176"/>
+          </a:xfrm>
+        </p:spPr>
+        <p:txBody>
+          <a:bodyPr>
+            <a:normAutofit lnSpcReduction="10000"/>
+          </a:bodyPr>
+          <a:lstStyle/>
+          <a:p>
+            <a:pPr marL="0" indent="0">
+              <a:buNone/>
+            </a:pPr>
+            <a:r>
+              <a:rPr lang="en-US" dirty="0"/>
+              <a:t>Organizations traditionally used technologies such as </a:t>
+            </a:r>
+            <a:r>
+              <a:rPr lang="en-US" b="1" dirty="0"/>
+              <a:t>Fibre Channel (FC)</a:t>
+            </a:r>
+            <a:r>
+              <a:rPr lang="en-US" dirty="0"/>
+              <a:t> to build Storage Area Networks (SANs).</a:t>
+            </a:r>
+          </a:p>
+          <a:p>
+            <a:pPr marL="0" indent="0">
+              <a:buNone/>
+            </a:pPr>
+            <a:endParaRPr lang="en-US" dirty="0"/>
+          </a:p>
+          <a:p>
+            <a:pPr marL="0" indent="0">
+              <a:buNone/>
+            </a:pPr>
+            <a:r>
+              <a:rPr lang="en-US" dirty="0"/>
+              <a:t>Although Fibre Channel provides high-performance storage networking, it generally requires:</a:t>
+            </a:r>
+          </a:p>
+          <a:p>
+            <a:pPr lvl="1"/>
+            <a:r>
+              <a:rPr lang="en-US" dirty="0"/>
+              <a:t>Specialized Fibre Channel switches </a:t>
+            </a:r>
+          </a:p>
+          <a:p>
+            <a:pPr lvl="1"/>
+            <a:r>
+              <a:rPr lang="en-US" dirty="0"/>
+              <a:t>Fibre Channel host bus adapters </a:t>
+            </a:r>
+          </a:p>
+          <a:p>
+            <a:pPr lvl="1"/>
+            <a:r>
+              <a:rPr lang="en-US" dirty="0"/>
+              <a:t>Fibre Channel cables </a:t>
+            </a:r>
+          </a:p>
+          <a:p>
+            <a:pPr lvl="1"/>
+            <a:r>
+              <a:rPr lang="en-US" dirty="0"/>
+              <a:t>Specialized knowledge </a:t>
+            </a:r>
+          </a:p>
+          <a:p>
+            <a:pPr lvl="1"/>
+            <a:r>
+              <a:rPr lang="en-US" dirty="0"/>
+              <a:t>Additional infrastructure and management </a:t>
+            </a:r>
+          </a:p>
+          <a:p>
+            <a:pPr marL="0" indent="0">
+              <a:buNone/>
+            </a:pPr>
+            <a:r>
+              <a:rPr lang="en-US" dirty="0"/>
+              <a:t>Many organizations already had </a:t>
+            </a:r>
+            <a:r>
+              <a:rPr lang="en-US" b="1" dirty="0"/>
+              <a:t>Ethernet and TCP/IP networks</a:t>
+            </a:r>
+            <a:r>
+              <a:rPr lang="en-US" dirty="0"/>
+              <a:t>.</a:t>
+            </a:r>
+          </a:p>
+          <a:p>
+            <a:pPr marL="0" indent="0">
+              <a:buNone/>
+            </a:pPr>
+            <a:r>
+              <a:rPr lang="en-US" dirty="0"/>
+              <a:t>iSCSI provides a way to use existing IP networking technologies for storage communication.</a:t>
+            </a:r>
+          </a:p>
+          <a:p>
+            <a:endParaRPr lang="en-IN" dirty="0"/>
+          </a:p>
+        </p:txBody>
+      </p:sp>
+    </p:spTree>
+    <p:extLst>
+      <p:ext uri="{BB962C8B-B14F-4D97-AF65-F5344CB8AC3E}">
+        <p14:creationId xmlns:p14="http://schemas.microsoft.com/office/powerpoint/2010/main" val="1330228761"/>
+      </p:ext>
+    </p:extLst>
+  </p:cSld>
+  <p:clrMapOvr>
+    <a:masterClrMapping/>
+  </p:clrMapOvr>
+</p:sld>
+</file>
+
+<file path=ppt/slides/slide64.xml><?xml version="1.0" encoding="utf-8"?>
+<p:sld xmlns:a="http://schemas.openxmlformats.org/drawingml/2006/main" xmlns:r="http://schemas.openxmlformats.org/officeDocument/2006/relationships" xmlns:p="http://schemas.openxmlformats.org/presentationml/2006/main">
+  <p:cSld>
+    <p:spTree>
+      <p:nvGrpSpPr>
+        <p:cNvPr id="1" name=""/>
+        <p:cNvGrpSpPr/>
+        <p:nvPr/>
+      </p:nvGrpSpPr>
+      <p:grpSpPr>
+        <a:xfrm>
+          <a:off x="0" y="0"/>
+          <a:ext cx="0" cy="0"/>
+          <a:chOff x="0" y="0"/>
+          <a:chExt cx="0" cy="0"/>
+        </a:xfrm>
+      </p:grpSpPr>
+      <p:sp>
+        <p:nvSpPr>
+          <p:cNvPr id="2" name="Title 1">
+            <a:extLst>
+              <a:ext uri="{FF2B5EF4-FFF2-40B4-BE49-F238E27FC236}">
+                <a16:creationId xmlns:a16="http://schemas.microsoft.com/office/drawing/2014/main" id="{E7886F99-5E0F-4E56-9C3D-F747BFBC7584}"/>
+              </a:ext>
+            </a:extLst>
+          </p:cNvPr>
+          <p:cNvSpPr>
+            <a:spLocks noGrp="1"/>
+          </p:cNvSpPr>
+          <p:nvPr>
+            <p:ph type="title"/>
+          </p:nvPr>
+        </p:nvSpPr>
+        <p:spPr/>
+        <p:txBody>
+          <a:bodyPr/>
+          <a:lstStyle/>
+          <a:p>
+            <a:endParaRPr lang="en-IN"/>
+          </a:p>
+        </p:txBody>
+      </p:sp>
+      <p:sp>
+        <p:nvSpPr>
+          <p:cNvPr id="3" name="Content Placeholder 2">
+            <a:extLst>
+              <a:ext uri="{FF2B5EF4-FFF2-40B4-BE49-F238E27FC236}">
+                <a16:creationId xmlns:a16="http://schemas.microsoft.com/office/drawing/2014/main" id="{45A6D369-031F-4E8C-AAA6-0B0B384B3CA3}"/>
+              </a:ext>
+            </a:extLst>
+          </p:cNvPr>
+          <p:cNvSpPr>
+            <a:spLocks noGrp="1"/>
+          </p:cNvSpPr>
+          <p:nvPr>
+            <p:ph idx="1"/>
+          </p:nvPr>
+        </p:nvSpPr>
+        <p:spPr/>
+        <p:txBody>
+          <a:bodyPr/>
+          <a:lstStyle/>
+          <a:p>
+            <a:pPr marL="0" indent="0">
+              <a:buNone/>
+            </a:pPr>
+            <a:r>
+              <a:rPr lang="en-IN" dirty="0"/>
+              <a:t>	Basic idea					With iSCSI:</a:t>
+            </a:r>
+          </a:p>
+          <a:p>
+            <a:pPr marL="0" indent="0">
+              <a:buNone/>
+            </a:pPr>
+            <a:endParaRPr lang="en-IN" dirty="0"/>
+          </a:p>
+          <a:p>
+            <a:pPr marL="0" indent="0">
+              <a:buNone/>
+            </a:pPr>
+            <a:endParaRPr lang="en-IN" dirty="0"/>
+          </a:p>
+          <a:p>
+            <a:pPr marL="0" indent="0">
+              <a:buNone/>
+            </a:pPr>
+            <a:endParaRPr lang="en-IN" dirty="0"/>
+          </a:p>
+          <a:p>
+            <a:pPr marL="0" indent="0">
+              <a:buNone/>
+            </a:pPr>
+            <a:endParaRPr lang="en-IN" dirty="0"/>
+          </a:p>
+          <a:p>
+            <a:pPr marL="0" indent="0">
+              <a:buNone/>
+            </a:pPr>
+            <a:endParaRPr lang="en-IN" dirty="0"/>
+          </a:p>
+          <a:p>
+            <a:pPr marL="0" indent="0">
+              <a:buNone/>
+            </a:pPr>
+            <a:endParaRPr lang="en-IN" dirty="0"/>
+          </a:p>
+          <a:p>
+            <a:pPr marL="0" indent="0">
+              <a:buNone/>
+            </a:pPr>
+            <a:endParaRPr lang="en-IN" dirty="0"/>
+          </a:p>
+          <a:p>
+            <a:pPr marL="0" indent="0">
+              <a:buNone/>
+            </a:pPr>
+            <a:r>
+              <a:rPr lang="en-US" dirty="0"/>
+              <a:t>Therefore, iSCSI can reduce the need for a separate specialized storage network.</a:t>
+            </a:r>
+            <a:endParaRPr lang="en-IN" dirty="0"/>
+          </a:p>
+          <a:p>
+            <a:endParaRPr lang="en-IN" dirty="0"/>
+          </a:p>
+        </p:txBody>
+      </p:sp>
+      <p:pic>
+        <p:nvPicPr>
+          <p:cNvPr id="4" name="Picture 3">
+            <a:extLst>
+              <a:ext uri="{FF2B5EF4-FFF2-40B4-BE49-F238E27FC236}">
+                <a16:creationId xmlns:a16="http://schemas.microsoft.com/office/drawing/2014/main" id="{F42B7778-85E8-4EE5-813E-077B03F66F58}"/>
+              </a:ext>
+            </a:extLst>
+          </p:cNvPr>
+          <p:cNvPicPr>
+            <a:picLocks noChangeAspect="1"/>
+          </p:cNvPicPr>
+          <p:nvPr/>
+        </p:nvPicPr>
+        <p:blipFill>
+          <a:blip r:embed="rId2"/>
+          <a:stretch>
+            <a:fillRect/>
+          </a:stretch>
+        </p:blipFill>
+        <p:spPr>
+          <a:xfrm>
+            <a:off x="1643865" y="2401012"/>
+            <a:ext cx="2342507" cy="2571680"/>
+          </a:xfrm>
+          <a:prstGeom prst="rect">
+            <a:avLst/>
+          </a:prstGeom>
+        </p:spPr>
+      </p:pic>
+      <p:pic>
+        <p:nvPicPr>
+          <p:cNvPr id="5" name="Picture 4">
+            <a:extLst>
+              <a:ext uri="{FF2B5EF4-FFF2-40B4-BE49-F238E27FC236}">
+                <a16:creationId xmlns:a16="http://schemas.microsoft.com/office/drawing/2014/main" id="{1057BD4C-6FE7-4E8D-A179-0F294545CFD5}"/>
+              </a:ext>
+            </a:extLst>
+          </p:cNvPr>
+          <p:cNvPicPr>
+            <a:picLocks noChangeAspect="1"/>
+          </p:cNvPicPr>
+          <p:nvPr/>
+        </p:nvPicPr>
+        <p:blipFill>
+          <a:blip r:embed="rId3"/>
+          <a:stretch>
+            <a:fillRect/>
+          </a:stretch>
+        </p:blipFill>
+        <p:spPr>
+          <a:xfrm>
+            <a:off x="6832315" y="2550244"/>
+            <a:ext cx="2506894" cy="2422448"/>
+          </a:xfrm>
+          <a:prstGeom prst="rect">
+            <a:avLst/>
+          </a:prstGeom>
+        </p:spPr>
+      </p:pic>
+    </p:spTree>
+    <p:extLst>
+      <p:ext uri="{BB962C8B-B14F-4D97-AF65-F5344CB8AC3E}">
+        <p14:creationId xmlns:p14="http://schemas.microsoft.com/office/powerpoint/2010/main" val="2266755451"/>
+      </p:ext>
+    </p:extLst>
+  </p:cSld>
+  <p:clrMapOvr>
+    <a:masterClrMapping/>
+  </p:clrMapOvr>
+</p:sld>
+</file>
+
+<file path=ppt/slides/slide65.xml><?xml version="1.0" encoding="utf-8"?>
+<p:sld xmlns:a="http://schemas.openxmlformats.org/drawingml/2006/main" xmlns:r="http://schemas.openxmlformats.org/officeDocument/2006/relationships" xmlns:p="http://schemas.openxmlformats.org/presentationml/2006/main">
+  <p:cSld>
+    <p:spTree>
+      <p:nvGrpSpPr>
+        <p:cNvPr id="1" name=""/>
+        <p:cNvGrpSpPr/>
+        <p:nvPr/>
+      </p:nvGrpSpPr>
+      <p:grpSpPr>
+        <a:xfrm>
+          <a:off x="0" y="0"/>
+          <a:ext cx="0" cy="0"/>
+          <a:chOff x="0" y="0"/>
+          <a:chExt cx="0" cy="0"/>
+        </a:xfrm>
+      </p:grpSpPr>
+      <p:sp>
+        <p:nvSpPr>
+          <p:cNvPr id="2" name="Title 1">
+            <a:extLst>
+              <a:ext uri="{FF2B5EF4-FFF2-40B4-BE49-F238E27FC236}">
+                <a16:creationId xmlns:a16="http://schemas.microsoft.com/office/drawing/2014/main" id="{AB64317F-7350-4886-ADB3-8E0A29BEB9E4}"/>
+              </a:ext>
+            </a:extLst>
+          </p:cNvPr>
+          <p:cNvSpPr>
+            <a:spLocks noGrp="1"/>
+          </p:cNvSpPr>
+          <p:nvPr>
+            <p:ph type="title"/>
+          </p:nvPr>
+        </p:nvSpPr>
+        <p:spPr/>
+        <p:txBody>
+          <a:bodyPr/>
+          <a:lstStyle/>
+          <a:p>
+            <a:r>
+              <a:rPr lang="en-US" dirty="0"/>
+              <a:t>4. Main Characteristics of iSCSI</a:t>
+            </a:r>
+            <a:endParaRPr lang="en-IN" dirty="0"/>
+          </a:p>
+        </p:txBody>
+      </p:sp>
+      <p:sp>
+        <p:nvSpPr>
+          <p:cNvPr id="3" name="Content Placeholder 2">
+            <a:extLst>
+              <a:ext uri="{FF2B5EF4-FFF2-40B4-BE49-F238E27FC236}">
+                <a16:creationId xmlns:a16="http://schemas.microsoft.com/office/drawing/2014/main" id="{BA903C72-0783-4485-8BAF-2AEBEDE3223A}"/>
+              </a:ext>
+            </a:extLst>
+          </p:cNvPr>
+          <p:cNvSpPr>
+            <a:spLocks noGrp="1"/>
+          </p:cNvSpPr>
+          <p:nvPr>
+            <p:ph idx="1"/>
+          </p:nvPr>
+        </p:nvSpPr>
+        <p:spPr>
+          <a:xfrm>
+            <a:off x="838200" y="1407560"/>
+            <a:ext cx="10515600" cy="5085315"/>
+          </a:xfrm>
+        </p:spPr>
+        <p:txBody>
+          <a:bodyPr>
+            <a:normAutofit/>
+          </a:bodyPr>
+          <a:lstStyle/>
+          <a:p>
+            <a:pPr marL="0" indent="0">
+              <a:buNone/>
+            </a:pPr>
+            <a:r>
+              <a:rPr lang="en-US" b="1" dirty="0"/>
+              <a:t>4.1 IP-Based</a:t>
+            </a:r>
+          </a:p>
+          <a:p>
+            <a:pPr marL="0" indent="0">
+              <a:buNone/>
+            </a:pPr>
+            <a:r>
+              <a:rPr lang="en-US" dirty="0"/>
+              <a:t>iSCSI uses the </a:t>
+            </a:r>
+            <a:r>
+              <a:rPr lang="en-US" b="1" dirty="0"/>
+              <a:t>TCP/IP protocol suite</a:t>
+            </a:r>
+            <a:r>
+              <a:rPr lang="en-US" dirty="0"/>
+              <a:t>.</a:t>
+            </a:r>
+          </a:p>
+          <a:p>
+            <a:pPr marL="0" indent="0">
+              <a:buNone/>
+            </a:pPr>
+            <a:r>
+              <a:rPr lang="en-US" dirty="0"/>
+              <a:t>This means storage traffic can travel through standard IP networks.</a:t>
+            </a:r>
+          </a:p>
+          <a:p>
+            <a:pPr marL="0" indent="0">
+              <a:buNone/>
+            </a:pPr>
+            <a:endParaRPr lang="en-US" dirty="0"/>
+          </a:p>
+          <a:p>
+            <a:pPr marL="0" indent="0">
+              <a:buNone/>
+            </a:pPr>
+            <a:r>
+              <a:rPr lang="en-US" b="1" dirty="0"/>
+              <a:t>4.2 Block-Level Storage</a:t>
+            </a:r>
+          </a:p>
+          <a:p>
+            <a:pPr marL="0" indent="0">
+              <a:buNone/>
+            </a:pPr>
+            <a:r>
+              <a:rPr lang="en-US" dirty="0"/>
+              <a:t>iSCSI provides </a:t>
+            </a:r>
+            <a:r>
+              <a:rPr lang="en-US" b="1" dirty="0"/>
+              <a:t>block-level access</a:t>
+            </a:r>
+            <a:r>
+              <a:rPr lang="en-US" dirty="0"/>
+              <a:t>.</a:t>
+            </a:r>
+          </a:p>
+          <a:p>
+            <a:pPr marL="0" indent="0">
+              <a:buNone/>
+            </a:pPr>
+            <a:r>
+              <a:rPr lang="en-US" dirty="0"/>
+              <a:t>The server does not access individual files directly through iSCSI. Instead, it sees a logical block device.</a:t>
+            </a:r>
+          </a:p>
+          <a:p>
+            <a:pPr marL="0" indent="0">
+              <a:buNone/>
+            </a:pPr>
+            <a:endParaRPr lang="en-US" dirty="0"/>
+          </a:p>
+          <a:p>
+            <a:pPr marL="0" indent="0">
+              <a:buNone/>
+            </a:pPr>
+            <a:r>
+              <a:rPr lang="en-US" dirty="0"/>
+              <a:t>The operating system can format the LUN with a file system such as NTFS, ext4, XFS, etc.</a:t>
+            </a:r>
+            <a:endParaRPr lang="en-IN" dirty="0"/>
+          </a:p>
+        </p:txBody>
+      </p:sp>
+    </p:spTree>
+    <p:extLst>
+      <p:ext uri="{BB962C8B-B14F-4D97-AF65-F5344CB8AC3E}">
+        <p14:creationId xmlns:p14="http://schemas.microsoft.com/office/powerpoint/2010/main" val="2566173778"/>
+      </p:ext>
+    </p:extLst>
+  </p:cSld>
+  <p:clrMapOvr>
+    <a:masterClrMapping/>
+  </p:clrMapOvr>
+</p:sld>
+</file>
+
+<file path=ppt/slides/slide66.xml><?xml version="1.0" encoding="utf-8"?>
+<p:sld xmlns:a="http://schemas.openxmlformats.org/drawingml/2006/main" xmlns:r="http://schemas.openxmlformats.org/officeDocument/2006/relationships" xmlns:p="http://schemas.openxmlformats.org/presentationml/2006/main">
+  <p:cSld>
+    <p:spTree>
+      <p:nvGrpSpPr>
+        <p:cNvPr id="1" name=""/>
+        <p:cNvGrpSpPr/>
+        <p:nvPr/>
+      </p:nvGrpSpPr>
+      <p:grpSpPr>
+        <a:xfrm>
+          <a:off x="0" y="0"/>
+          <a:ext cx="0" cy="0"/>
+          <a:chOff x="0" y="0"/>
+          <a:chExt cx="0" cy="0"/>
+        </a:xfrm>
+      </p:grpSpPr>
+      <p:sp>
+        <p:nvSpPr>
+          <p:cNvPr id="2" name="Title 1">
+            <a:extLst>
+              <a:ext uri="{FF2B5EF4-FFF2-40B4-BE49-F238E27FC236}">
+                <a16:creationId xmlns:a16="http://schemas.microsoft.com/office/drawing/2014/main" id="{098B3C67-52D8-4F1E-8B91-FC75CC75185B}"/>
+              </a:ext>
+            </a:extLst>
+          </p:cNvPr>
+          <p:cNvSpPr>
+            <a:spLocks noGrp="1"/>
+          </p:cNvSpPr>
+          <p:nvPr>
+            <p:ph type="title"/>
+          </p:nvPr>
+        </p:nvSpPr>
+        <p:spPr/>
+        <p:txBody>
+          <a:bodyPr/>
+          <a:lstStyle/>
+          <a:p>
+            <a:endParaRPr lang="en-IN"/>
+          </a:p>
+        </p:txBody>
+      </p:sp>
+      <p:sp>
+        <p:nvSpPr>
+          <p:cNvPr id="3" name="Content Placeholder 2">
+            <a:extLst>
+              <a:ext uri="{FF2B5EF4-FFF2-40B4-BE49-F238E27FC236}">
+                <a16:creationId xmlns:a16="http://schemas.microsoft.com/office/drawing/2014/main" id="{02612176-9D93-4ED7-BE30-571F87425682}"/>
+              </a:ext>
+            </a:extLst>
+          </p:cNvPr>
+          <p:cNvSpPr>
+            <a:spLocks noGrp="1"/>
+          </p:cNvSpPr>
+          <p:nvPr>
+            <p:ph idx="1"/>
+          </p:nvPr>
+        </p:nvSpPr>
+        <p:spPr>
+          <a:xfrm>
+            <a:off x="838200" y="1825624"/>
+            <a:ext cx="10515600" cy="4585449"/>
+          </a:xfrm>
+        </p:spPr>
+        <p:txBody>
+          <a:bodyPr>
+            <a:normAutofit fontScale="92500" lnSpcReduction="10000"/>
+          </a:bodyPr>
+          <a:lstStyle/>
+          <a:p>
+            <a:pPr marL="0" indent="0">
+              <a:buNone/>
+            </a:pPr>
+            <a:r>
+              <a:rPr lang="en-US" b="1" dirty="0"/>
+              <a:t>4.3 Uses TCP</a:t>
+            </a:r>
+          </a:p>
+          <a:p>
+            <a:pPr marL="0" indent="0">
+              <a:buNone/>
+            </a:pPr>
+            <a:r>
+              <a:rPr lang="en-US" dirty="0"/>
+              <a:t>iSCSI operates over </a:t>
+            </a:r>
+            <a:r>
+              <a:rPr lang="en-US" b="1" dirty="0"/>
+              <a:t>TCP</a:t>
+            </a:r>
+            <a:r>
+              <a:rPr lang="en-US" dirty="0"/>
+              <a:t>.</a:t>
+            </a:r>
+          </a:p>
+          <a:p>
+            <a:pPr marL="0" indent="0">
+              <a:buNone/>
+            </a:pPr>
+            <a:r>
+              <a:rPr lang="en-US" dirty="0"/>
+              <a:t>The standard iSCSI TCP port is:</a:t>
+            </a:r>
+          </a:p>
+          <a:p>
+            <a:pPr marL="0" indent="0">
+              <a:buNone/>
+            </a:pPr>
+            <a:r>
+              <a:rPr lang="en-US" b="1" dirty="0"/>
+              <a:t>TCP port 3260</a:t>
+            </a:r>
+            <a:endParaRPr lang="en-US" dirty="0"/>
+          </a:p>
+          <a:p>
+            <a:pPr marL="0" indent="0">
+              <a:buNone/>
+            </a:pPr>
+            <a:endParaRPr lang="en-US" dirty="0"/>
+          </a:p>
+          <a:p>
+            <a:pPr marL="0" indent="0">
+              <a:buNone/>
+            </a:pPr>
+            <a:r>
+              <a:rPr lang="en-US" dirty="0"/>
+              <a:t>Therefore:</a:t>
+            </a:r>
+          </a:p>
+          <a:p>
+            <a:pPr marL="0" indent="0">
+              <a:buNone/>
+            </a:pPr>
+            <a:r>
+              <a:rPr lang="en-IN" dirty="0"/>
+              <a:t>iSCSI </a:t>
+            </a:r>
+          </a:p>
+          <a:p>
+            <a:pPr marL="0" indent="0">
+              <a:buNone/>
+            </a:pPr>
+            <a:r>
+              <a:rPr lang="en-IN" dirty="0"/>
+              <a:t>↓ </a:t>
+            </a:r>
+          </a:p>
+          <a:p>
+            <a:pPr marL="0" indent="0">
+              <a:buNone/>
+            </a:pPr>
+            <a:r>
+              <a:rPr lang="en-IN" dirty="0"/>
+              <a:t>TCP </a:t>
+            </a:r>
+          </a:p>
+          <a:p>
+            <a:pPr marL="0" indent="0">
+              <a:buNone/>
+            </a:pPr>
+            <a:r>
+              <a:rPr lang="en-IN" dirty="0"/>
+              <a:t>↓ </a:t>
+            </a:r>
+          </a:p>
+          <a:p>
+            <a:pPr marL="0" indent="0">
+              <a:buNone/>
+            </a:pPr>
+            <a:r>
+              <a:rPr lang="en-IN" dirty="0"/>
+              <a:t>Port 3260</a:t>
+            </a:r>
+          </a:p>
+        </p:txBody>
+      </p:sp>
+    </p:spTree>
+    <p:extLst>
+      <p:ext uri="{BB962C8B-B14F-4D97-AF65-F5344CB8AC3E}">
+        <p14:creationId xmlns:p14="http://schemas.microsoft.com/office/powerpoint/2010/main" val="3617339789"/>
+      </p:ext>
+    </p:extLst>
+  </p:cSld>
+  <p:clrMapOvr>
+    <a:masterClrMapping/>
+  </p:clrMapOvr>
+</p:sld>
+</file>
+
+<file path=ppt/slides/slide67.xml><?xml version="1.0" encoding="utf-8"?>
+<p:sld xmlns:a="http://schemas.openxmlformats.org/drawingml/2006/main" xmlns:r="http://schemas.openxmlformats.org/officeDocument/2006/relationships" xmlns:p="http://schemas.openxmlformats.org/presentationml/2006/main">
+  <p:cSld>
+    <p:spTree>
+      <p:nvGrpSpPr>
+        <p:cNvPr id="1" name=""/>
+        <p:cNvGrpSpPr/>
+        <p:nvPr/>
+      </p:nvGrpSpPr>
+      <p:grpSpPr>
+        <a:xfrm>
+          <a:off x="0" y="0"/>
+          <a:ext cx="0" cy="0"/>
+          <a:chOff x="0" y="0"/>
+          <a:chExt cx="0" cy="0"/>
+        </a:xfrm>
+      </p:grpSpPr>
+      <p:sp>
+        <p:nvSpPr>
+          <p:cNvPr id="2" name="Title 1">
+            <a:extLst>
+              <a:ext uri="{FF2B5EF4-FFF2-40B4-BE49-F238E27FC236}">
+                <a16:creationId xmlns:a16="http://schemas.microsoft.com/office/drawing/2014/main" id="{8773E353-D42E-4B68-9499-DF91BC38CD54}"/>
+              </a:ext>
+            </a:extLst>
+          </p:cNvPr>
+          <p:cNvSpPr>
+            <a:spLocks noGrp="1"/>
+          </p:cNvSpPr>
+          <p:nvPr>
+            <p:ph type="title"/>
+          </p:nvPr>
+        </p:nvSpPr>
+        <p:spPr/>
+        <p:txBody>
+          <a:bodyPr/>
+          <a:lstStyle/>
+          <a:p>
+            <a:endParaRPr lang="en-IN"/>
+          </a:p>
+        </p:txBody>
+      </p:sp>
+      <p:sp>
+        <p:nvSpPr>
+          <p:cNvPr id="3" name="Content Placeholder 2">
+            <a:extLst>
+              <a:ext uri="{FF2B5EF4-FFF2-40B4-BE49-F238E27FC236}">
+                <a16:creationId xmlns:a16="http://schemas.microsoft.com/office/drawing/2014/main" id="{DD58BCAE-52BF-48F6-A875-7CC7BEAB35E4}"/>
+              </a:ext>
+            </a:extLst>
+          </p:cNvPr>
+          <p:cNvSpPr>
+            <a:spLocks noGrp="1"/>
+          </p:cNvSpPr>
+          <p:nvPr>
+            <p:ph idx="1"/>
+          </p:nvPr>
+        </p:nvSpPr>
+        <p:spPr/>
+        <p:txBody>
+          <a:bodyPr/>
+          <a:lstStyle/>
+          <a:p>
+            <a:r>
+              <a:rPr lang="en-IN" b="1" dirty="0"/>
+              <a:t>4.4 Uses Standard Ethernet</a:t>
+            </a:r>
+          </a:p>
+          <a:p>
+            <a:r>
+              <a:rPr lang="en-IN" dirty="0"/>
+              <a:t>iSCSI can use standard Ethernet infrastructure.</a:t>
+            </a:r>
+          </a:p>
+          <a:p>
+            <a:r>
+              <a:rPr lang="en-IN" dirty="0"/>
+              <a:t>For example:</a:t>
+            </a:r>
+          </a:p>
+          <a:p>
+            <a:r>
+              <a:rPr lang="en-IN" dirty="0"/>
+              <a:t>1 Gb Ethernet </a:t>
+            </a:r>
+          </a:p>
+          <a:p>
+            <a:r>
+              <a:rPr lang="en-IN" dirty="0"/>
+              <a:t>10 Gb Ethernet </a:t>
+            </a:r>
+          </a:p>
+          <a:p>
+            <a:r>
+              <a:rPr lang="en-IN" dirty="0"/>
+              <a:t>25 Gb Ethernet </a:t>
+            </a:r>
+          </a:p>
+          <a:p>
+            <a:r>
+              <a:rPr lang="en-IN" dirty="0"/>
+              <a:t>40 Gb Ethernet </a:t>
+            </a:r>
+          </a:p>
+          <a:p>
+            <a:r>
+              <a:rPr lang="en-IN" dirty="0"/>
+              <a:t>100 Gb Ethernet </a:t>
+            </a:r>
+          </a:p>
+          <a:p>
+            <a:r>
+              <a:rPr lang="en-IN" dirty="0"/>
+              <a:t>depending on the network and storage equipment.</a:t>
+            </a:r>
+          </a:p>
+          <a:p>
+            <a:endParaRPr lang="en-IN" dirty="0"/>
+          </a:p>
+        </p:txBody>
+      </p:sp>
+    </p:spTree>
+    <p:extLst>
+      <p:ext uri="{BB962C8B-B14F-4D97-AF65-F5344CB8AC3E}">
+        <p14:creationId xmlns:p14="http://schemas.microsoft.com/office/powerpoint/2010/main" val="1336003545"/>
+      </p:ext>
+    </p:extLst>
+  </p:cSld>
+  <p:clrMapOvr>
+    <a:masterClrMapping/>
+  </p:clrMapOvr>
+</p:sld>
+</file>
+
+<file path=ppt/slides/slide68.xml><?xml version="1.0" encoding="utf-8"?>
+<p:sld xmlns:a="http://schemas.openxmlformats.org/drawingml/2006/main" xmlns:r="http://schemas.openxmlformats.org/officeDocument/2006/relationships" xmlns:p="http://schemas.openxmlformats.org/presentationml/2006/main">
+  <p:cSld>
+    <p:spTree>
+      <p:nvGrpSpPr>
+        <p:cNvPr id="1" name=""/>
+        <p:cNvGrpSpPr/>
+        <p:nvPr/>
+      </p:nvGrpSpPr>
+      <p:grpSpPr>
+        <a:xfrm>
+          <a:off x="0" y="0"/>
+          <a:ext cx="0" cy="0"/>
+          <a:chOff x="0" y="0"/>
+          <a:chExt cx="0" cy="0"/>
+        </a:xfrm>
+      </p:grpSpPr>
+      <p:sp>
+        <p:nvSpPr>
+          <p:cNvPr id="2" name="Title 1">
+            <a:extLst>
+              <a:ext uri="{FF2B5EF4-FFF2-40B4-BE49-F238E27FC236}">
+                <a16:creationId xmlns:a16="http://schemas.microsoft.com/office/drawing/2014/main" id="{AD31B73B-358C-4D28-9475-3AFF36DBC15A}"/>
+              </a:ext>
+            </a:extLst>
+          </p:cNvPr>
+          <p:cNvSpPr>
+            <a:spLocks noGrp="1"/>
+          </p:cNvSpPr>
+          <p:nvPr>
+            <p:ph type="title"/>
+          </p:nvPr>
+        </p:nvSpPr>
+        <p:spPr/>
+        <p:txBody>
+          <a:bodyPr/>
+          <a:lstStyle/>
+          <a:p>
+            <a:endParaRPr lang="en-IN"/>
+          </a:p>
+        </p:txBody>
+      </p:sp>
+      <p:sp>
+        <p:nvSpPr>
+          <p:cNvPr id="3" name="Content Placeholder 2">
+            <a:extLst>
+              <a:ext uri="{FF2B5EF4-FFF2-40B4-BE49-F238E27FC236}">
+                <a16:creationId xmlns:a16="http://schemas.microsoft.com/office/drawing/2014/main" id="{2D5E6CCC-EEDE-4EB2-B812-C57F690D6BAD}"/>
+              </a:ext>
+            </a:extLst>
+          </p:cNvPr>
+          <p:cNvSpPr>
+            <a:spLocks noGrp="1"/>
+          </p:cNvSpPr>
+          <p:nvPr>
+            <p:ph idx="1"/>
+          </p:nvPr>
+        </p:nvSpPr>
+        <p:spPr/>
+        <p:txBody>
+          <a:bodyPr>
+            <a:normAutofit lnSpcReduction="10000"/>
+          </a:bodyPr>
+          <a:lstStyle/>
+          <a:p>
+            <a:pPr marL="0" indent="0">
+              <a:buNone/>
+            </a:pPr>
+            <a:r>
+              <a:rPr lang="en-US" b="1" dirty="0"/>
+              <a:t>4.5 Remote Storage Access</a:t>
+            </a:r>
+          </a:p>
+          <a:p>
+            <a:pPr marL="0" indent="0">
+              <a:buNone/>
+            </a:pPr>
+            <a:r>
+              <a:rPr lang="en-US" dirty="0"/>
+              <a:t>The storage device does not have to be physically located beside the server.</a:t>
+            </a:r>
+          </a:p>
+          <a:p>
+            <a:pPr marL="0" indent="0">
+              <a:buNone/>
+            </a:pPr>
+            <a:r>
+              <a:rPr lang="en-US" dirty="0"/>
+              <a:t>For example:</a:t>
+            </a:r>
+          </a:p>
+          <a:p>
+            <a:pPr marL="0" indent="0">
+              <a:buNone/>
+            </a:pPr>
+            <a:r>
+              <a:rPr lang="en-US" dirty="0"/>
+              <a:t>Server Room A </a:t>
+            </a:r>
+          </a:p>
+          <a:p>
+            <a:pPr marL="0" indent="0">
+              <a:buNone/>
+            </a:pPr>
+            <a:r>
+              <a:rPr lang="en-US" dirty="0"/>
+              <a:t>| </a:t>
+            </a:r>
+          </a:p>
+          <a:p>
+            <a:pPr marL="0" indent="0">
+              <a:buNone/>
+            </a:pPr>
+            <a:r>
+              <a:rPr lang="en-US" dirty="0"/>
+              <a:t>| IP Network </a:t>
+            </a:r>
+          </a:p>
+          <a:p>
+            <a:pPr marL="0" indent="0">
+              <a:buNone/>
+            </a:pPr>
+            <a:r>
+              <a:rPr lang="en-US" dirty="0"/>
+              <a:t>| </a:t>
+            </a:r>
+          </a:p>
+          <a:p>
+            <a:pPr marL="0" indent="0">
+              <a:buNone/>
+            </a:pPr>
+            <a:r>
+              <a:rPr lang="en-US" dirty="0"/>
+              <a:t>↓ </a:t>
+            </a:r>
+          </a:p>
+          <a:p>
+            <a:pPr marL="0" indent="0">
+              <a:buNone/>
+            </a:pPr>
+            <a:r>
+              <a:rPr lang="en-US" dirty="0"/>
+              <a:t>Storage Room B</a:t>
+            </a:r>
+          </a:p>
+          <a:p>
+            <a:pPr marL="0" indent="0">
+              <a:buNone/>
+            </a:pPr>
+            <a:r>
+              <a:rPr lang="en-US" dirty="0"/>
+              <a:t>The server can access storage located elsewhere in the data center or network.</a:t>
+            </a:r>
+          </a:p>
+          <a:p>
+            <a:pPr marL="0" indent="0">
+              <a:buNone/>
+            </a:pPr>
+            <a:endParaRPr lang="en-IN" dirty="0"/>
+          </a:p>
+        </p:txBody>
+      </p:sp>
+    </p:spTree>
+    <p:extLst>
+      <p:ext uri="{BB962C8B-B14F-4D97-AF65-F5344CB8AC3E}">
+        <p14:creationId xmlns:p14="http://schemas.microsoft.com/office/powerpoint/2010/main" val="960877065"/>
+      </p:ext>
+    </p:extLst>
+  </p:cSld>
+  <p:clrMapOvr>
+    <a:masterClrMapping/>
+  </p:clrMapOvr>
+</p:sld>
+</file>
+
+<file path=ppt/slides/slide69.xml><?xml version="1.0" encoding="utf-8"?>
+<p:sld xmlns:a="http://schemas.openxmlformats.org/drawingml/2006/main" xmlns:r="http://schemas.openxmlformats.org/officeDocument/2006/relationships" xmlns:p="http://schemas.openxmlformats.org/presentationml/2006/main">
+  <p:cSld>
+    <p:spTree>
+      <p:nvGrpSpPr>
+        <p:cNvPr id="1" name=""/>
+        <p:cNvGrpSpPr/>
+        <p:nvPr/>
+      </p:nvGrpSpPr>
+      <p:grpSpPr>
+        <a:xfrm>
+          <a:off x="0" y="0"/>
+          <a:ext cx="0" cy="0"/>
+          <a:chOff x="0" y="0"/>
+          <a:chExt cx="0" cy="0"/>
+        </a:xfrm>
+      </p:grpSpPr>
+      <p:sp>
+        <p:nvSpPr>
+          <p:cNvPr id="2" name="Title 1">
+            <a:extLst>
+              <a:ext uri="{FF2B5EF4-FFF2-40B4-BE49-F238E27FC236}">
+                <a16:creationId xmlns:a16="http://schemas.microsoft.com/office/drawing/2014/main" id="{F6557315-4E21-48F8-9757-2D248C30BA98}"/>
+              </a:ext>
+            </a:extLst>
+          </p:cNvPr>
+          <p:cNvSpPr>
+            <a:spLocks noGrp="1"/>
+          </p:cNvSpPr>
+          <p:nvPr>
+            <p:ph type="title"/>
+          </p:nvPr>
+        </p:nvSpPr>
+        <p:spPr/>
+        <p:txBody>
+          <a:bodyPr/>
+          <a:lstStyle/>
+          <a:p>
+            <a:r>
+              <a:rPr lang="en-US" dirty="0"/>
+              <a:t>iSCSI Architecture</a:t>
+            </a:r>
+            <a:br>
+              <a:rPr lang="en-US" dirty="0"/>
+            </a:br>
+            <a:endParaRPr lang="en-IN" dirty="0"/>
+          </a:p>
+        </p:txBody>
+      </p:sp>
+      <p:sp>
+        <p:nvSpPr>
+          <p:cNvPr id="3" name="Content Placeholder 2">
+            <a:extLst>
+              <a:ext uri="{FF2B5EF4-FFF2-40B4-BE49-F238E27FC236}">
+                <a16:creationId xmlns:a16="http://schemas.microsoft.com/office/drawing/2014/main" id="{955A8C3C-208E-40BE-83F0-111D52BC533C}"/>
+              </a:ext>
+            </a:extLst>
+          </p:cNvPr>
+          <p:cNvSpPr>
+            <a:spLocks noGrp="1"/>
+          </p:cNvSpPr>
+          <p:nvPr>
+            <p:ph idx="1"/>
+          </p:nvPr>
+        </p:nvSpPr>
+        <p:spPr>
+          <a:xfrm>
+            <a:off x="838200" y="1243173"/>
+            <a:ext cx="10515599" cy="5476126"/>
+          </a:xfrm>
+        </p:spPr>
+        <p:txBody>
+          <a:bodyPr/>
+          <a:lstStyle/>
+          <a:p>
+            <a:pPr marL="0" indent="0">
+              <a:buNone/>
+            </a:pPr>
+            <a:r>
+              <a:rPr lang="en-US" dirty="0"/>
+              <a:t>The basic iSCSI architecture contains two important endpoints:</a:t>
+            </a:r>
+          </a:p>
+          <a:p>
+            <a:pPr lvl="1"/>
+            <a:r>
+              <a:rPr lang="en-US" b="1" dirty="0"/>
+              <a:t>iSCSI Initiator</a:t>
+            </a:r>
+            <a:r>
+              <a:rPr lang="en-US" dirty="0"/>
+              <a:t> </a:t>
+            </a:r>
+          </a:p>
+          <a:p>
+            <a:pPr lvl="1"/>
+            <a:r>
+              <a:rPr lang="en-US" b="1" dirty="0"/>
+              <a:t>iSCSI Target</a:t>
+            </a:r>
+            <a:endParaRPr lang="en-US" dirty="0"/>
+          </a:p>
+          <a:p>
+            <a:endParaRPr lang="en-IN" dirty="0"/>
+          </a:p>
+        </p:txBody>
+      </p:sp>
+      <p:pic>
+        <p:nvPicPr>
+          <p:cNvPr id="4098" name="Picture 2" descr="iSCSI vs iSER vs NVMe-TCP vs NVMe-RDMA_iscsi rdma-CSDN博客">
+            <a:extLst>
+              <a:ext uri="{FF2B5EF4-FFF2-40B4-BE49-F238E27FC236}">
+                <a16:creationId xmlns:a16="http://schemas.microsoft.com/office/drawing/2014/main" id="{E36D4C20-D10A-4544-9CB4-5F599E3A44CF}"/>
+              </a:ext>
+            </a:extLst>
+          </p:cNvPr>
+          <p:cNvPicPr>
+            <a:picLocks noChangeAspect="1" noChangeArrowheads="1"/>
+          </p:cNvPicPr>
+          <p:nvPr/>
+        </p:nvPicPr>
+        <p:blipFill>
+          <a:blip r:embed="rId2">
+            <a:extLst>
+              <a:ext uri="{28A0092B-C50C-407E-A947-70E740481C1C}">
+                <a14:useLocalDpi xmlns:a14="http://schemas.microsoft.com/office/drawing/2010/main" val="0"/>
+              </a:ext>
+            </a:extLst>
+          </a:blip>
+          <a:srcRect/>
+          <a:stretch>
+            <a:fillRect/>
+          </a:stretch>
+        </p:blipFill>
+        <p:spPr bwMode="auto">
+          <a:xfrm>
+            <a:off x="5270643" y="2397887"/>
+            <a:ext cx="5560835" cy="4321412"/>
+          </a:xfrm>
+          <a:prstGeom prst="rect">
+            <a:avLst/>
+          </a:prstGeom>
+          <a:noFill/>
+          <a:extLst>
+            <a:ext uri="{909E8E84-426E-40DD-AFC4-6F175D3DCCD1}">
+              <a14:hiddenFill xmlns:a14="http://schemas.microsoft.com/office/drawing/2010/main">
+                <a:solidFill>
+                  <a:srgbClr val="FFFFFF"/>
+                </a:solidFill>
+              </a14:hiddenFill>
+            </a:ext>
+          </a:extLst>
+        </p:spPr>
+      </p:pic>
+    </p:spTree>
+    <p:extLst>
+      <p:ext uri="{BB962C8B-B14F-4D97-AF65-F5344CB8AC3E}">
+        <p14:creationId xmlns:p14="http://schemas.microsoft.com/office/powerpoint/2010/main" val="4247977852"/>
+      </p:ext>
+    </p:extLst>
+  </p:cSld>
+  <p:clrMapOvr>
+    <a:masterClrMapping/>
+  </p:clrMapOvr>
+</p:sld>
+</file>
+
 <file path=ppt/slides/slide7.xml><?xml version="1.0" encoding="utf-8"?>
 <p:sld xmlns:a="http://schemas.openxmlformats.org/drawingml/2006/main" xmlns:r="http://schemas.openxmlformats.org/officeDocument/2006/relationships" xmlns:p="http://schemas.openxmlformats.org/presentationml/2006/main">
   <p:cSld>
@@ -11070,6 +17066,1838 @@
     <p:extLst>
       <p:ext uri="{BB962C8B-B14F-4D97-AF65-F5344CB8AC3E}">
         <p14:creationId xmlns:p14="http://schemas.microsoft.com/office/powerpoint/2010/main" val="3922884909"/>
+      </p:ext>
+    </p:extLst>
+  </p:cSld>
+  <p:clrMapOvr>
+    <a:masterClrMapping/>
+  </p:clrMapOvr>
+</p:sld>
+</file>
+
+<file path=ppt/slides/slide70.xml><?xml version="1.0" encoding="utf-8"?>
+<p:sld xmlns:a="http://schemas.openxmlformats.org/drawingml/2006/main" xmlns:r="http://schemas.openxmlformats.org/officeDocument/2006/relationships" xmlns:p="http://schemas.openxmlformats.org/presentationml/2006/main">
+  <p:cSld>
+    <p:spTree>
+      <p:nvGrpSpPr>
+        <p:cNvPr id="1" name=""/>
+        <p:cNvGrpSpPr/>
+        <p:nvPr/>
+      </p:nvGrpSpPr>
+      <p:grpSpPr>
+        <a:xfrm>
+          <a:off x="0" y="0"/>
+          <a:ext cx="0" cy="0"/>
+          <a:chOff x="0" y="0"/>
+          <a:chExt cx="0" cy="0"/>
+        </a:xfrm>
+      </p:grpSpPr>
+      <p:sp>
+        <p:nvSpPr>
+          <p:cNvPr id="2" name="Title 1">
+            <a:extLst>
+              <a:ext uri="{FF2B5EF4-FFF2-40B4-BE49-F238E27FC236}">
+                <a16:creationId xmlns:a16="http://schemas.microsoft.com/office/drawing/2014/main" id="{274E48C9-4907-4F13-9004-D2DAF2A20644}"/>
+              </a:ext>
+            </a:extLst>
+          </p:cNvPr>
+          <p:cNvSpPr>
+            <a:spLocks noGrp="1"/>
+          </p:cNvSpPr>
+          <p:nvPr>
+            <p:ph type="title"/>
+          </p:nvPr>
+        </p:nvSpPr>
+        <p:spPr/>
+        <p:txBody>
+          <a:bodyPr/>
+          <a:lstStyle/>
+          <a:p>
+            <a:r>
+              <a:rPr lang="en-US" dirty="0"/>
+              <a:t>iSCSI Initiator</a:t>
+            </a:r>
+            <a:br>
+              <a:rPr lang="en-US" dirty="0"/>
+            </a:br>
+            <a:endParaRPr lang="en-IN" dirty="0"/>
+          </a:p>
+        </p:txBody>
+      </p:sp>
+      <p:sp>
+        <p:nvSpPr>
+          <p:cNvPr id="3" name="Content Placeholder 2">
+            <a:extLst>
+              <a:ext uri="{FF2B5EF4-FFF2-40B4-BE49-F238E27FC236}">
+                <a16:creationId xmlns:a16="http://schemas.microsoft.com/office/drawing/2014/main" id="{5BD6A96E-851E-444D-BDD2-7F19FD354E68}"/>
+              </a:ext>
+            </a:extLst>
+          </p:cNvPr>
+          <p:cNvSpPr>
+            <a:spLocks noGrp="1"/>
+          </p:cNvSpPr>
+          <p:nvPr>
+            <p:ph idx="1"/>
+          </p:nvPr>
+        </p:nvSpPr>
+        <p:spPr>
+          <a:xfrm>
+            <a:off x="838200" y="1299682"/>
+            <a:ext cx="10515600" cy="5444911"/>
+          </a:xfrm>
+        </p:spPr>
+        <p:txBody>
+          <a:bodyPr>
+            <a:normAutofit lnSpcReduction="10000"/>
+          </a:bodyPr>
+          <a:lstStyle/>
+          <a:p>
+            <a:pPr marL="0" indent="0">
+              <a:buNone/>
+            </a:pPr>
+            <a:r>
+              <a:rPr lang="en-US" dirty="0"/>
+              <a:t>An </a:t>
+            </a:r>
+            <a:r>
+              <a:rPr lang="en-US" b="1" dirty="0"/>
+              <a:t>iSCSI initiator</a:t>
+            </a:r>
+            <a:r>
+              <a:rPr lang="en-US" dirty="0"/>
+              <a:t> is the system or software component that starts an iSCSI communication session.</a:t>
+            </a:r>
+          </a:p>
+          <a:p>
+            <a:pPr marL="0" indent="0">
+              <a:buNone/>
+            </a:pPr>
+            <a:r>
+              <a:rPr lang="en-US" dirty="0"/>
+              <a:t>Usually, the initiator is located on the </a:t>
+            </a:r>
+            <a:r>
+              <a:rPr lang="en-US" b="1" dirty="0"/>
+              <a:t>server</a:t>
+            </a:r>
+            <a:r>
+              <a:rPr lang="en-US" dirty="0"/>
+              <a:t>.</a:t>
+            </a:r>
+          </a:p>
+          <a:p>
+            <a:pPr marL="0" indent="0">
+              <a:buNone/>
+            </a:pPr>
+            <a:r>
+              <a:rPr lang="en-US" b="1" dirty="0"/>
+              <a:t>Responsibilities</a:t>
+            </a:r>
+          </a:p>
+          <a:p>
+            <a:pPr marL="0" indent="0">
+              <a:buNone/>
+            </a:pPr>
+            <a:r>
+              <a:rPr lang="en-US" dirty="0"/>
+              <a:t>The initiator:</a:t>
+            </a:r>
+          </a:p>
+          <a:p>
+            <a:pPr lvl="1"/>
+            <a:r>
+              <a:rPr lang="en-US" dirty="0"/>
+              <a:t>Initiates communication with the target. </a:t>
+            </a:r>
+          </a:p>
+          <a:p>
+            <a:pPr lvl="1"/>
+            <a:r>
+              <a:rPr lang="en-US" dirty="0"/>
+              <a:t>Sends SCSI commands. </a:t>
+            </a:r>
+          </a:p>
+          <a:p>
+            <a:pPr lvl="1"/>
+            <a:r>
+              <a:rPr lang="en-US" dirty="0"/>
+              <a:t>Encapsulates SCSI commands into iSCSI messages. </a:t>
+            </a:r>
+          </a:p>
+          <a:p>
+            <a:pPr lvl="1"/>
+            <a:r>
+              <a:rPr lang="en-US" dirty="0"/>
+              <a:t>Sends the messages through TCP/IP. </a:t>
+            </a:r>
+          </a:p>
+          <a:p>
+            <a:pPr lvl="1"/>
+            <a:r>
+              <a:rPr lang="en-US" dirty="0"/>
+              <a:t>Receives responses from the target. </a:t>
+            </a:r>
+          </a:p>
+          <a:p>
+            <a:pPr lvl="1"/>
+            <a:r>
+              <a:rPr lang="en-US" dirty="0"/>
+              <a:t>Provides access to remote storage for the operating system. </a:t>
+            </a:r>
+          </a:p>
+          <a:p>
+            <a:pPr marL="0" indent="0">
+              <a:buNone/>
+            </a:pPr>
+            <a:r>
+              <a:rPr lang="en-US" b="1" dirty="0"/>
+              <a:t>Example</a:t>
+            </a:r>
+          </a:p>
+          <a:p>
+            <a:pPr marL="0" indent="0">
+              <a:buNone/>
+            </a:pPr>
+            <a:r>
+              <a:rPr lang="en-US" dirty="0"/>
+              <a:t>A Windows or Linux server can contain an iSCSI initiator.</a:t>
+            </a:r>
+          </a:p>
+          <a:p>
+            <a:endParaRPr lang="en-IN" dirty="0"/>
+          </a:p>
+        </p:txBody>
+      </p:sp>
+      <p:pic>
+        <p:nvPicPr>
+          <p:cNvPr id="4" name="Picture 3">
+            <a:extLst>
+              <a:ext uri="{FF2B5EF4-FFF2-40B4-BE49-F238E27FC236}">
+                <a16:creationId xmlns:a16="http://schemas.microsoft.com/office/drawing/2014/main" id="{95EE455E-B763-4E1D-AE5C-7845BBAF1E83}"/>
+              </a:ext>
+            </a:extLst>
+          </p:cNvPr>
+          <p:cNvPicPr>
+            <a:picLocks noChangeAspect="1"/>
+          </p:cNvPicPr>
+          <p:nvPr/>
+        </p:nvPicPr>
+        <p:blipFill>
+          <a:blip r:embed="rId2"/>
+          <a:stretch>
+            <a:fillRect/>
+          </a:stretch>
+        </p:blipFill>
+        <p:spPr>
+          <a:xfrm>
+            <a:off x="9421402" y="2757541"/>
+            <a:ext cx="2178122" cy="2800777"/>
+          </a:xfrm>
+          <a:prstGeom prst="rect">
+            <a:avLst/>
+          </a:prstGeom>
+        </p:spPr>
+      </p:pic>
+    </p:spTree>
+    <p:extLst>
+      <p:ext uri="{BB962C8B-B14F-4D97-AF65-F5344CB8AC3E}">
+        <p14:creationId xmlns:p14="http://schemas.microsoft.com/office/powerpoint/2010/main" val="3444189832"/>
+      </p:ext>
+    </p:extLst>
+  </p:cSld>
+  <p:clrMapOvr>
+    <a:masterClrMapping/>
+  </p:clrMapOvr>
+</p:sld>
+</file>
+
+<file path=ppt/slides/slide71.xml><?xml version="1.0" encoding="utf-8"?>
+<p:sld xmlns:a="http://schemas.openxmlformats.org/drawingml/2006/main" xmlns:r="http://schemas.openxmlformats.org/officeDocument/2006/relationships" xmlns:p="http://schemas.openxmlformats.org/presentationml/2006/main">
+  <p:cSld>
+    <p:spTree>
+      <p:nvGrpSpPr>
+        <p:cNvPr id="1" name=""/>
+        <p:cNvGrpSpPr/>
+        <p:nvPr/>
+      </p:nvGrpSpPr>
+      <p:grpSpPr>
+        <a:xfrm>
+          <a:off x="0" y="0"/>
+          <a:ext cx="0" cy="0"/>
+          <a:chOff x="0" y="0"/>
+          <a:chExt cx="0" cy="0"/>
+        </a:xfrm>
+      </p:grpSpPr>
+      <p:sp>
+        <p:nvSpPr>
+          <p:cNvPr id="2" name="Title 1">
+            <a:extLst>
+              <a:ext uri="{FF2B5EF4-FFF2-40B4-BE49-F238E27FC236}">
+                <a16:creationId xmlns:a16="http://schemas.microsoft.com/office/drawing/2014/main" id="{EDDE03FB-7D84-43F8-AA6E-8958B2C58016}"/>
+              </a:ext>
+            </a:extLst>
+          </p:cNvPr>
+          <p:cNvSpPr>
+            <a:spLocks noGrp="1"/>
+          </p:cNvSpPr>
+          <p:nvPr>
+            <p:ph type="title"/>
+          </p:nvPr>
+        </p:nvSpPr>
+        <p:spPr/>
+        <p:txBody>
+          <a:bodyPr/>
+          <a:lstStyle/>
+          <a:p>
+            <a:r>
+              <a:rPr lang="en-US" dirty="0"/>
+              <a:t>iSCSI Target</a:t>
+            </a:r>
+            <a:br>
+              <a:rPr lang="en-US" dirty="0"/>
+            </a:br>
+            <a:endParaRPr lang="en-IN" dirty="0"/>
+          </a:p>
+        </p:txBody>
+      </p:sp>
+      <p:sp>
+        <p:nvSpPr>
+          <p:cNvPr id="3" name="Content Placeholder 2">
+            <a:extLst>
+              <a:ext uri="{FF2B5EF4-FFF2-40B4-BE49-F238E27FC236}">
+                <a16:creationId xmlns:a16="http://schemas.microsoft.com/office/drawing/2014/main" id="{3F692458-4252-4A64-96E3-2070F4696930}"/>
+              </a:ext>
+            </a:extLst>
+          </p:cNvPr>
+          <p:cNvSpPr>
+            <a:spLocks noGrp="1"/>
+          </p:cNvSpPr>
+          <p:nvPr>
+            <p:ph idx="1"/>
+          </p:nvPr>
+        </p:nvSpPr>
+        <p:spPr>
+          <a:xfrm>
+            <a:off x="838200" y="1407560"/>
+            <a:ext cx="10515600" cy="4769403"/>
+          </a:xfrm>
+        </p:spPr>
+        <p:txBody>
+          <a:bodyPr>
+            <a:normAutofit/>
+          </a:bodyPr>
+          <a:lstStyle/>
+          <a:p>
+            <a:pPr marL="0" indent="0">
+              <a:buNone/>
+            </a:pPr>
+            <a:r>
+              <a:rPr lang="en-US" dirty="0"/>
+              <a:t>An </a:t>
+            </a:r>
+            <a:r>
+              <a:rPr lang="en-US" b="1" dirty="0"/>
+              <a:t>iSCSI target</a:t>
+            </a:r>
+            <a:r>
+              <a:rPr lang="en-US" dirty="0"/>
+              <a:t> is the storage-side endpoint that receives requests from the initiator.</a:t>
+            </a:r>
+          </a:p>
+          <a:p>
+            <a:pPr marL="0" indent="0">
+              <a:buNone/>
+            </a:pPr>
+            <a:r>
+              <a:rPr lang="en-US" dirty="0"/>
+              <a:t>It is normally implemented in:</a:t>
+            </a:r>
+          </a:p>
+          <a:p>
+            <a:pPr lvl="1"/>
+            <a:r>
+              <a:rPr lang="en-US" dirty="0"/>
+              <a:t>Storage arrays </a:t>
+            </a:r>
+          </a:p>
+          <a:p>
+            <a:pPr lvl="1"/>
+            <a:r>
+              <a:rPr lang="en-US" dirty="0"/>
+              <a:t>NAS appliances with iSCSI support </a:t>
+            </a:r>
+          </a:p>
+          <a:p>
+            <a:pPr lvl="1"/>
+            <a:r>
+              <a:rPr lang="en-US" dirty="0"/>
+              <a:t>Dedicated storage servers </a:t>
+            </a:r>
+          </a:p>
+          <a:p>
+            <a:pPr lvl="1"/>
+            <a:r>
+              <a:rPr lang="en-US" dirty="0"/>
+              <a:t>Virtualization platforms </a:t>
+            </a:r>
+          </a:p>
+          <a:p>
+            <a:pPr lvl="1"/>
+            <a:r>
+              <a:rPr lang="en-US" dirty="0"/>
+              <a:t>Linux/Windows storage servers </a:t>
+            </a:r>
+          </a:p>
+          <a:p>
+            <a:pPr marL="0" indent="0">
+              <a:buNone/>
+            </a:pPr>
+            <a:r>
+              <a:rPr lang="en-US" dirty="0"/>
+              <a:t>The target provides storage resources to initiators.</a:t>
+            </a:r>
+          </a:p>
+          <a:p>
+            <a:pPr marL="0" indent="0">
+              <a:buNone/>
+            </a:pPr>
+            <a:endParaRPr lang="en-IN" dirty="0"/>
+          </a:p>
+        </p:txBody>
+      </p:sp>
+    </p:spTree>
+    <p:extLst>
+      <p:ext uri="{BB962C8B-B14F-4D97-AF65-F5344CB8AC3E}">
+        <p14:creationId xmlns:p14="http://schemas.microsoft.com/office/powerpoint/2010/main" val="3515127684"/>
+      </p:ext>
+    </p:extLst>
+  </p:cSld>
+  <p:clrMapOvr>
+    <a:masterClrMapping/>
+  </p:clrMapOvr>
+</p:sld>
+</file>
+
+<file path=ppt/slides/slide72.xml><?xml version="1.0" encoding="utf-8"?>
+<p:sld xmlns:a="http://schemas.openxmlformats.org/drawingml/2006/main" xmlns:r="http://schemas.openxmlformats.org/officeDocument/2006/relationships" xmlns:p="http://schemas.openxmlformats.org/presentationml/2006/main">
+  <p:cSld>
+    <p:spTree>
+      <p:nvGrpSpPr>
+        <p:cNvPr id="1" name=""/>
+        <p:cNvGrpSpPr/>
+        <p:nvPr/>
+      </p:nvGrpSpPr>
+      <p:grpSpPr>
+        <a:xfrm>
+          <a:off x="0" y="0"/>
+          <a:ext cx="0" cy="0"/>
+          <a:chOff x="0" y="0"/>
+          <a:chExt cx="0" cy="0"/>
+        </a:xfrm>
+      </p:grpSpPr>
+      <p:sp>
+        <p:nvSpPr>
+          <p:cNvPr id="2" name="Title 1">
+            <a:extLst>
+              <a:ext uri="{FF2B5EF4-FFF2-40B4-BE49-F238E27FC236}">
+                <a16:creationId xmlns:a16="http://schemas.microsoft.com/office/drawing/2014/main" id="{CC1F87A1-A761-4AA6-B4BB-0126D9EE7E1C}"/>
+              </a:ext>
+            </a:extLst>
+          </p:cNvPr>
+          <p:cNvSpPr>
+            <a:spLocks noGrp="1"/>
+          </p:cNvSpPr>
+          <p:nvPr>
+            <p:ph type="title"/>
+          </p:nvPr>
+        </p:nvSpPr>
+        <p:spPr/>
+        <p:txBody>
+          <a:bodyPr/>
+          <a:lstStyle/>
+          <a:p>
+            <a:r>
+              <a:rPr lang="en-US" dirty="0"/>
+              <a:t>LUN — Logical Unit Number</a:t>
+            </a:r>
+            <a:br>
+              <a:rPr lang="en-US" dirty="0"/>
+            </a:br>
+            <a:endParaRPr lang="en-IN" dirty="0"/>
+          </a:p>
+        </p:txBody>
+      </p:sp>
+      <p:sp>
+        <p:nvSpPr>
+          <p:cNvPr id="3" name="Content Placeholder 2">
+            <a:extLst>
+              <a:ext uri="{FF2B5EF4-FFF2-40B4-BE49-F238E27FC236}">
+                <a16:creationId xmlns:a16="http://schemas.microsoft.com/office/drawing/2014/main" id="{7C7FAF7D-0562-4CBF-9849-8478CE26D93A}"/>
+              </a:ext>
+            </a:extLst>
+          </p:cNvPr>
+          <p:cNvSpPr>
+            <a:spLocks noGrp="1"/>
+          </p:cNvSpPr>
+          <p:nvPr>
+            <p:ph idx="1"/>
+          </p:nvPr>
+        </p:nvSpPr>
+        <p:spPr>
+          <a:xfrm>
+            <a:off x="838200" y="1263721"/>
+            <a:ext cx="10515600" cy="5229154"/>
+          </a:xfrm>
+        </p:spPr>
+        <p:txBody>
+          <a:bodyPr>
+            <a:normAutofit fontScale="92500" lnSpcReduction="10000"/>
+          </a:bodyPr>
+          <a:lstStyle/>
+          <a:p>
+            <a:pPr marL="0" indent="0">
+              <a:buNone/>
+            </a:pPr>
+            <a:r>
+              <a:rPr lang="en-US" dirty="0"/>
+              <a:t>A </a:t>
+            </a:r>
+            <a:r>
+              <a:rPr lang="en-US" b="1" dirty="0"/>
+              <a:t>LUN (Logical Unit Number)</a:t>
+            </a:r>
+            <a:r>
+              <a:rPr lang="en-US" dirty="0"/>
+              <a:t> identifies a logical storage unit presented by an iSCSI target.</a:t>
+            </a:r>
+          </a:p>
+          <a:p>
+            <a:pPr marL="0" indent="0">
+              <a:buNone/>
+            </a:pPr>
+            <a:r>
+              <a:rPr lang="en-US" dirty="0"/>
+              <a:t>For example:</a:t>
+            </a:r>
+          </a:p>
+          <a:p>
+            <a:pPr marL="0" indent="0">
+              <a:buNone/>
+            </a:pPr>
+            <a:endParaRPr lang="en-US" dirty="0"/>
+          </a:p>
+          <a:p>
+            <a:pPr marL="0" indent="0">
+              <a:buNone/>
+            </a:pPr>
+            <a:endParaRPr lang="en-US" dirty="0"/>
+          </a:p>
+          <a:p>
+            <a:pPr marL="0" indent="0">
+              <a:buNone/>
+            </a:pPr>
+            <a:endParaRPr lang="en-US" dirty="0"/>
+          </a:p>
+          <a:p>
+            <a:pPr marL="0" indent="0">
+              <a:buNone/>
+            </a:pPr>
+            <a:endParaRPr lang="en-US" dirty="0"/>
+          </a:p>
+          <a:p>
+            <a:pPr marL="0" indent="0">
+              <a:buNone/>
+            </a:pPr>
+            <a:endParaRPr lang="en-US" dirty="0"/>
+          </a:p>
+          <a:p>
+            <a:pPr marL="0" indent="0">
+              <a:buNone/>
+            </a:pPr>
+            <a:r>
+              <a:rPr lang="en-US" dirty="0"/>
+              <a:t>A server may connect to a target and discover one or more LUNs.</a:t>
+            </a:r>
+          </a:p>
+          <a:p>
+            <a:pPr marL="0" indent="0">
+              <a:buNone/>
+            </a:pPr>
+            <a:r>
+              <a:rPr lang="en-US" dirty="0"/>
+              <a:t>The operating system can then recognize the LUN as a disk.</a:t>
+            </a:r>
+          </a:p>
+          <a:p>
+            <a:pPr marL="457200" lvl="1" indent="0">
+              <a:buNone/>
+            </a:pPr>
+            <a:r>
+              <a:rPr lang="en-US" b="1" dirty="0"/>
+              <a:t>Important distinction</a:t>
+            </a:r>
+          </a:p>
+          <a:p>
+            <a:pPr marL="457200" lvl="1" indent="0">
+              <a:buNone/>
+            </a:pPr>
+            <a:r>
+              <a:rPr lang="en-US" b="1" dirty="0"/>
+              <a:t>Target = storage endpoint</a:t>
+            </a:r>
+          </a:p>
+          <a:p>
+            <a:pPr marL="457200" lvl="1" indent="0">
+              <a:buNone/>
+            </a:pPr>
+            <a:r>
+              <a:rPr lang="en-US" b="1" dirty="0"/>
+              <a:t>LUN = storage resource presented by the target</a:t>
+            </a:r>
+            <a:endParaRPr lang="en-US" dirty="0"/>
+          </a:p>
+          <a:p>
+            <a:pPr marL="0" indent="0">
+              <a:buNone/>
+            </a:pPr>
+            <a:endParaRPr lang="en-US" dirty="0"/>
+          </a:p>
+          <a:p>
+            <a:pPr marL="0" indent="0">
+              <a:buNone/>
+            </a:pPr>
+            <a:endParaRPr lang="en-US" dirty="0"/>
+          </a:p>
+          <a:p>
+            <a:endParaRPr lang="en-IN" dirty="0"/>
+          </a:p>
+        </p:txBody>
+      </p:sp>
+      <p:pic>
+        <p:nvPicPr>
+          <p:cNvPr id="4" name="Picture 3">
+            <a:extLst>
+              <a:ext uri="{FF2B5EF4-FFF2-40B4-BE49-F238E27FC236}">
+                <a16:creationId xmlns:a16="http://schemas.microsoft.com/office/drawing/2014/main" id="{6700BEB0-EDF0-4D2F-BFF1-B12592A1A754}"/>
+              </a:ext>
+            </a:extLst>
+          </p:cNvPr>
+          <p:cNvPicPr>
+            <a:picLocks noChangeAspect="1"/>
+          </p:cNvPicPr>
+          <p:nvPr/>
+        </p:nvPicPr>
+        <p:blipFill>
+          <a:blip r:embed="rId2"/>
+          <a:stretch>
+            <a:fillRect/>
+          </a:stretch>
+        </p:blipFill>
+        <p:spPr>
+          <a:xfrm>
+            <a:off x="2801485" y="1993419"/>
+            <a:ext cx="2130111" cy="1884879"/>
+          </a:xfrm>
+          <a:prstGeom prst="rect">
+            <a:avLst/>
+          </a:prstGeom>
+        </p:spPr>
+      </p:pic>
+    </p:spTree>
+    <p:extLst>
+      <p:ext uri="{BB962C8B-B14F-4D97-AF65-F5344CB8AC3E}">
+        <p14:creationId xmlns:p14="http://schemas.microsoft.com/office/powerpoint/2010/main" val="2035584550"/>
+      </p:ext>
+    </p:extLst>
+  </p:cSld>
+  <p:clrMapOvr>
+    <a:masterClrMapping/>
+  </p:clrMapOvr>
+</p:sld>
+</file>
+
+<file path=ppt/slides/slide73.xml><?xml version="1.0" encoding="utf-8"?>
+<p:sld xmlns:a="http://schemas.openxmlformats.org/drawingml/2006/main" xmlns:r="http://schemas.openxmlformats.org/officeDocument/2006/relationships" xmlns:p="http://schemas.openxmlformats.org/presentationml/2006/main">
+  <p:cSld>
+    <p:spTree>
+      <p:nvGrpSpPr>
+        <p:cNvPr id="1" name=""/>
+        <p:cNvGrpSpPr/>
+        <p:nvPr/>
+      </p:nvGrpSpPr>
+      <p:grpSpPr>
+        <a:xfrm>
+          <a:off x="0" y="0"/>
+          <a:ext cx="0" cy="0"/>
+          <a:chOff x="0" y="0"/>
+          <a:chExt cx="0" cy="0"/>
+        </a:xfrm>
+      </p:grpSpPr>
+      <p:sp>
+        <p:nvSpPr>
+          <p:cNvPr id="2" name="Title 1">
+            <a:extLst>
+              <a:ext uri="{FF2B5EF4-FFF2-40B4-BE49-F238E27FC236}">
+                <a16:creationId xmlns:a16="http://schemas.microsoft.com/office/drawing/2014/main" id="{EFB14DF1-7747-4699-B8C5-215C149DA8F3}"/>
+              </a:ext>
+            </a:extLst>
+          </p:cNvPr>
+          <p:cNvSpPr>
+            <a:spLocks noGrp="1"/>
+          </p:cNvSpPr>
+          <p:nvPr>
+            <p:ph type="title"/>
+          </p:nvPr>
+        </p:nvSpPr>
+        <p:spPr/>
+        <p:txBody>
+          <a:bodyPr/>
+          <a:lstStyle/>
+          <a:p>
+            <a:r>
+              <a:rPr lang="en-US" dirty="0"/>
+              <a:t>iSCSI Network Components and Connectivity</a:t>
+            </a:r>
+            <a:endParaRPr lang="en-IN" dirty="0"/>
+          </a:p>
+        </p:txBody>
+      </p:sp>
+      <p:sp>
+        <p:nvSpPr>
+          <p:cNvPr id="3" name="Content Placeholder 2">
+            <a:extLst>
+              <a:ext uri="{FF2B5EF4-FFF2-40B4-BE49-F238E27FC236}">
+                <a16:creationId xmlns:a16="http://schemas.microsoft.com/office/drawing/2014/main" id="{B73510D2-E4FD-433A-888F-0561C3174EF6}"/>
+              </a:ext>
+            </a:extLst>
+          </p:cNvPr>
+          <p:cNvSpPr>
+            <a:spLocks noGrp="1"/>
+          </p:cNvSpPr>
+          <p:nvPr>
+            <p:ph idx="1"/>
+          </p:nvPr>
+        </p:nvSpPr>
+        <p:spPr/>
+        <p:txBody>
+          <a:bodyPr/>
+          <a:lstStyle/>
+          <a:p>
+            <a:pPr marL="0" indent="0">
+              <a:buNone/>
+            </a:pPr>
+            <a:r>
+              <a:rPr lang="en-US" b="1" dirty="0"/>
+              <a:t>1. Introduction</a:t>
+            </a:r>
+          </a:p>
+          <a:p>
+            <a:pPr marL="0" indent="0">
+              <a:buNone/>
+            </a:pPr>
+            <a:r>
+              <a:rPr lang="en-US" b="1" dirty="0"/>
+              <a:t>iSCSI (Internet Small Computer Systems Interface)</a:t>
+            </a:r>
+            <a:r>
+              <a:rPr lang="en-US" dirty="0"/>
+              <a:t> allows a server to access storage through a normal </a:t>
+            </a:r>
+            <a:r>
+              <a:rPr lang="en-US" b="1" dirty="0"/>
+              <a:t>IP/Ethernet network</a:t>
+            </a:r>
+            <a:r>
+              <a:rPr lang="en-US" dirty="0"/>
+              <a:t>.</a:t>
+            </a:r>
+          </a:p>
+          <a:p>
+            <a:pPr marL="0" indent="0">
+              <a:buNone/>
+            </a:pPr>
+            <a:r>
+              <a:rPr lang="en-US" dirty="0"/>
+              <a:t>In simple words:</a:t>
+            </a:r>
+          </a:p>
+          <a:p>
+            <a:pPr marL="0" indent="0">
+              <a:buNone/>
+            </a:pPr>
+            <a:r>
+              <a:rPr lang="en-US" dirty="0"/>
+              <a:t>iSCSI connects a server to remote storage using an Ethernet network.</a:t>
+            </a:r>
+          </a:p>
+          <a:p>
+            <a:pPr marL="0" indent="0">
+              <a:buNone/>
+            </a:pPr>
+            <a:r>
+              <a:rPr lang="en-US" dirty="0"/>
+              <a:t>A basic iSCSI connection looks like this:</a:t>
+            </a:r>
+          </a:p>
+          <a:p>
+            <a:endParaRPr lang="en-IN" dirty="0"/>
+          </a:p>
+        </p:txBody>
+      </p:sp>
+      <p:pic>
+        <p:nvPicPr>
+          <p:cNvPr id="4" name="Picture 3">
+            <a:extLst>
+              <a:ext uri="{FF2B5EF4-FFF2-40B4-BE49-F238E27FC236}">
+                <a16:creationId xmlns:a16="http://schemas.microsoft.com/office/drawing/2014/main" id="{E59EAE2E-495E-4191-96C1-5E81B08EAF38}"/>
+              </a:ext>
+            </a:extLst>
+          </p:cNvPr>
+          <p:cNvPicPr>
+            <a:picLocks noChangeAspect="1"/>
+          </p:cNvPicPr>
+          <p:nvPr/>
+        </p:nvPicPr>
+        <p:blipFill>
+          <a:blip r:embed="rId2"/>
+          <a:stretch>
+            <a:fillRect/>
+          </a:stretch>
+        </p:blipFill>
+        <p:spPr>
+          <a:xfrm>
+            <a:off x="3030876" y="4602821"/>
+            <a:ext cx="5424755" cy="1890053"/>
+          </a:xfrm>
+          <a:prstGeom prst="rect">
+            <a:avLst/>
+          </a:prstGeom>
+        </p:spPr>
+      </p:pic>
+    </p:spTree>
+    <p:extLst>
+      <p:ext uri="{BB962C8B-B14F-4D97-AF65-F5344CB8AC3E}">
+        <p14:creationId xmlns:p14="http://schemas.microsoft.com/office/powerpoint/2010/main" val="2495877181"/>
+      </p:ext>
+    </p:extLst>
+  </p:cSld>
+  <p:clrMapOvr>
+    <a:masterClrMapping/>
+  </p:clrMapOvr>
+</p:sld>
+</file>
+
+<file path=ppt/slides/slide74.xml><?xml version="1.0" encoding="utf-8"?>
+<p:sld xmlns:a="http://schemas.openxmlformats.org/drawingml/2006/main" xmlns:r="http://schemas.openxmlformats.org/officeDocument/2006/relationships" xmlns:p="http://schemas.openxmlformats.org/presentationml/2006/main">
+  <p:cSld>
+    <p:spTree>
+      <p:nvGrpSpPr>
+        <p:cNvPr id="1" name=""/>
+        <p:cNvGrpSpPr/>
+        <p:nvPr/>
+      </p:nvGrpSpPr>
+      <p:grpSpPr>
+        <a:xfrm>
+          <a:off x="0" y="0"/>
+          <a:ext cx="0" cy="0"/>
+          <a:chOff x="0" y="0"/>
+          <a:chExt cx="0" cy="0"/>
+        </a:xfrm>
+      </p:grpSpPr>
+      <p:sp>
+        <p:nvSpPr>
+          <p:cNvPr id="2" name="Title 1">
+            <a:extLst>
+              <a:ext uri="{FF2B5EF4-FFF2-40B4-BE49-F238E27FC236}">
+                <a16:creationId xmlns:a16="http://schemas.microsoft.com/office/drawing/2014/main" id="{682E424A-714F-4655-9501-EF0B3CF9CAE1}"/>
+              </a:ext>
+            </a:extLst>
+          </p:cNvPr>
+          <p:cNvSpPr>
+            <a:spLocks noGrp="1"/>
+          </p:cNvSpPr>
+          <p:nvPr>
+            <p:ph type="title"/>
+          </p:nvPr>
+        </p:nvSpPr>
+        <p:spPr/>
+        <p:txBody>
+          <a:bodyPr/>
+          <a:lstStyle/>
+          <a:p>
+            <a:r>
+              <a:rPr lang="en-IN" dirty="0"/>
+              <a:t>2. Main Network Components of iSCSI</a:t>
+            </a:r>
+            <a:br>
+              <a:rPr lang="en-IN" dirty="0"/>
+            </a:br>
+            <a:endParaRPr lang="en-IN" dirty="0"/>
+          </a:p>
+        </p:txBody>
+      </p:sp>
+      <p:sp>
+        <p:nvSpPr>
+          <p:cNvPr id="3" name="Content Placeholder 2">
+            <a:extLst>
+              <a:ext uri="{FF2B5EF4-FFF2-40B4-BE49-F238E27FC236}">
+                <a16:creationId xmlns:a16="http://schemas.microsoft.com/office/drawing/2014/main" id="{0988D85B-640B-4CFC-8998-7212A5A5CE69}"/>
+              </a:ext>
+            </a:extLst>
+          </p:cNvPr>
+          <p:cNvSpPr>
+            <a:spLocks noGrp="1"/>
+          </p:cNvSpPr>
+          <p:nvPr>
+            <p:ph idx="1"/>
+          </p:nvPr>
+        </p:nvSpPr>
+        <p:spPr/>
+        <p:txBody>
+          <a:bodyPr>
+            <a:normAutofit/>
+          </a:bodyPr>
+          <a:lstStyle/>
+          <a:p>
+            <a:pPr marL="0" indent="0">
+              <a:buNone/>
+            </a:pPr>
+            <a:r>
+              <a:rPr lang="en-IN" dirty="0"/>
+              <a:t>The important components are:</a:t>
+            </a:r>
+          </a:p>
+          <a:p>
+            <a:pPr marL="0" indent="0">
+              <a:buNone/>
+            </a:pPr>
+            <a:endParaRPr lang="en-IN" dirty="0"/>
+          </a:p>
+          <a:p>
+            <a:pPr marL="914400" lvl="1" indent="-457200">
+              <a:buFont typeface="+mj-lt"/>
+              <a:buAutoNum type="arabicPeriod"/>
+            </a:pPr>
+            <a:r>
+              <a:rPr lang="en-IN" b="1" dirty="0"/>
+              <a:t>iSCSI Initiator</a:t>
+            </a:r>
+            <a:r>
+              <a:rPr lang="en-IN" dirty="0"/>
+              <a:t> </a:t>
+            </a:r>
+          </a:p>
+          <a:p>
+            <a:pPr marL="914400" lvl="1" indent="-457200">
+              <a:buFont typeface="+mj-lt"/>
+              <a:buAutoNum type="arabicPeriod"/>
+            </a:pPr>
+            <a:r>
+              <a:rPr lang="en-IN" b="1" dirty="0"/>
+              <a:t>iSCSI Target</a:t>
+            </a:r>
+            <a:r>
+              <a:rPr lang="en-IN" dirty="0"/>
+              <a:t> </a:t>
+            </a:r>
+          </a:p>
+          <a:p>
+            <a:pPr marL="914400" lvl="1" indent="-457200">
+              <a:buFont typeface="+mj-lt"/>
+              <a:buAutoNum type="arabicPeriod"/>
+            </a:pPr>
+            <a:r>
+              <a:rPr lang="en-IN" b="1" dirty="0"/>
+              <a:t>Network Interface Card (NIC)</a:t>
+            </a:r>
+            <a:r>
+              <a:rPr lang="en-IN" dirty="0"/>
+              <a:t> </a:t>
+            </a:r>
+          </a:p>
+          <a:p>
+            <a:pPr marL="914400" lvl="1" indent="-457200">
+              <a:buFont typeface="+mj-lt"/>
+              <a:buAutoNum type="arabicPeriod"/>
+            </a:pPr>
+            <a:r>
+              <a:rPr lang="en-IN" b="1" dirty="0"/>
+              <a:t>Ethernet Switch</a:t>
+            </a:r>
+            <a:r>
+              <a:rPr lang="en-IN" dirty="0"/>
+              <a:t> </a:t>
+            </a:r>
+          </a:p>
+          <a:p>
+            <a:pPr marL="914400" lvl="1" indent="-457200">
+              <a:buFont typeface="+mj-lt"/>
+              <a:buAutoNum type="arabicPeriod"/>
+            </a:pPr>
+            <a:r>
+              <a:rPr lang="en-IN" b="1" dirty="0"/>
+              <a:t>IP Network</a:t>
+            </a:r>
+            <a:r>
+              <a:rPr lang="en-IN" dirty="0"/>
+              <a:t> </a:t>
+            </a:r>
+          </a:p>
+          <a:p>
+            <a:pPr marL="914400" lvl="1" indent="-457200">
+              <a:buFont typeface="+mj-lt"/>
+              <a:buAutoNum type="arabicPeriod"/>
+            </a:pPr>
+            <a:r>
+              <a:rPr lang="en-IN" b="1" dirty="0"/>
+              <a:t>Storage System</a:t>
+            </a:r>
+            <a:r>
+              <a:rPr lang="en-IN" dirty="0"/>
+              <a:t> </a:t>
+            </a:r>
+          </a:p>
+          <a:p>
+            <a:pPr marL="914400" lvl="1" indent="-457200">
+              <a:buFont typeface="+mj-lt"/>
+              <a:buAutoNum type="arabicPeriod"/>
+            </a:pPr>
+            <a:r>
+              <a:rPr lang="en-IN" b="1" dirty="0"/>
+              <a:t>LUN</a:t>
+            </a:r>
+            <a:r>
+              <a:rPr lang="en-IN" dirty="0"/>
+              <a:t> </a:t>
+            </a:r>
+          </a:p>
+          <a:p>
+            <a:pPr marL="914400" lvl="1" indent="-457200">
+              <a:buFont typeface="+mj-lt"/>
+              <a:buAutoNum type="arabicPeriod"/>
+            </a:pPr>
+            <a:r>
+              <a:rPr lang="en-IN" b="1" dirty="0"/>
+              <a:t>Cables</a:t>
+            </a:r>
+            <a:endParaRPr lang="en-IN" dirty="0"/>
+          </a:p>
+          <a:p>
+            <a:endParaRPr lang="en-IN" dirty="0"/>
+          </a:p>
+        </p:txBody>
+      </p:sp>
+    </p:spTree>
+    <p:extLst>
+      <p:ext uri="{BB962C8B-B14F-4D97-AF65-F5344CB8AC3E}">
+        <p14:creationId xmlns:p14="http://schemas.microsoft.com/office/powerpoint/2010/main" val="2283254117"/>
+      </p:ext>
+    </p:extLst>
+  </p:cSld>
+  <p:clrMapOvr>
+    <a:masterClrMapping/>
+  </p:clrMapOvr>
+</p:sld>
+</file>
+
+<file path=ppt/slides/slide75.xml><?xml version="1.0" encoding="utf-8"?>
+<p:sld xmlns:a="http://schemas.openxmlformats.org/drawingml/2006/main" xmlns:r="http://schemas.openxmlformats.org/officeDocument/2006/relationships" xmlns:p="http://schemas.openxmlformats.org/presentationml/2006/main">
+  <p:cSld>
+    <p:spTree>
+      <p:nvGrpSpPr>
+        <p:cNvPr id="1" name=""/>
+        <p:cNvGrpSpPr/>
+        <p:nvPr/>
+      </p:nvGrpSpPr>
+      <p:grpSpPr>
+        <a:xfrm>
+          <a:off x="0" y="0"/>
+          <a:ext cx="0" cy="0"/>
+          <a:chOff x="0" y="0"/>
+          <a:chExt cx="0" cy="0"/>
+        </a:xfrm>
+      </p:grpSpPr>
+      <p:sp>
+        <p:nvSpPr>
+          <p:cNvPr id="2" name="Title 1">
+            <a:extLst>
+              <a:ext uri="{FF2B5EF4-FFF2-40B4-BE49-F238E27FC236}">
+                <a16:creationId xmlns:a16="http://schemas.microsoft.com/office/drawing/2014/main" id="{2E242FF2-606B-4429-95AA-7F0DB6AA4F1A}"/>
+              </a:ext>
+            </a:extLst>
+          </p:cNvPr>
+          <p:cNvSpPr>
+            <a:spLocks noGrp="1"/>
+          </p:cNvSpPr>
+          <p:nvPr>
+            <p:ph type="title"/>
+          </p:nvPr>
+        </p:nvSpPr>
+        <p:spPr/>
+        <p:txBody>
+          <a:bodyPr>
+            <a:normAutofit fontScale="90000"/>
+          </a:bodyPr>
+          <a:lstStyle/>
+          <a:p>
+            <a:r>
+              <a:rPr lang="en-US" dirty="0"/>
+              <a:t>3. iSCSI Initiator</a:t>
+            </a:r>
+            <a:br>
+              <a:rPr lang="en-US" dirty="0"/>
+            </a:br>
+            <a:br>
+              <a:rPr lang="en-US" dirty="0"/>
+            </a:br>
+            <a:endParaRPr lang="en-IN" dirty="0"/>
+          </a:p>
+        </p:txBody>
+      </p:sp>
+      <p:sp>
+        <p:nvSpPr>
+          <p:cNvPr id="3" name="Content Placeholder 2">
+            <a:extLst>
+              <a:ext uri="{FF2B5EF4-FFF2-40B4-BE49-F238E27FC236}">
+                <a16:creationId xmlns:a16="http://schemas.microsoft.com/office/drawing/2014/main" id="{00A8C43F-7107-41FE-8826-33DA31D41021}"/>
+              </a:ext>
+            </a:extLst>
+          </p:cNvPr>
+          <p:cNvSpPr>
+            <a:spLocks noGrp="1"/>
+          </p:cNvSpPr>
+          <p:nvPr>
+            <p:ph idx="1"/>
+          </p:nvPr>
+        </p:nvSpPr>
+        <p:spPr>
+          <a:xfrm>
+            <a:off x="838200" y="1253330"/>
+            <a:ext cx="10515600" cy="4767325"/>
+          </a:xfrm>
+        </p:spPr>
+        <p:txBody>
+          <a:bodyPr>
+            <a:normAutofit/>
+          </a:bodyPr>
+          <a:lstStyle/>
+          <a:p>
+            <a:pPr marL="0" indent="0">
+              <a:buNone/>
+            </a:pPr>
+            <a:r>
+              <a:rPr lang="en-US" dirty="0"/>
+              <a:t>The initiator is the component that requests or accesses storage.</a:t>
+            </a:r>
+            <a:br>
+              <a:rPr lang="en-US" dirty="0"/>
+            </a:br>
+            <a:r>
+              <a:rPr lang="en-US" dirty="0"/>
+              <a:t>It is normally present on the server.</a:t>
+            </a:r>
+          </a:p>
+          <a:p>
+            <a:pPr marL="0" indent="0">
+              <a:buNone/>
+            </a:pPr>
+            <a:r>
+              <a:rPr lang="en-US" dirty="0"/>
+              <a:t>The initiator sends storage requests to the iSCSI target.</a:t>
+            </a:r>
+          </a:p>
+          <a:p>
+            <a:pPr marL="0" indent="0">
+              <a:buNone/>
+            </a:pPr>
+            <a:r>
+              <a:rPr lang="en-US" b="1" dirty="0"/>
+              <a:t>Functions</a:t>
+            </a:r>
+          </a:p>
+          <a:p>
+            <a:pPr lvl="1"/>
+            <a:r>
+              <a:rPr lang="en-US" dirty="0"/>
+              <a:t>Starts communication with the target. </a:t>
+            </a:r>
+          </a:p>
+          <a:p>
+            <a:pPr lvl="1"/>
+            <a:r>
+              <a:rPr lang="en-US" dirty="0"/>
+              <a:t>Sends SCSI commands. </a:t>
+            </a:r>
+          </a:p>
+          <a:p>
+            <a:pPr lvl="1"/>
+            <a:r>
+              <a:rPr lang="en-US" dirty="0"/>
+              <a:t>Receives data from storage. </a:t>
+            </a:r>
+          </a:p>
+          <a:p>
+            <a:pPr lvl="1"/>
+            <a:r>
+              <a:rPr lang="en-US" dirty="0"/>
+              <a:t>Provides access to remote LUNs.</a:t>
+            </a:r>
+          </a:p>
+          <a:p>
+            <a:r>
+              <a:rPr lang="en-IN" b="1" dirty="0"/>
+              <a:t>Easy way to remember</a:t>
+            </a:r>
+          </a:p>
+          <a:p>
+            <a:r>
+              <a:rPr lang="en-IN" dirty="0"/>
+              <a:t>Initiator = Server side = Requests storage</a:t>
+            </a:r>
+            <a:endParaRPr lang="en-US" dirty="0"/>
+          </a:p>
+          <a:p>
+            <a:endParaRPr lang="en-IN" dirty="0"/>
+          </a:p>
+        </p:txBody>
+      </p:sp>
+    </p:spTree>
+    <p:extLst>
+      <p:ext uri="{BB962C8B-B14F-4D97-AF65-F5344CB8AC3E}">
+        <p14:creationId xmlns:p14="http://schemas.microsoft.com/office/powerpoint/2010/main" val="3672664977"/>
+      </p:ext>
+    </p:extLst>
+  </p:cSld>
+  <p:clrMapOvr>
+    <a:masterClrMapping/>
+  </p:clrMapOvr>
+</p:sld>
+</file>
+
+<file path=ppt/slides/slide76.xml><?xml version="1.0" encoding="utf-8"?>
+<p:sld xmlns:a="http://schemas.openxmlformats.org/drawingml/2006/main" xmlns:r="http://schemas.openxmlformats.org/officeDocument/2006/relationships" xmlns:p="http://schemas.openxmlformats.org/presentationml/2006/main">
+  <p:cSld>
+    <p:spTree>
+      <p:nvGrpSpPr>
+        <p:cNvPr id="1" name=""/>
+        <p:cNvGrpSpPr/>
+        <p:nvPr/>
+      </p:nvGrpSpPr>
+      <p:grpSpPr>
+        <a:xfrm>
+          <a:off x="0" y="0"/>
+          <a:ext cx="0" cy="0"/>
+          <a:chOff x="0" y="0"/>
+          <a:chExt cx="0" cy="0"/>
+        </a:xfrm>
+      </p:grpSpPr>
+      <p:sp>
+        <p:nvSpPr>
+          <p:cNvPr id="2" name="Title 1">
+            <a:extLst>
+              <a:ext uri="{FF2B5EF4-FFF2-40B4-BE49-F238E27FC236}">
+                <a16:creationId xmlns:a16="http://schemas.microsoft.com/office/drawing/2014/main" id="{B3E21487-8478-4461-A27A-FE6776EF17C8}"/>
+              </a:ext>
+            </a:extLst>
+          </p:cNvPr>
+          <p:cNvSpPr>
+            <a:spLocks noGrp="1"/>
+          </p:cNvSpPr>
+          <p:nvPr>
+            <p:ph type="title"/>
+          </p:nvPr>
+        </p:nvSpPr>
+        <p:spPr/>
+        <p:txBody>
+          <a:bodyPr/>
+          <a:lstStyle/>
+          <a:p>
+            <a:r>
+              <a:rPr lang="en-US" dirty="0"/>
+              <a:t>4. iSCSI Target</a:t>
+            </a:r>
+            <a:br>
+              <a:rPr lang="en-US" dirty="0"/>
+            </a:br>
+            <a:endParaRPr lang="en-IN" dirty="0"/>
+          </a:p>
+        </p:txBody>
+      </p:sp>
+      <p:sp>
+        <p:nvSpPr>
+          <p:cNvPr id="3" name="Content Placeholder 2">
+            <a:extLst>
+              <a:ext uri="{FF2B5EF4-FFF2-40B4-BE49-F238E27FC236}">
+                <a16:creationId xmlns:a16="http://schemas.microsoft.com/office/drawing/2014/main" id="{90850A5C-8467-4BCB-82D7-874C8EC61ED6}"/>
+              </a:ext>
+            </a:extLst>
+          </p:cNvPr>
+          <p:cNvSpPr>
+            <a:spLocks noGrp="1"/>
+          </p:cNvSpPr>
+          <p:nvPr>
+            <p:ph idx="1"/>
+          </p:nvPr>
+        </p:nvSpPr>
+        <p:spPr/>
+        <p:txBody>
+          <a:bodyPr/>
+          <a:lstStyle/>
+          <a:p>
+            <a:r>
+              <a:rPr lang="en-US" dirty="0"/>
+              <a:t>The </a:t>
+            </a:r>
+            <a:r>
+              <a:rPr lang="en-US" b="1" dirty="0"/>
+              <a:t>target</a:t>
+            </a:r>
+            <a:r>
+              <a:rPr lang="en-US" dirty="0"/>
+              <a:t> is the storage-side component that </a:t>
+            </a:r>
+            <a:r>
+              <a:rPr lang="en-US" b="1" dirty="0"/>
+              <a:t>provides storage</a:t>
+            </a:r>
+            <a:r>
+              <a:rPr lang="en-US" dirty="0"/>
+              <a:t> to the initiator.</a:t>
+            </a:r>
+          </a:p>
+          <a:p>
+            <a:r>
+              <a:rPr lang="en-US" dirty="0"/>
+              <a:t>It is normally available on a storage array or storage server.</a:t>
+            </a:r>
+          </a:p>
+          <a:p>
+            <a:r>
+              <a:rPr lang="en-US" b="1" dirty="0"/>
+              <a:t>Functions</a:t>
+            </a:r>
+          </a:p>
+          <a:p>
+            <a:pPr lvl="1"/>
+            <a:r>
+              <a:rPr lang="en-US" dirty="0"/>
+              <a:t>Receives requests from the initiator. </a:t>
+            </a:r>
+          </a:p>
+          <a:p>
+            <a:pPr lvl="1"/>
+            <a:r>
+              <a:rPr lang="en-US" dirty="0"/>
+              <a:t>Processes SCSI commands. </a:t>
+            </a:r>
+          </a:p>
+          <a:p>
+            <a:pPr lvl="1"/>
+            <a:r>
+              <a:rPr lang="en-US" dirty="0"/>
+              <a:t>Provides LUNs to the server. </a:t>
+            </a:r>
+          </a:p>
+          <a:p>
+            <a:pPr lvl="1"/>
+            <a:r>
+              <a:rPr lang="en-US" dirty="0"/>
+              <a:t>Sends requested data back to the initiator. </a:t>
+            </a:r>
+          </a:p>
+          <a:p>
+            <a:r>
+              <a:rPr lang="en-US" b="1" dirty="0"/>
+              <a:t>Easy way to remember</a:t>
+            </a:r>
+          </a:p>
+          <a:p>
+            <a:r>
+              <a:rPr lang="en-IN" dirty="0"/>
+              <a:t>Target = Storage side = Provides storage</a:t>
+            </a:r>
+            <a:endParaRPr lang="en-US" dirty="0"/>
+          </a:p>
+          <a:p>
+            <a:endParaRPr lang="en-IN" dirty="0"/>
+          </a:p>
+        </p:txBody>
+      </p:sp>
+    </p:spTree>
+    <p:extLst>
+      <p:ext uri="{BB962C8B-B14F-4D97-AF65-F5344CB8AC3E}">
+        <p14:creationId xmlns:p14="http://schemas.microsoft.com/office/powerpoint/2010/main" val="2084882599"/>
+      </p:ext>
+    </p:extLst>
+  </p:cSld>
+  <p:clrMapOvr>
+    <a:masterClrMapping/>
+  </p:clrMapOvr>
+</p:sld>
+</file>
+
+<file path=ppt/slides/slide77.xml><?xml version="1.0" encoding="utf-8"?>
+<p:sld xmlns:a="http://schemas.openxmlformats.org/drawingml/2006/main" xmlns:r="http://schemas.openxmlformats.org/officeDocument/2006/relationships" xmlns:p="http://schemas.openxmlformats.org/presentationml/2006/main">
+  <p:cSld>
+    <p:spTree>
+      <p:nvGrpSpPr>
+        <p:cNvPr id="1" name=""/>
+        <p:cNvGrpSpPr/>
+        <p:nvPr/>
+      </p:nvGrpSpPr>
+      <p:grpSpPr>
+        <a:xfrm>
+          <a:off x="0" y="0"/>
+          <a:ext cx="0" cy="0"/>
+          <a:chOff x="0" y="0"/>
+          <a:chExt cx="0" cy="0"/>
+        </a:xfrm>
+      </p:grpSpPr>
+      <p:sp>
+        <p:nvSpPr>
+          <p:cNvPr id="2" name="Title 1">
+            <a:extLst>
+              <a:ext uri="{FF2B5EF4-FFF2-40B4-BE49-F238E27FC236}">
+                <a16:creationId xmlns:a16="http://schemas.microsoft.com/office/drawing/2014/main" id="{B521FBDD-78EF-40C6-91F8-ABA683CB328B}"/>
+              </a:ext>
+            </a:extLst>
+          </p:cNvPr>
+          <p:cNvSpPr>
+            <a:spLocks noGrp="1"/>
+          </p:cNvSpPr>
+          <p:nvPr>
+            <p:ph type="title"/>
+          </p:nvPr>
+        </p:nvSpPr>
+        <p:spPr/>
+        <p:txBody>
+          <a:bodyPr/>
+          <a:lstStyle/>
+          <a:p>
+            <a:r>
+              <a:rPr lang="en-US" dirty="0"/>
+              <a:t>5. Network Interface Card (NIC)</a:t>
+            </a:r>
+            <a:endParaRPr lang="en-IN" dirty="0"/>
+          </a:p>
+        </p:txBody>
+      </p:sp>
+      <p:sp>
+        <p:nvSpPr>
+          <p:cNvPr id="3" name="Content Placeholder 2">
+            <a:extLst>
+              <a:ext uri="{FF2B5EF4-FFF2-40B4-BE49-F238E27FC236}">
+                <a16:creationId xmlns:a16="http://schemas.microsoft.com/office/drawing/2014/main" id="{305B89BD-257E-45CF-942B-7DD3876A6917}"/>
+              </a:ext>
+            </a:extLst>
+          </p:cNvPr>
+          <p:cNvSpPr>
+            <a:spLocks noGrp="1"/>
+          </p:cNvSpPr>
+          <p:nvPr>
+            <p:ph idx="1"/>
+          </p:nvPr>
+        </p:nvSpPr>
+        <p:spPr/>
+        <p:txBody>
+          <a:bodyPr/>
+          <a:lstStyle/>
+          <a:p>
+            <a:r>
+              <a:rPr lang="en-US" dirty="0"/>
+              <a:t>A </a:t>
+            </a:r>
+            <a:r>
+              <a:rPr lang="en-US" b="1" dirty="0"/>
+              <a:t>NIC (Network Interface Card)</a:t>
+            </a:r>
+            <a:r>
+              <a:rPr lang="en-US" dirty="0"/>
+              <a:t> allows the server or storage system to connect to the Ethernet network.</a:t>
+            </a:r>
+          </a:p>
+          <a:p>
+            <a:r>
+              <a:rPr lang="en-US" dirty="0"/>
+              <a:t>iSCSI commonly uses Ethernet NICs for communication.</a:t>
+            </a:r>
+          </a:p>
+          <a:p>
+            <a:r>
+              <a:rPr lang="en-US" dirty="0"/>
+              <a:t>Modern systems may use high-speed Ethernet such as:</a:t>
+            </a:r>
+          </a:p>
+          <a:p>
+            <a:pPr marL="342900" indent="-342900">
+              <a:buFont typeface="Arial" panose="020B0604020202020204" pitchFamily="34" charset="0"/>
+              <a:buChar char="•"/>
+            </a:pPr>
+            <a:r>
+              <a:rPr lang="en-US" dirty="0"/>
+              <a:t>10 </a:t>
+            </a:r>
+            <a:r>
+              <a:rPr lang="en-US" dirty="0" err="1"/>
+              <a:t>GbE</a:t>
+            </a:r>
+            <a:r>
+              <a:rPr lang="en-US" dirty="0"/>
+              <a:t> </a:t>
+            </a:r>
+          </a:p>
+          <a:p>
+            <a:pPr marL="342900" indent="-342900">
+              <a:buFont typeface="Arial" panose="020B0604020202020204" pitchFamily="34" charset="0"/>
+              <a:buChar char="•"/>
+            </a:pPr>
+            <a:r>
+              <a:rPr lang="en-US" dirty="0"/>
+              <a:t>25 </a:t>
+            </a:r>
+            <a:r>
+              <a:rPr lang="en-US" dirty="0" err="1"/>
+              <a:t>GbE</a:t>
+            </a:r>
+            <a:r>
+              <a:rPr lang="en-US" dirty="0"/>
+              <a:t> </a:t>
+            </a:r>
+          </a:p>
+          <a:p>
+            <a:pPr marL="342900" indent="-342900">
+              <a:buFont typeface="Arial" panose="020B0604020202020204" pitchFamily="34" charset="0"/>
+              <a:buChar char="•"/>
+            </a:pPr>
+            <a:r>
+              <a:rPr lang="en-US" dirty="0"/>
+              <a:t>40 </a:t>
+            </a:r>
+            <a:r>
+              <a:rPr lang="en-US" dirty="0" err="1"/>
+              <a:t>GbE</a:t>
+            </a:r>
+            <a:r>
+              <a:rPr lang="en-US" dirty="0"/>
+              <a:t> </a:t>
+            </a:r>
+          </a:p>
+          <a:p>
+            <a:pPr marL="342900" indent="-342900">
+              <a:buFont typeface="Arial" panose="020B0604020202020204" pitchFamily="34" charset="0"/>
+              <a:buChar char="•"/>
+            </a:pPr>
+            <a:r>
+              <a:rPr lang="en-US" dirty="0"/>
+              <a:t>100 </a:t>
+            </a:r>
+            <a:r>
+              <a:rPr lang="en-US" dirty="0" err="1"/>
+              <a:t>GbE</a:t>
+            </a:r>
+            <a:r>
+              <a:rPr lang="en-US" dirty="0"/>
+              <a:t> </a:t>
+            </a:r>
+          </a:p>
+          <a:p>
+            <a:r>
+              <a:rPr lang="en-US" dirty="0"/>
+              <a:t>depending on the environment.</a:t>
+            </a:r>
+          </a:p>
+          <a:p>
+            <a:endParaRPr lang="en-IN" dirty="0"/>
+          </a:p>
+        </p:txBody>
+      </p:sp>
+    </p:spTree>
+    <p:extLst>
+      <p:ext uri="{BB962C8B-B14F-4D97-AF65-F5344CB8AC3E}">
+        <p14:creationId xmlns:p14="http://schemas.microsoft.com/office/powerpoint/2010/main" val="1835527812"/>
+      </p:ext>
+    </p:extLst>
+  </p:cSld>
+  <p:clrMapOvr>
+    <a:masterClrMapping/>
+  </p:clrMapOvr>
+</p:sld>
+</file>
+
+<file path=ppt/slides/slide78.xml><?xml version="1.0" encoding="utf-8"?>
+<p:sld xmlns:a="http://schemas.openxmlformats.org/drawingml/2006/main" xmlns:r="http://schemas.openxmlformats.org/officeDocument/2006/relationships" xmlns:p="http://schemas.openxmlformats.org/presentationml/2006/main">
+  <p:cSld>
+    <p:spTree>
+      <p:nvGrpSpPr>
+        <p:cNvPr id="1" name=""/>
+        <p:cNvGrpSpPr/>
+        <p:nvPr/>
+      </p:nvGrpSpPr>
+      <p:grpSpPr>
+        <a:xfrm>
+          <a:off x="0" y="0"/>
+          <a:ext cx="0" cy="0"/>
+          <a:chOff x="0" y="0"/>
+          <a:chExt cx="0" cy="0"/>
+        </a:xfrm>
+      </p:grpSpPr>
+      <p:sp>
+        <p:nvSpPr>
+          <p:cNvPr id="2" name="Title 1">
+            <a:extLst>
+              <a:ext uri="{FF2B5EF4-FFF2-40B4-BE49-F238E27FC236}">
+                <a16:creationId xmlns:a16="http://schemas.microsoft.com/office/drawing/2014/main" id="{E4CF2A65-874C-44DE-98FA-661F4AA987F0}"/>
+              </a:ext>
+            </a:extLst>
+          </p:cNvPr>
+          <p:cNvSpPr>
+            <a:spLocks noGrp="1"/>
+          </p:cNvSpPr>
+          <p:nvPr>
+            <p:ph type="title"/>
+          </p:nvPr>
+        </p:nvSpPr>
+        <p:spPr/>
+        <p:txBody>
+          <a:bodyPr/>
+          <a:lstStyle/>
+          <a:p>
+            <a:r>
+              <a:rPr lang="en-US" dirty="0"/>
+              <a:t>6. Ethernet Switch</a:t>
+            </a:r>
+            <a:br>
+              <a:rPr lang="en-US" dirty="0"/>
+            </a:br>
+            <a:endParaRPr lang="en-IN" dirty="0"/>
+          </a:p>
+        </p:txBody>
+      </p:sp>
+      <p:sp>
+        <p:nvSpPr>
+          <p:cNvPr id="3" name="Content Placeholder 2">
+            <a:extLst>
+              <a:ext uri="{FF2B5EF4-FFF2-40B4-BE49-F238E27FC236}">
+                <a16:creationId xmlns:a16="http://schemas.microsoft.com/office/drawing/2014/main" id="{BAE9C923-16A0-44FF-AB2E-A746B59085FE}"/>
+              </a:ext>
+            </a:extLst>
+          </p:cNvPr>
+          <p:cNvSpPr>
+            <a:spLocks noGrp="1"/>
+          </p:cNvSpPr>
+          <p:nvPr>
+            <p:ph idx="1"/>
+          </p:nvPr>
+        </p:nvSpPr>
+        <p:spPr/>
+        <p:txBody>
+          <a:bodyPr/>
+          <a:lstStyle/>
+          <a:p>
+            <a:r>
+              <a:rPr lang="en-US" dirty="0"/>
+              <a:t>The </a:t>
+            </a:r>
+            <a:r>
+              <a:rPr lang="en-US" b="1" dirty="0"/>
+              <a:t>Ethernet switch</a:t>
+            </a:r>
+            <a:r>
+              <a:rPr lang="en-US" dirty="0"/>
+              <a:t> connects the server and storage system.</a:t>
+            </a:r>
+          </a:p>
+          <a:p>
+            <a:r>
+              <a:rPr lang="en-US" dirty="0"/>
+              <a:t>The switch forwards iSCSI traffic between the initiator and target.</a:t>
+            </a:r>
+          </a:p>
+          <a:p>
+            <a:r>
+              <a:rPr lang="en-US" b="1" dirty="0"/>
+              <a:t>Functions</a:t>
+            </a:r>
+          </a:p>
+          <a:p>
+            <a:pPr lvl="1"/>
+            <a:r>
+              <a:rPr lang="en-US" dirty="0"/>
+              <a:t>Connects servers and storage. </a:t>
+            </a:r>
+          </a:p>
+          <a:p>
+            <a:pPr lvl="1"/>
+            <a:r>
+              <a:rPr lang="en-US" dirty="0"/>
+              <a:t>Forwards Ethernet frames. </a:t>
+            </a:r>
+          </a:p>
+          <a:p>
+            <a:pPr lvl="1"/>
+            <a:r>
+              <a:rPr lang="en-US" dirty="0"/>
+              <a:t>Provides network connectivity. </a:t>
+            </a:r>
+          </a:p>
+          <a:p>
+            <a:pPr lvl="1"/>
+            <a:r>
+              <a:rPr lang="en-US" dirty="0"/>
+              <a:t>Can support VLANs and link aggregation.</a:t>
+            </a:r>
+          </a:p>
+          <a:p>
+            <a:endParaRPr lang="en-IN" dirty="0"/>
+          </a:p>
+        </p:txBody>
+      </p:sp>
+    </p:spTree>
+    <p:extLst>
+      <p:ext uri="{BB962C8B-B14F-4D97-AF65-F5344CB8AC3E}">
+        <p14:creationId xmlns:p14="http://schemas.microsoft.com/office/powerpoint/2010/main" val="4180157444"/>
+      </p:ext>
+    </p:extLst>
+  </p:cSld>
+  <p:clrMapOvr>
+    <a:masterClrMapping/>
+  </p:clrMapOvr>
+</p:sld>
+</file>
+
+<file path=ppt/slides/slide79.xml><?xml version="1.0" encoding="utf-8"?>
+<p:sld xmlns:a="http://schemas.openxmlformats.org/drawingml/2006/main" xmlns:r="http://schemas.openxmlformats.org/officeDocument/2006/relationships" xmlns:p="http://schemas.openxmlformats.org/presentationml/2006/main">
+  <p:cSld>
+    <p:spTree>
+      <p:nvGrpSpPr>
+        <p:cNvPr id="1" name=""/>
+        <p:cNvGrpSpPr/>
+        <p:nvPr/>
+      </p:nvGrpSpPr>
+      <p:grpSpPr>
+        <a:xfrm>
+          <a:off x="0" y="0"/>
+          <a:ext cx="0" cy="0"/>
+          <a:chOff x="0" y="0"/>
+          <a:chExt cx="0" cy="0"/>
+        </a:xfrm>
+      </p:grpSpPr>
+      <p:sp>
+        <p:nvSpPr>
+          <p:cNvPr id="2" name="Title 1">
+            <a:extLst>
+              <a:ext uri="{FF2B5EF4-FFF2-40B4-BE49-F238E27FC236}">
+                <a16:creationId xmlns:a16="http://schemas.microsoft.com/office/drawing/2014/main" id="{6E3D05C4-5955-4E62-BD75-FC49C72689FC}"/>
+              </a:ext>
+            </a:extLst>
+          </p:cNvPr>
+          <p:cNvSpPr>
+            <a:spLocks noGrp="1"/>
+          </p:cNvSpPr>
+          <p:nvPr>
+            <p:ph type="title"/>
+          </p:nvPr>
+        </p:nvSpPr>
+        <p:spPr/>
+        <p:txBody>
+          <a:bodyPr/>
+          <a:lstStyle/>
+          <a:p>
+            <a:r>
+              <a:rPr lang="en-IN" dirty="0"/>
+              <a:t>7. IP Network</a:t>
+            </a:r>
+          </a:p>
+        </p:txBody>
+      </p:sp>
+      <p:sp>
+        <p:nvSpPr>
+          <p:cNvPr id="3" name="Content Placeholder 2">
+            <a:extLst>
+              <a:ext uri="{FF2B5EF4-FFF2-40B4-BE49-F238E27FC236}">
+                <a16:creationId xmlns:a16="http://schemas.microsoft.com/office/drawing/2014/main" id="{BE1EF0CD-CADA-4C33-8B6E-6D929E307EE2}"/>
+              </a:ext>
+            </a:extLst>
+          </p:cNvPr>
+          <p:cNvSpPr>
+            <a:spLocks noGrp="1"/>
+          </p:cNvSpPr>
+          <p:nvPr>
+            <p:ph idx="1"/>
+          </p:nvPr>
+        </p:nvSpPr>
+        <p:spPr/>
+        <p:txBody>
+          <a:bodyPr/>
+          <a:lstStyle/>
+          <a:p>
+            <a:r>
+              <a:rPr lang="en-US" dirty="0"/>
+              <a:t>iSCSI uses the </a:t>
+            </a:r>
+            <a:r>
+              <a:rPr lang="en-US" b="1" dirty="0"/>
+              <a:t>TCP/IP network</a:t>
+            </a:r>
+            <a:r>
+              <a:rPr lang="en-US" dirty="0"/>
+              <a:t> to transfer storage traffic.</a:t>
+            </a:r>
+          </a:p>
+          <a:p>
+            <a:r>
+              <a:rPr lang="en-US" dirty="0"/>
+              <a:t>The server communicates with the storage using IP addresses.</a:t>
+            </a:r>
+          </a:p>
+          <a:p>
+            <a:endParaRPr lang="en-US" dirty="0"/>
+          </a:p>
+          <a:p>
+            <a:r>
+              <a:rPr lang="en-IN" b="1" dirty="0"/>
+              <a:t>8. TCP</a:t>
+            </a:r>
+          </a:p>
+          <a:p>
+            <a:r>
+              <a:rPr lang="en-IN" dirty="0"/>
+              <a:t>iSCSI uses </a:t>
+            </a:r>
+            <a:r>
+              <a:rPr lang="en-IN" b="1" dirty="0"/>
+              <a:t>TCP (Transmission Control Protocol)</a:t>
+            </a:r>
+            <a:r>
+              <a:rPr lang="en-IN" dirty="0"/>
+              <a:t> for reliable communication.</a:t>
+            </a:r>
+          </a:p>
+          <a:p>
+            <a:r>
+              <a:rPr lang="en-IN" dirty="0"/>
+              <a:t>The standard iSCSI TCP port is:</a:t>
+            </a:r>
+          </a:p>
+          <a:p>
+            <a:r>
+              <a:rPr lang="en-IN" dirty="0"/>
+              <a:t>TCP Port 3260</a:t>
+            </a:r>
+          </a:p>
+          <a:p>
+            <a:r>
+              <a:rPr lang="en-US" dirty="0"/>
+              <a:t>TCP ensures reliable delivery of data between the initiator and target.</a:t>
+            </a:r>
+            <a:endParaRPr lang="en-IN" dirty="0"/>
+          </a:p>
+        </p:txBody>
+      </p:sp>
+    </p:spTree>
+    <p:extLst>
+      <p:ext uri="{BB962C8B-B14F-4D97-AF65-F5344CB8AC3E}">
+        <p14:creationId xmlns:p14="http://schemas.microsoft.com/office/powerpoint/2010/main" val="919713314"/>
       </p:ext>
     </p:extLst>
   </p:cSld>
@@ -11243,6 +19071,582 @@
     <p:extLst>
       <p:ext uri="{BB962C8B-B14F-4D97-AF65-F5344CB8AC3E}">
         <p14:creationId xmlns:p14="http://schemas.microsoft.com/office/powerpoint/2010/main" val="602335801"/>
+      </p:ext>
+    </p:extLst>
+  </p:cSld>
+  <p:clrMapOvr>
+    <a:masterClrMapping/>
+  </p:clrMapOvr>
+</p:sld>
+</file>
+
+<file path=ppt/slides/slide80.xml><?xml version="1.0" encoding="utf-8"?>
+<p:sld xmlns:a="http://schemas.openxmlformats.org/drawingml/2006/main" xmlns:r="http://schemas.openxmlformats.org/officeDocument/2006/relationships" xmlns:p="http://schemas.openxmlformats.org/presentationml/2006/main">
+  <p:cSld>
+    <p:spTree>
+      <p:nvGrpSpPr>
+        <p:cNvPr id="1" name=""/>
+        <p:cNvGrpSpPr/>
+        <p:nvPr/>
+      </p:nvGrpSpPr>
+      <p:grpSpPr>
+        <a:xfrm>
+          <a:off x="0" y="0"/>
+          <a:ext cx="0" cy="0"/>
+          <a:chOff x="0" y="0"/>
+          <a:chExt cx="0" cy="0"/>
+        </a:xfrm>
+      </p:grpSpPr>
+      <p:sp>
+        <p:nvSpPr>
+          <p:cNvPr id="2" name="Title 1">
+            <a:extLst>
+              <a:ext uri="{FF2B5EF4-FFF2-40B4-BE49-F238E27FC236}">
+                <a16:creationId xmlns:a16="http://schemas.microsoft.com/office/drawing/2014/main" id="{F87F7682-4441-4DB3-8BAE-2265C0B556EF}"/>
+              </a:ext>
+            </a:extLst>
+          </p:cNvPr>
+          <p:cNvSpPr>
+            <a:spLocks noGrp="1"/>
+          </p:cNvSpPr>
+          <p:nvPr>
+            <p:ph type="title"/>
+          </p:nvPr>
+        </p:nvSpPr>
+        <p:spPr/>
+        <p:txBody>
+          <a:bodyPr/>
+          <a:lstStyle/>
+          <a:p>
+            <a:r>
+              <a:rPr lang="en-US" dirty="0"/>
+              <a:t>9. Storage System</a:t>
+            </a:r>
+            <a:br>
+              <a:rPr lang="en-US" dirty="0"/>
+            </a:br>
+            <a:endParaRPr lang="en-IN" dirty="0"/>
+          </a:p>
+        </p:txBody>
+      </p:sp>
+      <p:sp>
+        <p:nvSpPr>
+          <p:cNvPr id="3" name="Content Placeholder 2">
+            <a:extLst>
+              <a:ext uri="{FF2B5EF4-FFF2-40B4-BE49-F238E27FC236}">
+                <a16:creationId xmlns:a16="http://schemas.microsoft.com/office/drawing/2014/main" id="{8016ABE1-4878-4014-8F85-7D6A05DBCDB1}"/>
+              </a:ext>
+            </a:extLst>
+          </p:cNvPr>
+          <p:cNvSpPr>
+            <a:spLocks noGrp="1"/>
+          </p:cNvSpPr>
+          <p:nvPr>
+            <p:ph idx="1"/>
+          </p:nvPr>
+        </p:nvSpPr>
+        <p:spPr/>
+        <p:txBody>
+          <a:bodyPr>
+            <a:normAutofit/>
+          </a:bodyPr>
+          <a:lstStyle/>
+          <a:p>
+            <a:r>
+              <a:rPr lang="en-US" dirty="0"/>
+              <a:t>The </a:t>
+            </a:r>
+            <a:r>
+              <a:rPr lang="en-US" b="1" dirty="0"/>
+              <a:t>storage system</a:t>
+            </a:r>
+            <a:r>
+              <a:rPr lang="en-US" dirty="0"/>
+              <a:t> contains the actual physical storage resources.</a:t>
+            </a:r>
+          </a:p>
+          <a:p>
+            <a:r>
+              <a:rPr lang="en-US" dirty="0"/>
+              <a:t>It may contain:</a:t>
+            </a:r>
+          </a:p>
+          <a:p>
+            <a:pPr lvl="1"/>
+            <a:r>
+              <a:rPr lang="en-US" dirty="0"/>
+              <a:t>HDDs </a:t>
+            </a:r>
+          </a:p>
+          <a:p>
+            <a:pPr lvl="1"/>
+            <a:r>
+              <a:rPr lang="en-US" dirty="0"/>
+              <a:t>SSDs </a:t>
+            </a:r>
+          </a:p>
+          <a:p>
+            <a:pPr lvl="1"/>
+            <a:r>
+              <a:rPr lang="en-US" dirty="0"/>
+              <a:t>RAID groups </a:t>
+            </a:r>
+          </a:p>
+          <a:p>
+            <a:pPr lvl="1"/>
+            <a:r>
+              <a:rPr lang="en-US" dirty="0"/>
+              <a:t>Storage pools </a:t>
+            </a:r>
+          </a:p>
+          <a:p>
+            <a:pPr lvl="1"/>
+            <a:r>
+              <a:rPr lang="en-US" dirty="0"/>
+              <a:t>Cache </a:t>
+            </a:r>
+          </a:p>
+          <a:p>
+            <a:pPr lvl="1"/>
+            <a:r>
+              <a:rPr lang="en-US" dirty="0"/>
+              <a:t>Controllers </a:t>
+            </a:r>
+          </a:p>
+          <a:p>
+            <a:r>
+              <a:rPr lang="en-US" dirty="0"/>
+              <a:t>The storage system presents logical storage to servers through iSCSI.</a:t>
+            </a:r>
+          </a:p>
+          <a:p>
+            <a:endParaRPr lang="en-IN" dirty="0"/>
+          </a:p>
+        </p:txBody>
+      </p:sp>
+    </p:spTree>
+    <p:extLst>
+      <p:ext uri="{BB962C8B-B14F-4D97-AF65-F5344CB8AC3E}">
+        <p14:creationId xmlns:p14="http://schemas.microsoft.com/office/powerpoint/2010/main" val="4212123569"/>
+      </p:ext>
+    </p:extLst>
+  </p:cSld>
+  <p:clrMapOvr>
+    <a:masterClrMapping/>
+  </p:clrMapOvr>
+</p:sld>
+</file>
+
+<file path=ppt/slides/slide81.xml><?xml version="1.0" encoding="utf-8"?>
+<p:sld xmlns:a="http://schemas.openxmlformats.org/drawingml/2006/main" xmlns:r="http://schemas.openxmlformats.org/officeDocument/2006/relationships" xmlns:p="http://schemas.openxmlformats.org/presentationml/2006/main">
+  <p:cSld>
+    <p:spTree>
+      <p:nvGrpSpPr>
+        <p:cNvPr id="1" name=""/>
+        <p:cNvGrpSpPr/>
+        <p:nvPr/>
+      </p:nvGrpSpPr>
+      <p:grpSpPr>
+        <a:xfrm>
+          <a:off x="0" y="0"/>
+          <a:ext cx="0" cy="0"/>
+          <a:chOff x="0" y="0"/>
+          <a:chExt cx="0" cy="0"/>
+        </a:xfrm>
+      </p:grpSpPr>
+      <p:sp>
+        <p:nvSpPr>
+          <p:cNvPr id="2" name="Title 1">
+            <a:extLst>
+              <a:ext uri="{FF2B5EF4-FFF2-40B4-BE49-F238E27FC236}">
+                <a16:creationId xmlns:a16="http://schemas.microsoft.com/office/drawing/2014/main" id="{52050E48-6413-40F7-96FC-9E86B3D94413}"/>
+              </a:ext>
+            </a:extLst>
+          </p:cNvPr>
+          <p:cNvSpPr>
+            <a:spLocks noGrp="1"/>
+          </p:cNvSpPr>
+          <p:nvPr>
+            <p:ph type="title"/>
+          </p:nvPr>
+        </p:nvSpPr>
+        <p:spPr/>
+        <p:txBody>
+          <a:bodyPr/>
+          <a:lstStyle/>
+          <a:p>
+            <a:r>
+              <a:rPr lang="en-IN" dirty="0"/>
+              <a:t>1</a:t>
+            </a:r>
+            <a:r>
+              <a:rPr lang="en-US" dirty="0"/>
+              <a:t>0. LUN</a:t>
+            </a:r>
+            <a:endParaRPr lang="en-IN" dirty="0"/>
+          </a:p>
+        </p:txBody>
+      </p:sp>
+      <p:sp>
+        <p:nvSpPr>
+          <p:cNvPr id="3" name="Content Placeholder 2">
+            <a:extLst>
+              <a:ext uri="{FF2B5EF4-FFF2-40B4-BE49-F238E27FC236}">
+                <a16:creationId xmlns:a16="http://schemas.microsoft.com/office/drawing/2014/main" id="{164B4328-1711-48FC-8008-56A3AEBFB2FF}"/>
+              </a:ext>
+            </a:extLst>
+          </p:cNvPr>
+          <p:cNvSpPr>
+            <a:spLocks noGrp="1"/>
+          </p:cNvSpPr>
+          <p:nvPr>
+            <p:ph idx="1"/>
+          </p:nvPr>
+        </p:nvSpPr>
+        <p:spPr>
+          <a:xfrm>
+            <a:off x="838200" y="1805076"/>
+            <a:ext cx="10515600" cy="4595723"/>
+          </a:xfrm>
+        </p:spPr>
+        <p:txBody>
+          <a:bodyPr>
+            <a:normAutofit lnSpcReduction="10000"/>
+          </a:bodyPr>
+          <a:lstStyle/>
+          <a:p>
+            <a:r>
+              <a:rPr lang="en-US" b="1" dirty="0"/>
+              <a:t>LUN = Logical Unit Number</a:t>
+            </a:r>
+            <a:endParaRPr lang="en-US" dirty="0"/>
+          </a:p>
+          <a:p>
+            <a:r>
+              <a:rPr lang="en-US" dirty="0"/>
+              <a:t>A LUN is a </a:t>
+            </a:r>
+            <a:r>
+              <a:rPr lang="en-US" b="1" dirty="0"/>
+              <a:t>logical storage unit</a:t>
+            </a:r>
+            <a:r>
+              <a:rPr lang="en-US" dirty="0"/>
+              <a:t> provided by the iSCSI target.</a:t>
+            </a:r>
+          </a:p>
+          <a:p>
+            <a:r>
+              <a:rPr lang="en-US" dirty="0"/>
+              <a:t>For example:</a:t>
+            </a:r>
+          </a:p>
+          <a:p>
+            <a:endParaRPr lang="en-US" dirty="0"/>
+          </a:p>
+          <a:p>
+            <a:endParaRPr lang="en-US" dirty="0"/>
+          </a:p>
+          <a:p>
+            <a:endParaRPr lang="en-US" dirty="0"/>
+          </a:p>
+          <a:p>
+            <a:endParaRPr lang="en-US" dirty="0"/>
+          </a:p>
+          <a:p>
+            <a:endParaRPr lang="en-US" dirty="0"/>
+          </a:p>
+          <a:p>
+            <a:r>
+              <a:rPr lang="en-US" dirty="0"/>
+              <a:t>The server sees the LUN as a disk.</a:t>
+            </a:r>
+          </a:p>
+          <a:p>
+            <a:r>
+              <a:rPr lang="en-US" b="1" dirty="0"/>
+              <a:t>LUN = Storage space given to the server</a:t>
+            </a:r>
+          </a:p>
+          <a:p>
+            <a:endParaRPr lang="en-IN" dirty="0"/>
+          </a:p>
+        </p:txBody>
+      </p:sp>
+      <p:pic>
+        <p:nvPicPr>
+          <p:cNvPr id="4" name="Picture 3">
+            <a:extLst>
+              <a:ext uri="{FF2B5EF4-FFF2-40B4-BE49-F238E27FC236}">
+                <a16:creationId xmlns:a16="http://schemas.microsoft.com/office/drawing/2014/main" id="{036FFD7D-3021-4CBB-8AE4-9121626626C6}"/>
+              </a:ext>
+            </a:extLst>
+          </p:cNvPr>
+          <p:cNvPicPr>
+            <a:picLocks noChangeAspect="1"/>
+          </p:cNvPicPr>
+          <p:nvPr/>
+        </p:nvPicPr>
+        <p:blipFill>
+          <a:blip r:embed="rId2"/>
+          <a:stretch>
+            <a:fillRect/>
+          </a:stretch>
+        </p:blipFill>
+        <p:spPr>
+          <a:xfrm>
+            <a:off x="2332234" y="3336532"/>
+            <a:ext cx="1571946" cy="1994263"/>
+          </a:xfrm>
+          <a:prstGeom prst="rect">
+            <a:avLst/>
+          </a:prstGeom>
+        </p:spPr>
+      </p:pic>
+    </p:spTree>
+    <p:extLst>
+      <p:ext uri="{BB962C8B-B14F-4D97-AF65-F5344CB8AC3E}">
+        <p14:creationId xmlns:p14="http://schemas.microsoft.com/office/powerpoint/2010/main" val="1691325225"/>
+      </p:ext>
+    </p:extLst>
+  </p:cSld>
+  <p:clrMapOvr>
+    <a:masterClrMapping/>
+  </p:clrMapOvr>
+</p:sld>
+</file>
+
+<file path=ppt/slides/slide82.xml><?xml version="1.0" encoding="utf-8"?>
+<p:sld xmlns:a="http://schemas.openxmlformats.org/drawingml/2006/main" xmlns:r="http://schemas.openxmlformats.org/officeDocument/2006/relationships" xmlns:p="http://schemas.openxmlformats.org/presentationml/2006/main">
+  <p:cSld>
+    <p:spTree>
+      <p:nvGrpSpPr>
+        <p:cNvPr id="1" name=""/>
+        <p:cNvGrpSpPr/>
+        <p:nvPr/>
+      </p:nvGrpSpPr>
+      <p:grpSpPr>
+        <a:xfrm>
+          <a:off x="0" y="0"/>
+          <a:ext cx="0" cy="0"/>
+          <a:chOff x="0" y="0"/>
+          <a:chExt cx="0" cy="0"/>
+        </a:xfrm>
+      </p:grpSpPr>
+      <p:sp>
+        <p:nvSpPr>
+          <p:cNvPr id="2" name="Title 1">
+            <a:extLst>
+              <a:ext uri="{FF2B5EF4-FFF2-40B4-BE49-F238E27FC236}">
+                <a16:creationId xmlns:a16="http://schemas.microsoft.com/office/drawing/2014/main" id="{8EA8B181-A7F4-4FD1-B1AD-85ECE66A5F70}"/>
+              </a:ext>
+            </a:extLst>
+          </p:cNvPr>
+          <p:cNvSpPr>
+            <a:spLocks noGrp="1"/>
+          </p:cNvSpPr>
+          <p:nvPr>
+            <p:ph type="title"/>
+          </p:nvPr>
+        </p:nvSpPr>
+        <p:spPr/>
+        <p:txBody>
+          <a:bodyPr/>
+          <a:lstStyle/>
+          <a:p>
+            <a:endParaRPr lang="en-IN"/>
+          </a:p>
+        </p:txBody>
+      </p:sp>
+      <p:sp>
+        <p:nvSpPr>
+          <p:cNvPr id="3" name="Content Placeholder 2">
+            <a:extLst>
+              <a:ext uri="{FF2B5EF4-FFF2-40B4-BE49-F238E27FC236}">
+                <a16:creationId xmlns:a16="http://schemas.microsoft.com/office/drawing/2014/main" id="{E05F9065-70F8-46A7-AE42-0A549A8A1EE3}"/>
+              </a:ext>
+            </a:extLst>
+          </p:cNvPr>
+          <p:cNvSpPr>
+            <a:spLocks noGrp="1"/>
+          </p:cNvSpPr>
+          <p:nvPr>
+            <p:ph idx="1"/>
+          </p:nvPr>
+        </p:nvSpPr>
+        <p:spPr/>
+        <p:txBody>
+          <a:bodyPr/>
+          <a:lstStyle/>
+          <a:p>
+            <a:endParaRPr lang="en-IN"/>
+          </a:p>
+        </p:txBody>
+      </p:sp>
+    </p:spTree>
+    <p:extLst>
+      <p:ext uri="{BB962C8B-B14F-4D97-AF65-F5344CB8AC3E}">
+        <p14:creationId xmlns:p14="http://schemas.microsoft.com/office/powerpoint/2010/main" val="988110787"/>
+      </p:ext>
+    </p:extLst>
+  </p:cSld>
+  <p:clrMapOvr>
+    <a:masterClrMapping/>
+  </p:clrMapOvr>
+</p:sld>
+</file>
+
+<file path=ppt/slides/slide83.xml><?xml version="1.0" encoding="utf-8"?>
+<p:sld xmlns:a="http://schemas.openxmlformats.org/drawingml/2006/main" xmlns:r="http://schemas.openxmlformats.org/officeDocument/2006/relationships" xmlns:p="http://schemas.openxmlformats.org/presentationml/2006/main">
+  <p:cSld>
+    <p:spTree>
+      <p:nvGrpSpPr>
+        <p:cNvPr id="1" name=""/>
+        <p:cNvGrpSpPr/>
+        <p:nvPr/>
+      </p:nvGrpSpPr>
+      <p:grpSpPr>
+        <a:xfrm>
+          <a:off x="0" y="0"/>
+          <a:ext cx="0" cy="0"/>
+          <a:chOff x="0" y="0"/>
+          <a:chExt cx="0" cy="0"/>
+        </a:xfrm>
+      </p:grpSpPr>
+      <p:sp>
+        <p:nvSpPr>
+          <p:cNvPr id="2" name="Title 1">
+            <a:extLst>
+              <a:ext uri="{FF2B5EF4-FFF2-40B4-BE49-F238E27FC236}">
+                <a16:creationId xmlns:a16="http://schemas.microsoft.com/office/drawing/2014/main" id="{BCCA92E7-A830-4A5F-92C0-8CE00998D5E5}"/>
+              </a:ext>
+            </a:extLst>
+          </p:cNvPr>
+          <p:cNvSpPr>
+            <a:spLocks noGrp="1"/>
+          </p:cNvSpPr>
+          <p:nvPr>
+            <p:ph type="title"/>
+          </p:nvPr>
+        </p:nvSpPr>
+        <p:spPr/>
+        <p:txBody>
+          <a:bodyPr/>
+          <a:lstStyle/>
+          <a:p>
+            <a:endParaRPr lang="en-IN"/>
+          </a:p>
+        </p:txBody>
+      </p:sp>
+      <p:sp>
+        <p:nvSpPr>
+          <p:cNvPr id="3" name="Content Placeholder 2">
+            <a:extLst>
+              <a:ext uri="{FF2B5EF4-FFF2-40B4-BE49-F238E27FC236}">
+                <a16:creationId xmlns:a16="http://schemas.microsoft.com/office/drawing/2014/main" id="{344ECE2D-546C-4E59-8870-4E044E4312C6}"/>
+              </a:ext>
+            </a:extLst>
+          </p:cNvPr>
+          <p:cNvSpPr>
+            <a:spLocks noGrp="1"/>
+          </p:cNvSpPr>
+          <p:nvPr>
+            <p:ph idx="1"/>
+          </p:nvPr>
+        </p:nvSpPr>
+        <p:spPr/>
+        <p:txBody>
+          <a:bodyPr/>
+          <a:lstStyle/>
+          <a:p>
+            <a:endParaRPr lang="en-IN"/>
+          </a:p>
+        </p:txBody>
+      </p:sp>
+    </p:spTree>
+    <p:extLst>
+      <p:ext uri="{BB962C8B-B14F-4D97-AF65-F5344CB8AC3E}">
+        <p14:creationId xmlns:p14="http://schemas.microsoft.com/office/powerpoint/2010/main" val="871127517"/>
+      </p:ext>
+    </p:extLst>
+  </p:cSld>
+  <p:clrMapOvr>
+    <a:masterClrMapping/>
+  </p:clrMapOvr>
+</p:sld>
+</file>
+
+<file path=ppt/slides/slide84.xml><?xml version="1.0" encoding="utf-8"?>
+<p:sld xmlns:a="http://schemas.openxmlformats.org/drawingml/2006/main" xmlns:r="http://schemas.openxmlformats.org/officeDocument/2006/relationships" xmlns:p="http://schemas.openxmlformats.org/presentationml/2006/main">
+  <p:cSld>
+    <p:spTree>
+      <p:nvGrpSpPr>
+        <p:cNvPr id="1" name=""/>
+        <p:cNvGrpSpPr/>
+        <p:nvPr/>
+      </p:nvGrpSpPr>
+      <p:grpSpPr>
+        <a:xfrm>
+          <a:off x="0" y="0"/>
+          <a:ext cx="0" cy="0"/>
+          <a:chOff x="0" y="0"/>
+          <a:chExt cx="0" cy="0"/>
+        </a:xfrm>
+      </p:grpSpPr>
+      <p:sp>
+        <p:nvSpPr>
+          <p:cNvPr id="2" name="Title 1">
+            <a:extLst>
+              <a:ext uri="{FF2B5EF4-FFF2-40B4-BE49-F238E27FC236}">
+                <a16:creationId xmlns:a16="http://schemas.microsoft.com/office/drawing/2014/main" id="{A2EECF6E-B735-4596-B3C0-B05ABF20D08C}"/>
+              </a:ext>
+            </a:extLst>
+          </p:cNvPr>
+          <p:cNvSpPr>
+            <a:spLocks noGrp="1"/>
+          </p:cNvSpPr>
+          <p:nvPr>
+            <p:ph type="title"/>
+          </p:nvPr>
+        </p:nvSpPr>
+        <p:spPr/>
+        <p:txBody>
+          <a:bodyPr/>
+          <a:lstStyle/>
+          <a:p>
+            <a:endParaRPr lang="en-IN"/>
+          </a:p>
+        </p:txBody>
+      </p:sp>
+      <p:sp>
+        <p:nvSpPr>
+          <p:cNvPr id="3" name="Content Placeholder 2">
+            <a:extLst>
+              <a:ext uri="{FF2B5EF4-FFF2-40B4-BE49-F238E27FC236}">
+                <a16:creationId xmlns:a16="http://schemas.microsoft.com/office/drawing/2014/main" id="{68E39225-BD5B-4316-874C-7E76F940C81C}"/>
+              </a:ext>
+            </a:extLst>
+          </p:cNvPr>
+          <p:cNvSpPr>
+            <a:spLocks noGrp="1"/>
+          </p:cNvSpPr>
+          <p:nvPr>
+            <p:ph idx="1"/>
+          </p:nvPr>
+        </p:nvSpPr>
+        <p:spPr/>
+        <p:txBody>
+          <a:bodyPr/>
+          <a:lstStyle/>
+          <a:p>
+            <a:endParaRPr lang="en-IN"/>
+          </a:p>
+        </p:txBody>
+      </p:sp>
+    </p:spTree>
+    <p:extLst>
+      <p:ext uri="{BB962C8B-B14F-4D97-AF65-F5344CB8AC3E}">
+        <p14:creationId xmlns:p14="http://schemas.microsoft.com/office/powerpoint/2010/main" val="3592455777"/>
       </p:ext>
     </p:extLst>
   </p:cSld>
@@ -11723,4 +20127,299 @@
     </a:ext>
   </a:extLst>
 </a:theme>
+</file>
+
+<file path=ppt/theme/theme2.xml><?xml version="1.0" encoding="utf-8"?>
+<a:theme xmlns:a="http://schemas.openxmlformats.org/drawingml/2006/main" name="Office Theme">
+  <a:themeElements>
+    <a:clrScheme name="Office">
+      <a:dk1>
+        <a:sysClr val="windowText" lastClr="000000"/>
+      </a:dk1>
+      <a:lt1>
+        <a:sysClr val="window" lastClr="FFFFFF"/>
+      </a:lt1>
+      <a:dk2>
+        <a:srgbClr val="44546A"/>
+      </a:dk2>
+      <a:lt2>
+        <a:srgbClr val="E7E6E6"/>
+      </a:lt2>
+      <a:accent1>
+        <a:srgbClr val="4472C4"/>
+      </a:accent1>
+      <a:accent2>
+        <a:srgbClr val="ED7D31"/>
+      </a:accent2>
+      <a:accent3>
+        <a:srgbClr val="A5A5A5"/>
+      </a:accent3>
+      <a:accent4>
+        <a:srgbClr val="FFC000"/>
+      </a:accent4>
+      <a:accent5>
+        <a:srgbClr val="5B9BD5"/>
+      </a:accent5>
+      <a:accent6>
+        <a:srgbClr val="70AD47"/>
+      </a:accent6>
+      <a:hlink>
+        <a:srgbClr val="0563C1"/>
+      </a:hlink>
+      <a:folHlink>
+        <a:srgbClr val="954F72"/>
+      </a:folHlink>
+    </a:clrScheme>
+    <a:fontScheme name="Office">
+      <a:majorFont>
+        <a:latin typeface="Calibri Light" panose="020F0302020204030204"/>
+        <a:ea typeface=""/>
+        <a:cs typeface=""/>
+        <a:font script="Jpan" typeface="游ゴシック Light"/>
+        <a:font script="Hang" typeface="맑은 고딕"/>
+        <a:font script="Hans" typeface="等线 Light"/>
+        <a:font script="Hant" typeface="新細明體"/>
+        <a:font script="Arab" typeface="Times New Roman"/>
+        <a:font script="Hebr" typeface="Times New Roman"/>
+        <a:font script="Thai" typeface="Angsana New"/>
+        <a:font script="Ethi" typeface="Nyala"/>
+        <a:font script="Beng" typeface="Vrinda"/>
+        <a:font script="Gujr" typeface="Shruti"/>
+        <a:font script="Khmr" typeface="MoolBoran"/>
+        <a:font script="Knda" typeface="Tunga"/>
+        <a:font script="Guru" typeface="Raavi"/>
+        <a:font script="Cans" typeface="Euphemia"/>
+        <a:font script="Cher" typeface="Plantagenet Cherokee"/>
+        <a:font script="Yiii" typeface="Microsoft Yi Baiti"/>
+        <a:font script="Tibt" typeface="Microsoft Himalaya"/>
+        <a:font script="Thaa" typeface="MV Boli"/>
+        <a:font script="Deva" typeface="Mangal"/>
+        <a:font script="Telu" typeface="Gautami"/>
+        <a:font script="Taml" typeface="Latha"/>
+        <a:font script="Syrc" typeface="Estrangelo Edessa"/>
+        <a:font script="Orya" typeface="Kalinga"/>
+        <a:font script="Mlym" typeface="Kartika"/>
+        <a:font script="Laoo" typeface="DokChampa"/>
+        <a:font script="Sinh" typeface="Iskoola Pota"/>
+        <a:font script="Mong" typeface="Mongolian Baiti"/>
+        <a:font script="Viet" typeface="Times New Roman"/>
+        <a:font script="Uigh" typeface="Microsoft Uighur"/>
+        <a:font script="Geor" typeface="Sylfaen"/>
+        <a:font script="Armn" typeface="Arial"/>
+        <a:font script="Bugi" typeface="Leelawadee UI"/>
+        <a:font script="Bopo" typeface="Microsoft JhengHei"/>
+        <a:font script="Java" typeface="Javanese Text"/>
+        <a:font script="Lisu" typeface="Segoe UI"/>
+        <a:font script="Mymr" typeface="Myanmar Text"/>
+        <a:font script="Nkoo" typeface="Ebrima"/>
+        <a:font script="Olck" typeface="Nirmala UI"/>
+        <a:font script="Osma" typeface="Ebrima"/>
+        <a:font script="Phag" typeface="Phagspa"/>
+        <a:font script="Syrn" typeface="Estrangelo Edessa"/>
+        <a:font script="Syrj" typeface="Estrangelo Edessa"/>
+        <a:font script="Syre" typeface="Estrangelo Edessa"/>
+        <a:font script="Sora" typeface="Nirmala UI"/>
+        <a:font script="Tale" typeface="Microsoft Tai Le"/>
+        <a:font script="Talu" typeface="Microsoft New Tai Lue"/>
+        <a:font script="Tfng" typeface="Ebrima"/>
+      </a:majorFont>
+      <a:minorFont>
+        <a:latin typeface="Calibri" panose="020F0502020204030204"/>
+        <a:ea typeface=""/>
+        <a:cs typeface=""/>
+        <a:font script="Jpan" typeface="游ゴシック"/>
+        <a:font script="Hang" typeface="맑은 고딕"/>
+        <a:font script="Hans" typeface="等线"/>
+        <a:font script="Hant" typeface="新細明體"/>
+        <a:font script="Arab" typeface="Arial"/>
+        <a:font script="Hebr" typeface="Arial"/>
+        <a:font script="Thai" typeface="Cordia New"/>
+        <a:font script="Ethi" typeface="Nyala"/>
+        <a:font script="Beng" typeface="Vrinda"/>
+        <a:font script="Gujr" typeface="Shruti"/>
+        <a:font script="Khmr" typeface="DaunPenh"/>
+        <a:font script="Knda" typeface="Tunga"/>
+        <a:font script="Guru" typeface="Raavi"/>
+        <a:font script="Cans" typeface="Euphemia"/>
+        <a:font script="Cher" typeface="Plantagenet Cherokee"/>
+        <a:font script="Yiii" typeface="Microsoft Yi Baiti"/>
+        <a:font script="Tibt" typeface="Microsoft Himalaya"/>
+        <a:font script="Thaa" typeface="MV Boli"/>
+        <a:font script="Deva" typeface="Mangal"/>
+        <a:font script="Telu" typeface="Gautami"/>
+        <a:font script="Taml" typeface="Latha"/>
+        <a:font script="Syrc" typeface="Estrangelo Edessa"/>
+        <a:font script="Orya" typeface="Kalinga"/>
+        <a:font script="Mlym" typeface="Kartika"/>
+        <a:font script="Laoo" typeface="DokChampa"/>
+        <a:font script="Sinh" typeface="Iskoola Pota"/>
+        <a:font script="Mong" typeface="Mongolian Baiti"/>
+        <a:font script="Viet" typeface="Arial"/>
+        <a:font script="Uigh" typeface="Microsoft Uighur"/>
+        <a:font script="Geor" typeface="Sylfaen"/>
+        <a:font script="Armn" typeface="Arial"/>
+        <a:font script="Bugi" typeface="Leelawadee UI"/>
+        <a:font script="Bopo" typeface="Microsoft JhengHei"/>
+        <a:font script="Java" typeface="Javanese Text"/>
+        <a:font script="Lisu" typeface="Segoe UI"/>
+        <a:font script="Mymr" typeface="Myanmar Text"/>
+        <a:font script="Nkoo" typeface="Ebrima"/>
+        <a:font script="Olck" typeface="Nirmala UI"/>
+        <a:font script="Osma" typeface="Ebrima"/>
+        <a:font script="Phag" typeface="Phagspa"/>
+        <a:font script="Syrn" typeface="Estrangelo Edessa"/>
+        <a:font script="Syrj" typeface="Estrangelo Edessa"/>
+        <a:font script="Syre" typeface="Estrangelo Edessa"/>
+        <a:font script="Sora" typeface="Nirmala UI"/>
+        <a:font script="Tale" typeface="Microsoft Tai Le"/>
+        <a:font script="Talu" typeface="Microsoft New Tai Lue"/>
+        <a:font script="Tfng" typeface="Ebrima"/>
+      </a:minorFont>
+    </a:fontScheme>
+    <a:fmtScheme name="Office">
+      <a:fillStyleLst>
+        <a:solidFill>
+          <a:schemeClr val="phClr"/>
+        </a:solidFill>
+        <a:gradFill rotWithShape="1">
+          <a:gsLst>
+            <a:gs pos="0">
+              <a:schemeClr val="phClr">
+                <a:lumMod val="110000"/>
+                <a:satMod val="105000"/>
+                <a:tint val="67000"/>
+              </a:schemeClr>
+            </a:gs>
+            <a:gs pos="50000">
+              <a:schemeClr val="phClr">
+                <a:lumMod val="105000"/>
+                <a:satMod val="103000"/>
+                <a:tint val="73000"/>
+              </a:schemeClr>
+            </a:gs>
+            <a:gs pos="100000">
+              <a:schemeClr val="phClr">
+                <a:lumMod val="105000"/>
+                <a:satMod val="109000"/>
+                <a:tint val="81000"/>
+              </a:schemeClr>
+            </a:gs>
+          </a:gsLst>
+          <a:lin ang="5400000" scaled="0"/>
+        </a:gradFill>
+        <a:gradFill rotWithShape="1">
+          <a:gsLst>
+            <a:gs pos="0">
+              <a:schemeClr val="phClr">
+                <a:satMod val="103000"/>
+                <a:lumMod val="102000"/>
+                <a:tint val="94000"/>
+              </a:schemeClr>
+            </a:gs>
+            <a:gs pos="50000">
+              <a:schemeClr val="phClr">
+                <a:satMod val="110000"/>
+                <a:lumMod val="100000"/>
+                <a:shade val="100000"/>
+              </a:schemeClr>
+            </a:gs>
+            <a:gs pos="100000">
+              <a:schemeClr val="phClr">
+                <a:lumMod val="99000"/>
+                <a:satMod val="120000"/>
+                <a:shade val="78000"/>
+              </a:schemeClr>
+            </a:gs>
+          </a:gsLst>
+          <a:lin ang="5400000" scaled="0"/>
+        </a:gradFill>
+      </a:fillStyleLst>
+      <a:lnStyleLst>
+        <a:ln w="6350" cap="flat" cmpd="sng" algn="ctr">
+          <a:solidFill>
+            <a:schemeClr val="phClr"/>
+          </a:solidFill>
+          <a:prstDash val="solid"/>
+          <a:miter lim="800000"/>
+        </a:ln>
+        <a:ln w="12700" cap="flat" cmpd="sng" algn="ctr">
+          <a:solidFill>
+            <a:schemeClr val="phClr"/>
+          </a:solidFill>
+          <a:prstDash val="solid"/>
+          <a:miter lim="800000"/>
+        </a:ln>
+        <a:ln w="19050" cap="flat" cmpd="sng" algn="ctr">
+          <a:solidFill>
+            <a:schemeClr val="phClr"/>
+          </a:solidFill>
+          <a:prstDash val="solid"/>
+          <a:miter lim="800000"/>
+        </a:ln>
+      </a:lnStyleLst>
+      <a:effectStyleLst>
+        <a:effectStyle>
+          <a:effectLst/>
+        </a:effectStyle>
+        <a:effectStyle>
+          <a:effectLst/>
+        </a:effectStyle>
+        <a:effectStyle>
+          <a:effectLst>
+            <a:outerShdw blurRad="57150" dist="19050" dir="5400000" algn="ctr" rotWithShape="0">
+              <a:srgbClr val="000000">
+                <a:alpha val="63000"/>
+              </a:srgbClr>
+            </a:outerShdw>
+          </a:effectLst>
+        </a:effectStyle>
+      </a:effectStyleLst>
+      <a:bgFillStyleLst>
+        <a:solidFill>
+          <a:schemeClr val="phClr"/>
+        </a:solidFill>
+        <a:solidFill>
+          <a:schemeClr val="phClr">
+            <a:tint val="95000"/>
+            <a:satMod val="170000"/>
+          </a:schemeClr>
+        </a:solidFill>
+        <a:gradFill rotWithShape="1">
+          <a:gsLst>
+            <a:gs pos="0">
+              <a:schemeClr val="phClr">
+                <a:tint val="93000"/>
+                <a:satMod val="150000"/>
+                <a:shade val="98000"/>
+                <a:lumMod val="102000"/>
+              </a:schemeClr>
+            </a:gs>
+            <a:gs pos="50000">
+              <a:schemeClr val="phClr">
+                <a:tint val="98000"/>
+                <a:satMod val="130000"/>
+                <a:shade val="90000"/>
+                <a:lumMod val="103000"/>
+              </a:schemeClr>
+            </a:gs>
+            <a:gs pos="100000">
+              <a:schemeClr val="phClr">
+                <a:shade val="63000"/>
+                <a:satMod val="120000"/>
+              </a:schemeClr>
+            </a:gs>
+          </a:gsLst>
+          <a:lin ang="5400000" scaled="0"/>
+        </a:gradFill>
+      </a:bgFillStyleLst>
+    </a:fmtScheme>
+  </a:themeElements>
+  <a:objectDefaults/>
+  <a:extraClrSchemeLst/>
+  <a:extLst>
+    <a:ext uri="{05A4C25C-085E-4340-85A3-A5531E510DB2}">
+      <thm15:themeFamily xmlns:thm15="http://schemas.microsoft.com/office/thememl/2012/main" name="Office Theme" id="{62F939B6-93AF-4DB8-9C6B-D6C7DFDC589F}" vid="{4A3C46E8-61CC-4603-A589-7422A47A8E4A}"/>
+    </a:ext>
+  </a:extLst>
+</a:theme>
 </file>